--- a/8.1_振动状态监测器_中期答辩.pptx
+++ b/8.1_振动状态监测器_中期答辩.pptx
@@ -4,26 +4,29 @@
   <p:sldMasterIdLst>
     <p:sldMasterId id="2147483648" r:id="rId1"/>
   </p:sldMasterIdLst>
+  <p:notesMasterIdLst>
+    <p:notesMasterId r:id="rId19"/>
+  </p:notesMasterIdLst>
   <p:sldIdLst>
-    <p:sldId id="256" r:id="rId7"/>
-    <p:sldId id="257" r:id="rId9"/>
-    <p:sldId id="258" r:id="rId10"/>
-    <p:sldId id="259" r:id="rId11"/>
-    <p:sldId id="260" r:id="rId12"/>
-    <p:sldId id="261" r:id="rId13"/>
-    <p:sldId id="262" r:id="rId14"/>
-    <p:sldId id="263" r:id="rId15"/>
-    <p:sldId id="264" r:id="rId16"/>
-    <p:sldId id="265" r:id="rId17"/>
-    <p:sldId id="266" r:id="rId18"/>
-    <p:sldId id="267" r:id="rId19"/>
-    <p:sldId id="268" r:id="rId20"/>
-    <p:sldId id="269" r:id="rId21"/>
-    <p:sldId id="270" r:id="rId22"/>
-    <p:sldId id="271" r:id="rId23"/>
-    <p:sldId id="272" r:id="rId24"/>
+    <p:sldId id="256" r:id="rId2"/>
+    <p:sldId id="257" r:id="rId3"/>
+    <p:sldId id="258" r:id="rId4"/>
+    <p:sldId id="259" r:id="rId5"/>
+    <p:sldId id="260" r:id="rId6"/>
+    <p:sldId id="261" r:id="rId7"/>
+    <p:sldId id="262" r:id="rId8"/>
+    <p:sldId id="263" r:id="rId9"/>
+    <p:sldId id="264" r:id="rId10"/>
+    <p:sldId id="265" r:id="rId11"/>
+    <p:sldId id="266" r:id="rId12"/>
+    <p:sldId id="267" r:id="rId13"/>
+    <p:sldId id="268" r:id="rId14"/>
+    <p:sldId id="269" r:id="rId15"/>
+    <p:sldId id="270" r:id="rId16"/>
+    <p:sldId id="271" r:id="rId17"/>
+    <p:sldId id="272" r:id="rId18"/>
   </p:sldIdLst>
-  <p:sldSz cx="12191695" cy="6858000" type="screen4x3"/>
+  <p:sldSz cx="12192000" cy="6858000"/>
   <p:notesSz cx="6858000" cy="9144000"/>
   <p:defaultTextStyle>
     <a:defPPr>
@@ -120,11 +123,27 @@
       </a:defRPr>
     </a:lvl9pPr>
   </p:defaultTextStyle>
+  <p:extLst>
+    <p:ext uri="{EFAFB233-063F-42B5-8137-9DF3F51BA10A}">
+      <p15:sldGuideLst xmlns:p15="http://schemas.microsoft.com/office/powerpoint/2012/main">
+        <p15:guide id="1" orient="horz" pos="2160">
+          <p15:clr>
+            <a:srgbClr val="A4A3A4"/>
+          </p15:clr>
+        </p15:guide>
+        <p15:guide id="2" pos="2880">
+          <p15:clr>
+            <a:srgbClr val="A4A3A4"/>
+          </p15:clr>
+        </p15:guide>
+      </p15:sldGuideLst>
+    </p:ext>
+  </p:extLst>
 </p:presentation>
 </file>
 
 <file path=ppt/notesMasters/notesMaster1.xml><?xml version="1.0" encoding="utf-8"?>
-<p:notesMaster xmlns:a="http://schemas.openxmlformats.org/drawingml/2006/main" xmlns:p="http://schemas.openxmlformats.org/presentationml/2006/main" xmlns:r="http://schemas.openxmlformats.org/officeDocument/2006/relationships">
+<p:notesMaster xmlns:a="http://schemas.openxmlformats.org/drawingml/2006/main" xmlns:r="http://schemas.openxmlformats.org/officeDocument/2006/relationships" xmlns:p="http://schemas.openxmlformats.org/presentationml/2006/main">
   <p:cSld>
     <p:bg>
       <p:bgRef idx="1001">
@@ -145,241 +164,16 @@
           <a:chExt cx="0" cy="0"/>
         </a:xfrm>
       </p:grpSpPr>
-      <p:sp>
-        <p:nvSpPr>
-          <p:cNvPr id="2" name="Header Placeholder 1"/>
-          <p:cNvSpPr>
-            <a:spLocks noGrp="1"/>
-          </p:cNvSpPr>
-          <p:nvPr>
-            <p:ph type="hdr" sz="quarter"/>
-          </p:nvPr>
-        </p:nvSpPr>
-        <p:spPr>
-          <a:xfrm>
-            <a:off x="0" y="0"/>
-            <a:ext cx="2971800" cy="457200"/>
-          </a:xfrm>
-          <a:prstGeom prst="rect">
-            <a:avLst/>
-          </a:prstGeom>
-        </p:spPr>
-        <p:txBody>
-          <a:bodyPr vert="horz" lIns="91440" tIns="45720" rIns="91440" bIns="45720" rtlCol="0"/>
-          <a:lstStyle>
-            <a:lvl1pPr algn="l">
-              <a:defRPr sz="1200"/>
-            </a:lvl1pPr>
-          </a:lstStyle>
-          <a:p>
-            <a:endParaRPr lang="en-US"/>
-          </a:p>
-        </p:txBody>
-      </p:sp>
-      <p:sp>
-        <p:nvSpPr>
-          <p:cNvPr id="3" name="Date Placeholder 2"/>
-          <p:cNvSpPr>
-            <a:spLocks noGrp="1"/>
-          </p:cNvSpPr>
-          <p:nvPr>
-            <p:ph type="dt" idx="1"/>
-          </p:nvPr>
-        </p:nvSpPr>
-        <p:spPr>
-          <a:xfrm>
-            <a:off x="3884613" y="0"/>
-            <a:ext cx="2971800" cy="457200"/>
-          </a:xfrm>
-          <a:prstGeom prst="rect">
-            <a:avLst/>
-          </a:prstGeom>
-        </p:spPr>
-        <p:txBody>
-          <a:bodyPr vert="horz" lIns="91440" tIns="45720" rIns="91440" bIns="45720" rtlCol="0"/>
-          <a:lstStyle>
-            <a:lvl1pPr algn="r">
-              <a:defRPr sz="1200"/>
-            </a:lvl1pPr>
-          </a:lstStyle>
-          <a:p>
-            <a:fld id="{0F89C1C7-3DCD-1040-A9CF-14679D8B5DDD}" type="datetimeFigureOut">
-              <a:rPr lang="en-US" smtClean="0"/>
-              <a:t>10/17/16</a:t>
-            </a:fld>
-            <a:endParaRPr lang="en-US"/>
-          </a:p>
-        </p:txBody>
-      </p:sp>
-      <p:sp>
-        <p:nvSpPr>
-          <p:cNvPr id="4" name="Slide Image Placeholder 3"/>
-          <p:cNvSpPr>
-            <a:spLocks noGrp="1" noRot="1" noChangeAspect="1"/>
-          </p:cNvSpPr>
-          <p:nvPr>
-            <p:ph type="sldImg" idx="2"/>
-          </p:nvPr>
-        </p:nvSpPr>
-        <p:spPr>
-          <a:xfrm>
-            <a:off x="1143000" y="685800"/>
-            <a:ext cx="4572000" cy="3429000"/>
-          </a:xfrm>
-          <a:prstGeom prst="rect">
-            <a:avLst/>
-          </a:prstGeom>
-          <a:noFill/>
-          <a:ln w="12700">
-            <a:solidFill>
-              <a:prstClr val="black"/>
-            </a:solidFill>
-          </a:ln>
-        </p:spPr>
-        <p:txBody>
-          <a:bodyPr vert="horz" lIns="91440" tIns="45720" rIns="91440" bIns="45720" rtlCol="0" anchor="ctr"/>
-          <a:lstStyle/>
-          <a:p>
-            <a:endParaRPr lang="en-US"/>
-          </a:p>
-        </p:txBody>
-      </p:sp>
-      <p:sp>
-        <p:nvSpPr>
-          <p:cNvPr id="5" name="Notes Placeholder 4"/>
-          <p:cNvSpPr>
-            <a:spLocks noGrp="1"/>
-          </p:cNvSpPr>
-          <p:nvPr>
-            <p:ph type="body" sz="quarter" idx="3"/>
-          </p:nvPr>
-        </p:nvSpPr>
-        <p:spPr>
-          <a:xfrm>
-            <a:off x="685800" y="4343400"/>
-            <a:ext cx="5486400" cy="4114800"/>
-          </a:xfrm>
-          <a:prstGeom prst="rect">
-            <a:avLst/>
-          </a:prstGeom>
-        </p:spPr>
-        <p:txBody>
-          <a:bodyPr vert="horz" lIns="91440" tIns="45720" rIns="91440" bIns="45720" rtlCol="0"/>
-          <a:lstStyle/>
-          <a:p>
-            <a:pPr lvl="0"/>
-            <a:r>
-              <a:rPr lang="en-US" smtClean="0"/>
-              <a:t>Click to edit Master text styles</a:t>
-            </a:r>
-          </a:p>
-          <a:p>
-            <a:pPr lvl="1"/>
-            <a:r>
-              <a:rPr lang="en-US" smtClean="0"/>
-              <a:t>Second level</a:t>
-            </a:r>
-          </a:p>
-          <a:p>
-            <a:pPr lvl="2"/>
-            <a:r>
-              <a:rPr lang="en-US" smtClean="0"/>
-              <a:t>Third level</a:t>
-            </a:r>
-          </a:p>
-          <a:p>
-            <a:pPr lvl="3"/>
-            <a:r>
-              <a:rPr lang="en-US" smtClean="0"/>
-              <a:t>Fourth level</a:t>
-            </a:r>
-          </a:p>
-          <a:p>
-            <a:pPr lvl="4"/>
-            <a:r>
-              <a:rPr lang="en-US" smtClean="0"/>
-              <a:t>Fifth level</a:t>
-            </a:r>
-            <a:endParaRPr lang="en-US"/>
-          </a:p>
-        </p:txBody>
-      </p:sp>
-      <p:sp>
-        <p:nvSpPr>
-          <p:cNvPr id="6" name="Footer Placeholder 5"/>
-          <p:cNvSpPr>
-            <a:spLocks noGrp="1"/>
-          </p:cNvSpPr>
-          <p:nvPr>
-            <p:ph type="ftr" sz="quarter" idx="4"/>
-          </p:nvPr>
-        </p:nvSpPr>
-        <p:spPr>
-          <a:xfrm>
-            <a:off x="0" y="8685213"/>
-            <a:ext cx="2971800" cy="457200"/>
-          </a:xfrm>
-          <a:prstGeom prst="rect">
-            <a:avLst/>
-          </a:prstGeom>
-        </p:spPr>
-        <p:txBody>
-          <a:bodyPr vert="horz" lIns="91440" tIns="45720" rIns="91440" bIns="45720" rtlCol="0" anchor="b"/>
-          <a:lstStyle>
-            <a:lvl1pPr algn="l">
-              <a:defRPr sz="1200"/>
-            </a:lvl1pPr>
-          </a:lstStyle>
-          <a:p>
-            <a:endParaRPr lang="en-US"/>
-          </a:p>
-        </p:txBody>
-      </p:sp>
-      <p:sp>
-        <p:nvSpPr>
-          <p:cNvPr id="7" name="Slide Number Placeholder 6"/>
-          <p:cNvSpPr>
-            <a:spLocks noGrp="1"/>
-          </p:cNvSpPr>
-          <p:nvPr>
-            <p:ph type="sldNum" sz="quarter" idx="5"/>
-          </p:nvPr>
-        </p:nvSpPr>
-        <p:spPr>
-          <a:xfrm>
-            <a:off x="3884613" y="8685213"/>
-            <a:ext cx="2971800" cy="457200"/>
-          </a:xfrm>
-          <a:prstGeom prst="rect">
-            <a:avLst/>
-          </a:prstGeom>
-        </p:spPr>
-        <p:txBody>
-          <a:bodyPr vert="horz" lIns="91440" tIns="45720" rIns="91440" bIns="45720" rtlCol="0" anchor="b"/>
-          <a:lstStyle>
-            <a:lvl1pPr algn="r">
-              <a:defRPr sz="1200"/>
-            </a:lvl1pPr>
-          </a:lstStyle>
-          <a:p>
-            <a:fld id="{BB5E49A5-4136-284D-997B-48E1D791AD67}" type="slidenum">
-              <a:rPr lang="en-US" smtClean="0"/>
-              <a:t>‹#›</a:t>
-            </a:fld>
-            <a:endParaRPr lang="en-US"/>
-          </a:p>
-        </p:txBody>
-      </p:sp>
     </p:spTree>
     <p:extLst>
       <p:ext uri="{BB962C8B-B14F-4D97-AF65-F5344CB8AC3E}">
-        <p14:creationId xmlns:p14="http://schemas.microsoft.com/office/powerpoint/2010/main" val="2623252185"/>
+        <p14:creationId xmlns:p14="http://schemas.microsoft.com/office/powerpoint/2010/main" val="1969363795"/>
       </p:ext>
     </p:extLst>
   </p:cSld>
   <p:clrMap bg1="lt1" tx1="dk1" bg2="lt2" tx2="dk2" accent1="accent1" accent2="accent2" accent3="accent3" accent4="accent4" accent5="accent5" accent6="accent6" hlink="hlink" folHlink="folHlink"/>
   <p:notesStyle>
-    <a:lvl1pPr marL="0" algn="l" defTabSz="457200" rtl="0" eaLnBrk="1" latinLnBrk="0" hangingPunct="1">
+    <a:lvl1pPr marL="0" algn="l" defTabSz="914400" rtl="0" eaLnBrk="1" latinLnBrk="0" hangingPunct="1">
       <a:defRPr sz="1200" kern="1200">
         <a:solidFill>
           <a:schemeClr val="tx1"/>
@@ -389,7 +183,7 @@
         <a:cs typeface="+mn-cs"/>
       </a:defRPr>
     </a:lvl1pPr>
-    <a:lvl2pPr marL="457200" algn="l" defTabSz="457200" rtl="0" eaLnBrk="1" latinLnBrk="0" hangingPunct="1">
+    <a:lvl2pPr marL="457200" algn="l" defTabSz="914400" rtl="0" eaLnBrk="1" latinLnBrk="0" hangingPunct="1">
       <a:defRPr sz="1200" kern="1200">
         <a:solidFill>
           <a:schemeClr val="tx1"/>
@@ -399,7 +193,7 @@
         <a:cs typeface="+mn-cs"/>
       </a:defRPr>
     </a:lvl2pPr>
-    <a:lvl3pPr marL="914400" algn="l" defTabSz="457200" rtl="0" eaLnBrk="1" latinLnBrk="0" hangingPunct="1">
+    <a:lvl3pPr marL="914400" algn="l" defTabSz="914400" rtl="0" eaLnBrk="1" latinLnBrk="0" hangingPunct="1">
       <a:defRPr sz="1200" kern="1200">
         <a:solidFill>
           <a:schemeClr val="tx1"/>
@@ -409,7 +203,7 @@
         <a:cs typeface="+mn-cs"/>
       </a:defRPr>
     </a:lvl3pPr>
-    <a:lvl4pPr marL="1371600" algn="l" defTabSz="457200" rtl="0" eaLnBrk="1" latinLnBrk="0" hangingPunct="1">
+    <a:lvl4pPr marL="1371600" algn="l" defTabSz="914400" rtl="0" eaLnBrk="1" latinLnBrk="0" hangingPunct="1">
       <a:defRPr sz="1200" kern="1200">
         <a:solidFill>
           <a:schemeClr val="tx1"/>
@@ -419,7 +213,7 @@
         <a:cs typeface="+mn-cs"/>
       </a:defRPr>
     </a:lvl4pPr>
-    <a:lvl5pPr marL="1828800" algn="l" defTabSz="457200" rtl="0" eaLnBrk="1" latinLnBrk="0" hangingPunct="1">
+    <a:lvl5pPr marL="1828800" algn="l" defTabSz="914400" rtl="0" eaLnBrk="1" latinLnBrk="0" hangingPunct="1">
       <a:defRPr sz="1200" kern="1200">
         <a:solidFill>
           <a:schemeClr val="tx1"/>
@@ -429,7 +223,7 @@
         <a:cs typeface="+mn-cs"/>
       </a:defRPr>
     </a:lvl5pPr>
-    <a:lvl6pPr marL="2286000" algn="l" defTabSz="457200" rtl="0" eaLnBrk="1" latinLnBrk="0" hangingPunct="1">
+    <a:lvl6pPr marL="2286000" algn="l" defTabSz="914400" rtl="0" eaLnBrk="1" latinLnBrk="0" hangingPunct="1">
       <a:defRPr sz="1200" kern="1200">
         <a:solidFill>
           <a:schemeClr val="tx1"/>
@@ -439,7 +233,7 @@
         <a:cs typeface="+mn-cs"/>
       </a:defRPr>
     </a:lvl6pPr>
-    <a:lvl7pPr marL="2743200" algn="l" defTabSz="457200" rtl="0" eaLnBrk="1" latinLnBrk="0" hangingPunct="1">
+    <a:lvl7pPr marL="2743200" algn="l" defTabSz="914400" rtl="0" eaLnBrk="1" latinLnBrk="0" hangingPunct="1">
       <a:defRPr sz="1200" kern="1200">
         <a:solidFill>
           <a:schemeClr val="tx1"/>
@@ -449,7 +243,7 @@
         <a:cs typeface="+mn-cs"/>
       </a:defRPr>
     </a:lvl7pPr>
-    <a:lvl8pPr marL="3200400" algn="l" defTabSz="457200" rtl="0" eaLnBrk="1" latinLnBrk="0" hangingPunct="1">
+    <a:lvl8pPr marL="3200400" algn="l" defTabSz="914400" rtl="0" eaLnBrk="1" latinLnBrk="0" hangingPunct="1">
       <a:defRPr sz="1200" kern="1200">
         <a:solidFill>
           <a:schemeClr val="tx1"/>
@@ -459,7 +253,7 @@
         <a:cs typeface="+mn-cs"/>
       </a:defRPr>
     </a:lvl8pPr>
-    <a:lvl9pPr marL="3657600" algn="l" defTabSz="457200" rtl="0" eaLnBrk="1" latinLnBrk="0" hangingPunct="1">
+    <a:lvl9pPr marL="3657600" algn="l" defTabSz="914400" rtl="0" eaLnBrk="1" latinLnBrk="0" hangingPunct="1">
       <a:defRPr sz="1200" kern="1200">
         <a:solidFill>
           <a:schemeClr val="tx1"/>
@@ -474,7 +268,7 @@
 </file>
 
 <file path=ppt/notesSlides/notesSlide1.xml><?xml version="1.0" encoding="utf-8"?>
-<p:notes xmlns:a="http://schemas.openxmlformats.org/drawingml/2006/main" xmlns:p="http://schemas.openxmlformats.org/presentationml/2006/main" xmlns:r="http://schemas.openxmlformats.org/officeDocument/2006/relationships">
+<p:notes xmlns:a="http://schemas.openxmlformats.org/drawingml/2006/main" xmlns:r="http://schemas.openxmlformats.org/officeDocument/2006/relationships" xmlns:p="http://schemas.openxmlformats.org/presentationml/2006/main">
   <p:cSld>
     <p:spTree>
       <p:nvGrpSpPr>
@@ -494,7 +288,7 @@
         <p:nvSpPr>
           <p:cNvPr id="2" name="Slide Image Placeholder 1"/>
           <p:cNvSpPr>
-            <a:spLocks noGrp="1"/>
+            <a:spLocks noGrp="1" noRot="1" noChangeAspect="1"/>
           </p:cNvSpPr>
           <p:nvPr>
             <p:ph type="sldImg" idx="2"/>
@@ -509,7 +303,7 @@
             <a:spLocks noGrp="1"/>
           </p:cNvSpPr>
           <p:nvPr>
-            <p:ph type="body" idx="3" sz="quarter"/>
+            <p:ph type="body" sz="quarter" idx="3"/>
           </p:nvPr>
         </p:nvSpPr>
         <p:spPr/>
@@ -535,7 +329,7 @@
             <a:spLocks noGrp="1"/>
           </p:cNvSpPr>
           <p:nvPr>
-            <p:ph type="sldNum" idx="5" sz="quarter"/>
+            <p:ph type="sldNum" sz="quarter" idx="5"/>
           </p:nvPr>
         </p:nvSpPr>
         <p:spPr/>
@@ -549,7 +343,7 @@
 </file>
 
 <file path=ppt/notesSlides/notesSlide10.xml><?xml version="1.0" encoding="utf-8"?>
-<p:notes xmlns:a="http://schemas.openxmlformats.org/drawingml/2006/main" xmlns:p="http://schemas.openxmlformats.org/presentationml/2006/main" xmlns:r="http://schemas.openxmlformats.org/officeDocument/2006/relationships">
+<p:notes xmlns:a="http://schemas.openxmlformats.org/drawingml/2006/main" xmlns:r="http://schemas.openxmlformats.org/officeDocument/2006/relationships" xmlns:p="http://schemas.openxmlformats.org/presentationml/2006/main">
   <p:cSld>
     <p:spTree>
       <p:nvGrpSpPr>
@@ -569,7 +363,7 @@
         <p:nvSpPr>
           <p:cNvPr id="2" name="Slide Image Placeholder 1"/>
           <p:cNvSpPr>
-            <a:spLocks noGrp="1"/>
+            <a:spLocks noGrp="1" noRot="1" noChangeAspect="1"/>
           </p:cNvSpPr>
           <p:nvPr>
             <p:ph type="sldImg" idx="2"/>
@@ -584,7 +378,7 @@
             <a:spLocks noGrp="1"/>
           </p:cNvSpPr>
           <p:nvPr>
-            <p:ph type="body" idx="3" sz="quarter"/>
+            <p:ph type="body" sz="quarter" idx="3"/>
           </p:nvPr>
         </p:nvSpPr>
         <p:spPr/>
@@ -605,7 +399,7 @@
             <a:spLocks noGrp="1"/>
           </p:cNvSpPr>
           <p:nvPr>
-            <p:ph type="sldNum" idx="5" sz="quarter"/>
+            <p:ph type="sldNum" sz="quarter" idx="5"/>
           </p:nvPr>
         </p:nvSpPr>
         <p:spPr/>
@@ -619,7 +413,7 @@
 </file>
 
 <file path=ppt/notesSlides/notesSlide11.xml><?xml version="1.0" encoding="utf-8"?>
-<p:notes xmlns:a="http://schemas.openxmlformats.org/drawingml/2006/main" xmlns:p="http://schemas.openxmlformats.org/presentationml/2006/main" xmlns:r="http://schemas.openxmlformats.org/officeDocument/2006/relationships">
+<p:notes xmlns:a="http://schemas.openxmlformats.org/drawingml/2006/main" xmlns:r="http://schemas.openxmlformats.org/officeDocument/2006/relationships" xmlns:p="http://schemas.openxmlformats.org/presentationml/2006/main">
   <p:cSld>
     <p:spTree>
       <p:nvGrpSpPr>
@@ -639,7 +433,7 @@
         <p:nvSpPr>
           <p:cNvPr id="2" name="Slide Image Placeholder 1"/>
           <p:cNvSpPr>
-            <a:spLocks noGrp="1"/>
+            <a:spLocks noGrp="1" noRot="1" noChangeAspect="1"/>
           </p:cNvSpPr>
           <p:nvPr>
             <p:ph type="sldImg" idx="2"/>
@@ -654,7 +448,7 @@
             <a:spLocks noGrp="1"/>
           </p:cNvSpPr>
           <p:nvPr>
-            <p:ph type="body" idx="3" sz="quarter"/>
+            <p:ph type="body" sz="quarter" idx="3"/>
           </p:nvPr>
         </p:nvSpPr>
         <p:spPr/>
@@ -675,7 +469,7 @@
             <a:spLocks noGrp="1"/>
           </p:cNvSpPr>
           <p:nvPr>
-            <p:ph type="sldNum" idx="5" sz="quarter"/>
+            <p:ph type="sldNum" sz="quarter" idx="5"/>
           </p:nvPr>
         </p:nvSpPr>
         <p:spPr/>
@@ -689,7 +483,7 @@
 </file>
 
 <file path=ppt/notesSlides/notesSlide12.xml><?xml version="1.0" encoding="utf-8"?>
-<p:notes xmlns:a="http://schemas.openxmlformats.org/drawingml/2006/main" xmlns:p="http://schemas.openxmlformats.org/presentationml/2006/main" xmlns:r="http://schemas.openxmlformats.org/officeDocument/2006/relationships">
+<p:notes xmlns:a="http://schemas.openxmlformats.org/drawingml/2006/main" xmlns:r="http://schemas.openxmlformats.org/officeDocument/2006/relationships" xmlns:p="http://schemas.openxmlformats.org/presentationml/2006/main">
   <p:cSld>
     <p:spTree>
       <p:nvGrpSpPr>
@@ -709,7 +503,7 @@
         <p:nvSpPr>
           <p:cNvPr id="2" name="Slide Image Placeholder 1"/>
           <p:cNvSpPr>
-            <a:spLocks noGrp="1"/>
+            <a:spLocks noGrp="1" noRot="1" noChangeAspect="1"/>
           </p:cNvSpPr>
           <p:nvPr>
             <p:ph type="sldImg" idx="2"/>
@@ -724,7 +518,7 @@
             <a:spLocks noGrp="1"/>
           </p:cNvSpPr>
           <p:nvPr>
-            <p:ph type="body" idx="3" sz="quarter"/>
+            <p:ph type="body" sz="quarter" idx="3"/>
           </p:nvPr>
         </p:nvSpPr>
         <p:spPr/>
@@ -745,7 +539,7 @@
             <a:spLocks noGrp="1"/>
           </p:cNvSpPr>
           <p:nvPr>
-            <p:ph type="sldNum" idx="5" sz="quarter"/>
+            <p:ph type="sldNum" sz="quarter" idx="5"/>
           </p:nvPr>
         </p:nvSpPr>
         <p:spPr/>
@@ -759,7 +553,7 @@
 </file>
 
 <file path=ppt/notesSlides/notesSlide13.xml><?xml version="1.0" encoding="utf-8"?>
-<p:notes xmlns:a="http://schemas.openxmlformats.org/drawingml/2006/main" xmlns:p="http://schemas.openxmlformats.org/presentationml/2006/main" xmlns:r="http://schemas.openxmlformats.org/officeDocument/2006/relationships">
+<p:notes xmlns:a="http://schemas.openxmlformats.org/drawingml/2006/main" xmlns:r="http://schemas.openxmlformats.org/officeDocument/2006/relationships" xmlns:p="http://schemas.openxmlformats.org/presentationml/2006/main">
   <p:cSld>
     <p:spTree>
       <p:nvGrpSpPr>
@@ -779,7 +573,7 @@
         <p:nvSpPr>
           <p:cNvPr id="2" name="Slide Image Placeholder 1"/>
           <p:cNvSpPr>
-            <a:spLocks noGrp="1"/>
+            <a:spLocks noGrp="1" noRot="1" noChangeAspect="1"/>
           </p:cNvSpPr>
           <p:nvPr>
             <p:ph type="sldImg" idx="2"/>
@@ -794,7 +588,7 @@
             <a:spLocks noGrp="1"/>
           </p:cNvSpPr>
           <p:nvPr>
-            <p:ph type="body" idx="3" sz="quarter"/>
+            <p:ph type="body" sz="quarter" idx="3"/>
           </p:nvPr>
         </p:nvSpPr>
         <p:spPr/>
@@ -815,7 +609,7 @@
             <a:spLocks noGrp="1"/>
           </p:cNvSpPr>
           <p:nvPr>
-            <p:ph type="sldNum" idx="5" sz="quarter"/>
+            <p:ph type="sldNum" sz="quarter" idx="5"/>
           </p:nvPr>
         </p:nvSpPr>
         <p:spPr/>
@@ -829,7 +623,7 @@
 </file>
 
 <file path=ppt/notesSlides/notesSlide14.xml><?xml version="1.0" encoding="utf-8"?>
-<p:notes xmlns:a="http://schemas.openxmlformats.org/drawingml/2006/main" xmlns:p="http://schemas.openxmlformats.org/presentationml/2006/main" xmlns:r="http://schemas.openxmlformats.org/officeDocument/2006/relationships">
+<p:notes xmlns:a="http://schemas.openxmlformats.org/drawingml/2006/main" xmlns:r="http://schemas.openxmlformats.org/officeDocument/2006/relationships" xmlns:p="http://schemas.openxmlformats.org/presentationml/2006/main">
   <p:cSld>
     <p:spTree>
       <p:nvGrpSpPr>
@@ -849,7 +643,7 @@
         <p:nvSpPr>
           <p:cNvPr id="2" name="Slide Image Placeholder 1"/>
           <p:cNvSpPr>
-            <a:spLocks noGrp="1"/>
+            <a:spLocks noGrp="1" noRot="1" noChangeAspect="1"/>
           </p:cNvSpPr>
           <p:nvPr>
             <p:ph type="sldImg" idx="2"/>
@@ -864,7 +658,7 @@
             <a:spLocks noGrp="1"/>
           </p:cNvSpPr>
           <p:nvPr>
-            <p:ph type="body" idx="3" sz="quarter"/>
+            <p:ph type="body" sz="quarter" idx="3"/>
           </p:nvPr>
         </p:nvSpPr>
         <p:spPr/>
@@ -885,7 +679,7 @@
             <a:spLocks noGrp="1"/>
           </p:cNvSpPr>
           <p:nvPr>
-            <p:ph type="sldNum" idx="5" sz="quarter"/>
+            <p:ph type="sldNum" sz="quarter" idx="5"/>
           </p:nvPr>
         </p:nvSpPr>
         <p:spPr/>
@@ -899,7 +693,7 @@
 </file>
 
 <file path=ppt/notesSlides/notesSlide15.xml><?xml version="1.0" encoding="utf-8"?>
-<p:notes xmlns:a="http://schemas.openxmlformats.org/drawingml/2006/main" xmlns:p="http://schemas.openxmlformats.org/presentationml/2006/main" xmlns:r="http://schemas.openxmlformats.org/officeDocument/2006/relationships">
+<p:notes xmlns:a="http://schemas.openxmlformats.org/drawingml/2006/main" xmlns:r="http://schemas.openxmlformats.org/officeDocument/2006/relationships" xmlns:p="http://schemas.openxmlformats.org/presentationml/2006/main">
   <p:cSld>
     <p:spTree>
       <p:nvGrpSpPr>
@@ -919,7 +713,7 @@
         <p:nvSpPr>
           <p:cNvPr id="2" name="Slide Image Placeholder 1"/>
           <p:cNvSpPr>
-            <a:spLocks noGrp="1"/>
+            <a:spLocks noGrp="1" noRot="1" noChangeAspect="1"/>
           </p:cNvSpPr>
           <p:nvPr>
             <p:ph type="sldImg" idx="2"/>
@@ -934,7 +728,7 @@
             <a:spLocks noGrp="1"/>
           </p:cNvSpPr>
           <p:nvPr>
-            <p:ph type="body" idx="3" sz="quarter"/>
+            <p:ph type="body" sz="quarter" idx="3"/>
           </p:nvPr>
         </p:nvSpPr>
         <p:spPr/>
@@ -955,7 +749,7 @@
             <a:spLocks noGrp="1"/>
           </p:cNvSpPr>
           <p:nvPr>
-            <p:ph type="sldNum" idx="5" sz="quarter"/>
+            <p:ph type="sldNum" sz="quarter" idx="5"/>
           </p:nvPr>
         </p:nvSpPr>
         <p:spPr/>
@@ -969,7 +763,7 @@
 </file>
 
 <file path=ppt/notesSlides/notesSlide16.xml><?xml version="1.0" encoding="utf-8"?>
-<p:notes xmlns:a="http://schemas.openxmlformats.org/drawingml/2006/main" xmlns:p="http://schemas.openxmlformats.org/presentationml/2006/main" xmlns:r="http://schemas.openxmlformats.org/officeDocument/2006/relationships">
+<p:notes xmlns:a="http://schemas.openxmlformats.org/drawingml/2006/main" xmlns:r="http://schemas.openxmlformats.org/officeDocument/2006/relationships" xmlns:p="http://schemas.openxmlformats.org/presentationml/2006/main">
   <p:cSld>
     <p:spTree>
       <p:nvGrpSpPr>
@@ -989,7 +783,7 @@
         <p:nvSpPr>
           <p:cNvPr id="2" name="Slide Image Placeholder 1"/>
           <p:cNvSpPr>
-            <a:spLocks noGrp="1"/>
+            <a:spLocks noGrp="1" noRot="1" noChangeAspect="1"/>
           </p:cNvSpPr>
           <p:nvPr>
             <p:ph type="sldImg" idx="2"/>
@@ -1004,7 +798,7 @@
             <a:spLocks noGrp="1"/>
           </p:cNvSpPr>
           <p:nvPr>
-            <p:ph type="body" idx="3" sz="quarter"/>
+            <p:ph type="body" sz="quarter" idx="3"/>
           </p:nvPr>
         </p:nvSpPr>
         <p:spPr/>
@@ -1025,7 +819,7 @@
             <a:spLocks noGrp="1"/>
           </p:cNvSpPr>
           <p:nvPr>
-            <p:ph type="sldNum" idx="5" sz="quarter"/>
+            <p:ph type="sldNum" sz="quarter" idx="5"/>
           </p:nvPr>
         </p:nvSpPr>
         <p:spPr/>
@@ -1039,7 +833,7 @@
 </file>
 
 <file path=ppt/notesSlides/notesSlide17.xml><?xml version="1.0" encoding="utf-8"?>
-<p:notes xmlns:a="http://schemas.openxmlformats.org/drawingml/2006/main" xmlns:p="http://schemas.openxmlformats.org/presentationml/2006/main" xmlns:r="http://schemas.openxmlformats.org/officeDocument/2006/relationships">
+<p:notes xmlns:a="http://schemas.openxmlformats.org/drawingml/2006/main" xmlns:r="http://schemas.openxmlformats.org/officeDocument/2006/relationships" xmlns:p="http://schemas.openxmlformats.org/presentationml/2006/main">
   <p:cSld>
     <p:spTree>
       <p:nvGrpSpPr>
@@ -1059,7 +853,7 @@
         <p:nvSpPr>
           <p:cNvPr id="2" name="Slide Image Placeholder 1"/>
           <p:cNvSpPr>
-            <a:spLocks noGrp="1"/>
+            <a:spLocks noGrp="1" noRot="1" noChangeAspect="1"/>
           </p:cNvSpPr>
           <p:nvPr>
             <p:ph type="sldImg" idx="2"/>
@@ -1074,7 +868,7 @@
             <a:spLocks noGrp="1"/>
           </p:cNvSpPr>
           <p:nvPr>
-            <p:ph type="body" idx="3" sz="quarter"/>
+            <p:ph type="body" sz="quarter" idx="3"/>
           </p:nvPr>
         </p:nvSpPr>
         <p:spPr/>
@@ -1095,7 +889,7 @@
             <a:spLocks noGrp="1"/>
           </p:cNvSpPr>
           <p:nvPr>
-            <p:ph type="sldNum" idx="5" sz="quarter"/>
+            <p:ph type="sldNum" sz="quarter" idx="5"/>
           </p:nvPr>
         </p:nvSpPr>
         <p:spPr/>
@@ -1109,7 +903,7 @@
 </file>
 
 <file path=ppt/notesSlides/notesSlide2.xml><?xml version="1.0" encoding="utf-8"?>
-<p:notes xmlns:a="http://schemas.openxmlformats.org/drawingml/2006/main" xmlns:p="http://schemas.openxmlformats.org/presentationml/2006/main" xmlns:r="http://schemas.openxmlformats.org/officeDocument/2006/relationships">
+<p:notes xmlns:a="http://schemas.openxmlformats.org/drawingml/2006/main" xmlns:r="http://schemas.openxmlformats.org/officeDocument/2006/relationships" xmlns:p="http://schemas.openxmlformats.org/presentationml/2006/main">
   <p:cSld>
     <p:spTree>
       <p:nvGrpSpPr>
@@ -1129,7 +923,7 @@
         <p:nvSpPr>
           <p:cNvPr id="2" name="Slide Image Placeholder 1"/>
           <p:cNvSpPr>
-            <a:spLocks noGrp="1"/>
+            <a:spLocks noGrp="1" noRot="1" noChangeAspect="1"/>
           </p:cNvSpPr>
           <p:nvPr>
             <p:ph type="sldImg" idx="2"/>
@@ -1144,7 +938,7 @@
             <a:spLocks noGrp="1"/>
           </p:cNvSpPr>
           <p:nvPr>
-            <p:ph type="body" idx="3" sz="quarter"/>
+            <p:ph type="body" sz="quarter" idx="3"/>
           </p:nvPr>
         </p:nvSpPr>
         <p:spPr/>
@@ -1165,7 +959,7 @@
             <a:spLocks noGrp="1"/>
           </p:cNvSpPr>
           <p:nvPr>
-            <p:ph type="sldNum" idx="5" sz="quarter"/>
+            <p:ph type="sldNum" sz="quarter" idx="5"/>
           </p:nvPr>
         </p:nvSpPr>
         <p:spPr/>
@@ -1179,7 +973,7 @@
 </file>
 
 <file path=ppt/notesSlides/notesSlide3.xml><?xml version="1.0" encoding="utf-8"?>
-<p:notes xmlns:a="http://schemas.openxmlformats.org/drawingml/2006/main" xmlns:p="http://schemas.openxmlformats.org/presentationml/2006/main" xmlns:r="http://schemas.openxmlformats.org/officeDocument/2006/relationships">
+<p:notes xmlns:a="http://schemas.openxmlformats.org/drawingml/2006/main" xmlns:r="http://schemas.openxmlformats.org/officeDocument/2006/relationships" xmlns:p="http://schemas.openxmlformats.org/presentationml/2006/main">
   <p:cSld>
     <p:spTree>
       <p:nvGrpSpPr>
@@ -1199,7 +993,7 @@
         <p:nvSpPr>
           <p:cNvPr id="2" name="Slide Image Placeholder 1"/>
           <p:cNvSpPr>
-            <a:spLocks noGrp="1"/>
+            <a:spLocks noGrp="1" noRot="1" noChangeAspect="1"/>
           </p:cNvSpPr>
           <p:nvPr>
             <p:ph type="sldImg" idx="2"/>
@@ -1214,7 +1008,7 @@
             <a:spLocks noGrp="1"/>
           </p:cNvSpPr>
           <p:nvPr>
-            <p:ph type="body" idx="3" sz="quarter"/>
+            <p:ph type="body" sz="quarter" idx="3"/>
           </p:nvPr>
         </p:nvSpPr>
         <p:spPr/>
@@ -1223,7 +1017,7 @@
           <a:lstStyle/>
           <a:p>
             <a:r>
-              <a:t>这一部分我讲背景：为什么做这件事、以及我们面对的三个约束——预算 150、不能焊接、要能被复制。最后我们实际花了 119.5 元。</a:t>
+              <a:t>这一部分我讲背景：为什么要做这件事、以及本课题的设计目标。重点是说明这类故障在早期都有振动特征的变化，因此可以用较简单的方案实现监测。</a:t>
             </a:r>
           </a:p>
         </p:txBody>
@@ -1235,7 +1029,7 @@
             <a:spLocks noGrp="1"/>
           </p:cNvSpPr>
           <p:nvPr>
-            <p:ph type="sldNum" idx="5" sz="quarter"/>
+            <p:ph type="sldNum" sz="quarter" idx="5"/>
           </p:nvPr>
         </p:nvSpPr>
         <p:spPr/>
@@ -1249,7 +1043,7 @@
 </file>
 
 <file path=ppt/notesSlides/notesSlide4.xml><?xml version="1.0" encoding="utf-8"?>
-<p:notes xmlns:a="http://schemas.openxmlformats.org/drawingml/2006/main" xmlns:p="http://schemas.openxmlformats.org/presentationml/2006/main" xmlns:r="http://schemas.openxmlformats.org/officeDocument/2006/relationships">
+<p:notes xmlns:a="http://schemas.openxmlformats.org/drawingml/2006/main" xmlns:r="http://schemas.openxmlformats.org/officeDocument/2006/relationships" xmlns:p="http://schemas.openxmlformats.org/presentationml/2006/main">
   <p:cSld>
     <p:spTree>
       <p:nvGrpSpPr>
@@ -1269,7 +1063,7 @@
         <p:nvSpPr>
           <p:cNvPr id="2" name="Slide Image Placeholder 1"/>
           <p:cNvSpPr>
-            <a:spLocks noGrp="1"/>
+            <a:spLocks noGrp="1" noRot="1" noChangeAspect="1"/>
           </p:cNvSpPr>
           <p:nvPr>
             <p:ph type="sldImg" idx="2"/>
@@ -1284,7 +1078,7 @@
             <a:spLocks noGrp="1"/>
           </p:cNvSpPr>
           <p:nvPr>
-            <p:ph type="body" idx="3" sz="quarter"/>
+            <p:ph type="body" sz="quarter" idx="3"/>
           </p:nvPr>
         </p:nvSpPr>
         <p:spPr/>
@@ -1305,7 +1099,7 @@
             <a:spLocks noGrp="1"/>
           </p:cNvSpPr>
           <p:nvPr>
-            <p:ph type="sldNum" idx="5" sz="quarter"/>
+            <p:ph type="sldNum" sz="quarter" idx="5"/>
           </p:nvPr>
         </p:nvSpPr>
         <p:spPr/>
@@ -1319,7 +1113,7 @@
 </file>
 
 <file path=ppt/notesSlides/notesSlide5.xml><?xml version="1.0" encoding="utf-8"?>
-<p:notes xmlns:a="http://schemas.openxmlformats.org/drawingml/2006/main" xmlns:p="http://schemas.openxmlformats.org/presentationml/2006/main" xmlns:r="http://schemas.openxmlformats.org/officeDocument/2006/relationships">
+<p:notes xmlns:a="http://schemas.openxmlformats.org/drawingml/2006/main" xmlns:r="http://schemas.openxmlformats.org/officeDocument/2006/relationships" xmlns:p="http://schemas.openxmlformats.org/presentationml/2006/main">
   <p:cSld>
     <p:spTree>
       <p:nvGrpSpPr>
@@ -1339,7 +1133,7 @@
         <p:nvSpPr>
           <p:cNvPr id="2" name="Slide Image Placeholder 1"/>
           <p:cNvSpPr>
-            <a:spLocks noGrp="1"/>
+            <a:spLocks noGrp="1" noRot="1" noChangeAspect="1"/>
           </p:cNvSpPr>
           <p:nvPr>
             <p:ph type="sldImg" idx="2"/>
@@ -1354,7 +1148,7 @@
             <a:spLocks noGrp="1"/>
           </p:cNvSpPr>
           <p:nvPr>
-            <p:ph type="body" idx="3" sz="quarter"/>
+            <p:ph type="body" sz="quarter" idx="3"/>
           </p:nvPr>
         </p:nvSpPr>
         <p:spPr/>
@@ -1375,7 +1169,7 @@
             <a:spLocks noGrp="1"/>
           </p:cNvSpPr>
           <p:nvPr>
-            <p:ph type="sldNum" idx="5" sz="quarter"/>
+            <p:ph type="sldNum" sz="quarter" idx="5"/>
           </p:nvPr>
         </p:nvSpPr>
         <p:spPr/>
@@ -1389,7 +1183,7 @@
 </file>
 
 <file path=ppt/notesSlides/notesSlide6.xml><?xml version="1.0" encoding="utf-8"?>
-<p:notes xmlns:a="http://schemas.openxmlformats.org/drawingml/2006/main" xmlns:p="http://schemas.openxmlformats.org/presentationml/2006/main" xmlns:r="http://schemas.openxmlformats.org/officeDocument/2006/relationships">
+<p:notes xmlns:a="http://schemas.openxmlformats.org/drawingml/2006/main" xmlns:r="http://schemas.openxmlformats.org/officeDocument/2006/relationships" xmlns:p="http://schemas.openxmlformats.org/presentationml/2006/main">
   <p:cSld>
     <p:spTree>
       <p:nvGrpSpPr>
@@ -1409,7 +1203,7 @@
         <p:nvSpPr>
           <p:cNvPr id="2" name="Slide Image Placeholder 1"/>
           <p:cNvSpPr>
-            <a:spLocks noGrp="1"/>
+            <a:spLocks noGrp="1" noRot="1" noChangeAspect="1"/>
           </p:cNvSpPr>
           <p:nvPr>
             <p:ph type="sldImg" idx="2"/>
@@ -1424,7 +1218,7 @@
             <a:spLocks noGrp="1"/>
           </p:cNvSpPr>
           <p:nvPr>
-            <p:ph type="body" idx="3" sz="quarter"/>
+            <p:ph type="body" sz="quarter" idx="3"/>
           </p:nvPr>
         </p:nvSpPr>
         <p:spPr/>
@@ -1445,7 +1239,7 @@
             <a:spLocks noGrp="1"/>
           </p:cNvSpPr>
           <p:nvPr>
-            <p:ph type="sldNum" idx="5" sz="quarter"/>
+            <p:ph type="sldNum" sz="quarter" idx="5"/>
           </p:nvPr>
         </p:nvSpPr>
         <p:spPr/>
@@ -1459,7 +1253,7 @@
 </file>
 
 <file path=ppt/notesSlides/notesSlide7.xml><?xml version="1.0" encoding="utf-8"?>
-<p:notes xmlns:a="http://schemas.openxmlformats.org/drawingml/2006/main" xmlns:p="http://schemas.openxmlformats.org/presentationml/2006/main" xmlns:r="http://schemas.openxmlformats.org/officeDocument/2006/relationships">
+<p:notes xmlns:a="http://schemas.openxmlformats.org/drawingml/2006/main" xmlns:r="http://schemas.openxmlformats.org/officeDocument/2006/relationships" xmlns:p="http://schemas.openxmlformats.org/presentationml/2006/main">
   <p:cSld>
     <p:spTree>
       <p:nvGrpSpPr>
@@ -1479,7 +1273,7 @@
         <p:nvSpPr>
           <p:cNvPr id="2" name="Slide Image Placeholder 1"/>
           <p:cNvSpPr>
-            <a:spLocks noGrp="1"/>
+            <a:spLocks noGrp="1" noRot="1" noChangeAspect="1"/>
           </p:cNvSpPr>
           <p:nvPr>
             <p:ph type="sldImg" idx="2"/>
@@ -1494,7 +1288,7 @@
             <a:spLocks noGrp="1"/>
           </p:cNvSpPr>
           <p:nvPr>
-            <p:ph type="body" idx="3" sz="quarter"/>
+            <p:ph type="body" sz="quarter" idx="3"/>
           </p:nvPr>
         </p:nvSpPr>
         <p:spPr/>
@@ -1515,7 +1309,7 @@
             <a:spLocks noGrp="1"/>
           </p:cNvSpPr>
           <p:nvPr>
-            <p:ph type="sldNum" idx="5" sz="quarter"/>
+            <p:ph type="sldNum" sz="quarter" idx="5"/>
           </p:nvPr>
         </p:nvSpPr>
         <p:spPr/>
@@ -1529,7 +1323,7 @@
 </file>
 
 <file path=ppt/notesSlides/notesSlide8.xml><?xml version="1.0" encoding="utf-8"?>
-<p:notes xmlns:a="http://schemas.openxmlformats.org/drawingml/2006/main" xmlns:p="http://schemas.openxmlformats.org/presentationml/2006/main" xmlns:r="http://schemas.openxmlformats.org/officeDocument/2006/relationships">
+<p:notes xmlns:a="http://schemas.openxmlformats.org/drawingml/2006/main" xmlns:r="http://schemas.openxmlformats.org/officeDocument/2006/relationships" xmlns:p="http://schemas.openxmlformats.org/presentationml/2006/main">
   <p:cSld>
     <p:spTree>
       <p:nvGrpSpPr>
@@ -1549,7 +1343,7 @@
         <p:nvSpPr>
           <p:cNvPr id="2" name="Slide Image Placeholder 1"/>
           <p:cNvSpPr>
-            <a:spLocks noGrp="1"/>
+            <a:spLocks noGrp="1" noRot="1" noChangeAspect="1"/>
           </p:cNvSpPr>
           <p:nvPr>
             <p:ph type="sldImg" idx="2"/>
@@ -1564,7 +1358,7 @@
             <a:spLocks noGrp="1"/>
           </p:cNvSpPr>
           <p:nvPr>
-            <p:ph type="body" idx="3" sz="quarter"/>
+            <p:ph type="body" sz="quarter" idx="3"/>
           </p:nvPr>
         </p:nvSpPr>
         <p:spPr/>
@@ -1573,7 +1367,7 @@
           <a:lstStyle/>
           <a:p>
             <a:r>
-              <a:t>硬件这页看两张照片：左边是整个系统，右边是传感器怎么固定在风扇上。强调零焊接——所有模块买来就是焊好排针的。</a:t>
+              <a:t>硬件这页看两张照片：左边是整个系统，右边是传感器怎么固定在风扇上。强调模块通过标准接口连接，方便拆装和替换。</a:t>
             </a:r>
           </a:p>
         </p:txBody>
@@ -1585,7 +1379,7 @@
             <a:spLocks noGrp="1"/>
           </p:cNvSpPr>
           <p:nvPr>
-            <p:ph type="sldNum" idx="5" sz="quarter"/>
+            <p:ph type="sldNum" sz="quarter" idx="5"/>
           </p:nvPr>
         </p:nvSpPr>
         <p:spPr/>
@@ -1599,7 +1393,7 @@
 </file>
 
 <file path=ppt/notesSlides/notesSlide9.xml><?xml version="1.0" encoding="utf-8"?>
-<p:notes xmlns:a="http://schemas.openxmlformats.org/drawingml/2006/main" xmlns:p="http://schemas.openxmlformats.org/presentationml/2006/main" xmlns:r="http://schemas.openxmlformats.org/officeDocument/2006/relationships">
+<p:notes xmlns:a="http://schemas.openxmlformats.org/drawingml/2006/main" xmlns:r="http://schemas.openxmlformats.org/officeDocument/2006/relationships" xmlns:p="http://schemas.openxmlformats.org/presentationml/2006/main">
   <p:cSld>
     <p:spTree>
       <p:nvGrpSpPr>
@@ -1619,7 +1413,7 @@
         <p:nvSpPr>
           <p:cNvPr id="2" name="Slide Image Placeholder 1"/>
           <p:cNvSpPr>
-            <a:spLocks noGrp="1"/>
+            <a:spLocks noGrp="1" noRot="1" noChangeAspect="1"/>
           </p:cNvSpPr>
           <p:nvPr>
             <p:ph type="sldImg" idx="2"/>
@@ -1634,7 +1428,7 @@
             <a:spLocks noGrp="1"/>
           </p:cNvSpPr>
           <p:nvPr>
-            <p:ph type="body" idx="3" sz="quarter"/>
+            <p:ph type="body" sz="quarter" idx="3"/>
           </p:nvPr>
         </p:nvSpPr>
         <p:spPr/>
@@ -1655,7 +1449,7 @@
             <a:spLocks noGrp="1"/>
           </p:cNvSpPr>
           <p:nvPr>
-            <p:ph type="sldNum" idx="5" sz="quarter"/>
+            <p:ph type="sldNum" sz="quarter" idx="5"/>
           </p:nvPr>
         </p:nvSpPr>
         <p:spPr/>
@@ -1706,10 +1500,9 @@
           <a:lstStyle/>
           <a:p>
             <a:r>
-              <a:rPr lang="en-US" smtClean="0"/>
+              <a:rPr lang="en-US"/>
               <a:t>Click to edit Master title style</a:t>
             </a:r>
-            <a:endParaRPr lang="en-US"/>
           </a:p>
         </p:txBody>
       </p:sp>
@@ -1825,10 +1618,9 @@
           </a:lstStyle>
           <a:p>
             <a:r>
-              <a:rPr lang="en-US" smtClean="0"/>
+              <a:rPr lang="en-US"/>
               <a:t>Click to edit Master subtitle style</a:t>
             </a:r>
-            <a:endParaRPr lang="en-US"/>
           </a:p>
         </p:txBody>
       </p:sp>
@@ -1849,7 +1641,7 @@
           <a:p>
             <a:fld id="{5BCAD085-E8A6-8845-BD4E-CB4CCA059FC4}" type="datetimeFigureOut">
               <a:rPr lang="en-US" smtClean="0"/>
-              <a:t>1/27/13</a:t>
+              <a:t>10/28/2026</a:t>
             </a:fld>
             <a:endParaRPr lang="en-US"/>
           </a:p>
@@ -1943,10 +1735,9 @@
           <a:lstStyle/>
           <a:p>
             <a:r>
-              <a:rPr lang="en-US" smtClean="0"/>
+              <a:rPr lang="en-US"/>
               <a:t>Click to edit Master title style</a:t>
             </a:r>
-            <a:endParaRPr lang="en-US"/>
           </a:p>
         </p:txBody>
       </p:sp>
@@ -1967,38 +1758,37 @@
           <a:p>
             <a:pPr lvl="0"/>
             <a:r>
-              <a:rPr lang="en-US" smtClean="0"/>
+              <a:rPr lang="en-US"/>
               <a:t>Click to edit Master text styles</a:t>
             </a:r>
           </a:p>
           <a:p>
             <a:pPr lvl="1"/>
             <a:r>
-              <a:rPr lang="en-US" smtClean="0"/>
+              <a:rPr lang="en-US"/>
               <a:t>Second level</a:t>
             </a:r>
           </a:p>
           <a:p>
             <a:pPr lvl="2"/>
             <a:r>
-              <a:rPr lang="en-US" smtClean="0"/>
+              <a:rPr lang="en-US"/>
               <a:t>Third level</a:t>
             </a:r>
           </a:p>
           <a:p>
             <a:pPr lvl="3"/>
             <a:r>
-              <a:rPr lang="en-US" smtClean="0"/>
+              <a:rPr lang="en-US"/>
               <a:t>Fourth level</a:t>
             </a:r>
           </a:p>
           <a:p>
             <a:pPr lvl="4"/>
             <a:r>
-              <a:rPr lang="en-US" smtClean="0"/>
+              <a:rPr lang="en-US"/>
               <a:t>Fifth level</a:t>
             </a:r>
-            <a:endParaRPr lang="en-US"/>
           </a:p>
         </p:txBody>
       </p:sp>
@@ -2019,7 +1809,7 @@
           <a:p>
             <a:fld id="{5BCAD085-E8A6-8845-BD4E-CB4CCA059FC4}" type="datetimeFigureOut">
               <a:rPr lang="en-US" smtClean="0"/>
-              <a:t>1/27/13</a:t>
+              <a:t>10/28/2026</a:t>
             </a:fld>
             <a:endParaRPr lang="en-US"/>
           </a:p>
@@ -2118,10 +1908,9 @@
           <a:lstStyle/>
           <a:p>
             <a:r>
-              <a:rPr lang="en-US" smtClean="0"/>
+              <a:rPr lang="en-US"/>
               <a:t>Click to edit Master title style</a:t>
             </a:r>
-            <a:endParaRPr lang="en-US"/>
           </a:p>
         </p:txBody>
       </p:sp>
@@ -2147,38 +1936,37 @@
           <a:p>
             <a:pPr lvl="0"/>
             <a:r>
-              <a:rPr lang="en-US" smtClean="0"/>
+              <a:rPr lang="en-US"/>
               <a:t>Click to edit Master text styles</a:t>
             </a:r>
           </a:p>
           <a:p>
             <a:pPr lvl="1"/>
             <a:r>
-              <a:rPr lang="en-US" smtClean="0"/>
+              <a:rPr lang="en-US"/>
               <a:t>Second level</a:t>
             </a:r>
           </a:p>
           <a:p>
             <a:pPr lvl="2"/>
             <a:r>
-              <a:rPr lang="en-US" smtClean="0"/>
+              <a:rPr lang="en-US"/>
               <a:t>Third level</a:t>
             </a:r>
           </a:p>
           <a:p>
             <a:pPr lvl="3"/>
             <a:r>
-              <a:rPr lang="en-US" smtClean="0"/>
+              <a:rPr lang="en-US"/>
               <a:t>Fourth level</a:t>
             </a:r>
           </a:p>
           <a:p>
             <a:pPr lvl="4"/>
             <a:r>
-              <a:rPr lang="en-US" smtClean="0"/>
+              <a:rPr lang="en-US"/>
               <a:t>Fifth level</a:t>
             </a:r>
-            <a:endParaRPr lang="en-US"/>
           </a:p>
         </p:txBody>
       </p:sp>
@@ -2199,7 +1987,7 @@
           <a:p>
             <a:fld id="{5BCAD085-E8A6-8845-BD4E-CB4CCA059FC4}" type="datetimeFigureOut">
               <a:rPr lang="en-US" smtClean="0"/>
-              <a:t>1/27/13</a:t>
+              <a:t>10/28/2026</a:t>
             </a:fld>
             <a:endParaRPr lang="en-US"/>
           </a:p>
@@ -2293,10 +2081,9 @@
           <a:lstStyle/>
           <a:p>
             <a:r>
-              <a:rPr lang="en-US" smtClean="0"/>
+              <a:rPr lang="en-US"/>
               <a:t>Click to edit Master title style</a:t>
             </a:r>
-            <a:endParaRPr lang="en-US"/>
           </a:p>
         </p:txBody>
       </p:sp>
@@ -2317,38 +2104,37 @@
           <a:p>
             <a:pPr lvl="0"/>
             <a:r>
-              <a:rPr lang="en-US" smtClean="0"/>
+              <a:rPr lang="en-US"/>
               <a:t>Click to edit Master text styles</a:t>
             </a:r>
           </a:p>
           <a:p>
             <a:pPr lvl="1"/>
             <a:r>
-              <a:rPr lang="en-US" smtClean="0"/>
+              <a:rPr lang="en-US"/>
               <a:t>Second level</a:t>
             </a:r>
           </a:p>
           <a:p>
             <a:pPr lvl="2"/>
             <a:r>
-              <a:rPr lang="en-US" smtClean="0"/>
+              <a:rPr lang="en-US"/>
               <a:t>Third level</a:t>
             </a:r>
           </a:p>
           <a:p>
             <a:pPr lvl="3"/>
             <a:r>
-              <a:rPr lang="en-US" smtClean="0"/>
+              <a:rPr lang="en-US"/>
               <a:t>Fourth level</a:t>
             </a:r>
           </a:p>
           <a:p>
             <a:pPr lvl="4"/>
             <a:r>
-              <a:rPr lang="en-US" smtClean="0"/>
+              <a:rPr lang="en-US"/>
               <a:t>Fifth level</a:t>
             </a:r>
-            <a:endParaRPr lang="en-US"/>
           </a:p>
         </p:txBody>
       </p:sp>
@@ -2369,7 +2155,7 @@
           <a:p>
             <a:fld id="{5BCAD085-E8A6-8845-BD4E-CB4CCA059FC4}" type="datetimeFigureOut">
               <a:rPr lang="en-US" smtClean="0"/>
-              <a:t>1/27/13</a:t>
+              <a:t>10/28/2026</a:t>
             </a:fld>
             <a:endParaRPr lang="en-US"/>
           </a:p>
@@ -2472,10 +2258,9 @@
           </a:lstStyle>
           <a:p>
             <a:r>
-              <a:rPr lang="en-US" smtClean="0"/>
+              <a:rPr lang="en-US"/>
               <a:t>Click to edit Master title style</a:t>
             </a:r>
-            <a:endParaRPr lang="en-US"/>
           </a:p>
         </p:txBody>
       </p:sp>
@@ -2592,7 +2377,7 @@
           <a:p>
             <a:pPr lvl="0"/>
             <a:r>
-              <a:rPr lang="en-US" smtClean="0"/>
+              <a:rPr lang="en-US"/>
               <a:t>Click to edit Master text styles</a:t>
             </a:r>
           </a:p>
@@ -2615,7 +2400,7 @@
           <a:p>
             <a:fld id="{5BCAD085-E8A6-8845-BD4E-CB4CCA059FC4}" type="datetimeFigureOut">
               <a:rPr lang="en-US" smtClean="0"/>
-              <a:t>1/27/13</a:t>
+              <a:t>10/28/2026</a:t>
             </a:fld>
             <a:endParaRPr lang="en-US"/>
           </a:p>
@@ -2709,10 +2494,9 @@
           <a:lstStyle/>
           <a:p>
             <a:r>
-              <a:rPr lang="en-US" smtClean="0"/>
+              <a:rPr lang="en-US"/>
               <a:t>Click to edit Master title style</a:t>
             </a:r>
-            <a:endParaRPr lang="en-US"/>
           </a:p>
         </p:txBody>
       </p:sp>
@@ -2766,38 +2550,37 @@
           <a:p>
             <a:pPr lvl="0"/>
             <a:r>
-              <a:rPr lang="en-US" smtClean="0"/>
+              <a:rPr lang="en-US"/>
               <a:t>Click to edit Master text styles</a:t>
             </a:r>
           </a:p>
           <a:p>
             <a:pPr lvl="1"/>
             <a:r>
-              <a:rPr lang="en-US" smtClean="0"/>
+              <a:rPr lang="en-US"/>
               <a:t>Second level</a:t>
             </a:r>
           </a:p>
           <a:p>
             <a:pPr lvl="2"/>
             <a:r>
-              <a:rPr lang="en-US" smtClean="0"/>
+              <a:rPr lang="en-US"/>
               <a:t>Third level</a:t>
             </a:r>
           </a:p>
           <a:p>
             <a:pPr lvl="3"/>
             <a:r>
-              <a:rPr lang="en-US" smtClean="0"/>
+              <a:rPr lang="en-US"/>
               <a:t>Fourth level</a:t>
             </a:r>
           </a:p>
           <a:p>
             <a:pPr lvl="4"/>
             <a:r>
-              <a:rPr lang="en-US" smtClean="0"/>
+              <a:rPr lang="en-US"/>
               <a:t>Fifth level</a:t>
             </a:r>
-            <a:endParaRPr lang="en-US"/>
           </a:p>
         </p:txBody>
       </p:sp>
@@ -2851,38 +2634,37 @@
           <a:p>
             <a:pPr lvl="0"/>
             <a:r>
-              <a:rPr lang="en-US" smtClean="0"/>
+              <a:rPr lang="en-US"/>
               <a:t>Click to edit Master text styles</a:t>
             </a:r>
           </a:p>
           <a:p>
             <a:pPr lvl="1"/>
             <a:r>
-              <a:rPr lang="en-US" smtClean="0"/>
+              <a:rPr lang="en-US"/>
               <a:t>Second level</a:t>
             </a:r>
           </a:p>
           <a:p>
             <a:pPr lvl="2"/>
             <a:r>
-              <a:rPr lang="en-US" smtClean="0"/>
+              <a:rPr lang="en-US"/>
               <a:t>Third level</a:t>
             </a:r>
           </a:p>
           <a:p>
             <a:pPr lvl="3"/>
             <a:r>
-              <a:rPr lang="en-US" smtClean="0"/>
+              <a:rPr lang="en-US"/>
               <a:t>Fourth level</a:t>
             </a:r>
           </a:p>
           <a:p>
             <a:pPr lvl="4"/>
             <a:r>
-              <a:rPr lang="en-US" smtClean="0"/>
+              <a:rPr lang="en-US"/>
               <a:t>Fifth level</a:t>
             </a:r>
-            <a:endParaRPr lang="en-US"/>
           </a:p>
         </p:txBody>
       </p:sp>
@@ -2903,7 +2685,7 @@
           <a:p>
             <a:fld id="{5BCAD085-E8A6-8845-BD4E-CB4CCA059FC4}" type="datetimeFigureOut">
               <a:rPr lang="en-US" smtClean="0"/>
-              <a:t>1/27/13</a:t>
+              <a:t>10/28/2026</a:t>
             </a:fld>
             <a:endParaRPr lang="en-US"/>
           </a:p>
@@ -3001,10 +2783,9 @@
           </a:lstStyle>
           <a:p>
             <a:r>
-              <a:rPr lang="en-US" smtClean="0"/>
+              <a:rPr lang="en-US"/>
               <a:t>Click to edit Master title style</a:t>
             </a:r>
-            <a:endParaRPr lang="en-US"/>
           </a:p>
         </p:txBody>
       </p:sp>
@@ -3067,7 +2848,7 @@
           <a:p>
             <a:pPr lvl="0"/>
             <a:r>
-              <a:rPr lang="en-US" smtClean="0"/>
+              <a:rPr lang="en-US"/>
               <a:t>Click to edit Master text styles</a:t>
             </a:r>
           </a:p>
@@ -3123,38 +2904,37 @@
           <a:p>
             <a:pPr lvl="0"/>
             <a:r>
-              <a:rPr lang="en-US" smtClean="0"/>
+              <a:rPr lang="en-US"/>
               <a:t>Click to edit Master text styles</a:t>
             </a:r>
           </a:p>
           <a:p>
             <a:pPr lvl="1"/>
             <a:r>
-              <a:rPr lang="en-US" smtClean="0"/>
+              <a:rPr lang="en-US"/>
               <a:t>Second level</a:t>
             </a:r>
           </a:p>
           <a:p>
             <a:pPr lvl="2"/>
             <a:r>
-              <a:rPr lang="en-US" smtClean="0"/>
+              <a:rPr lang="en-US"/>
               <a:t>Third level</a:t>
             </a:r>
           </a:p>
           <a:p>
             <a:pPr lvl="3"/>
             <a:r>
-              <a:rPr lang="en-US" smtClean="0"/>
+              <a:rPr lang="en-US"/>
               <a:t>Fourth level</a:t>
             </a:r>
           </a:p>
           <a:p>
             <a:pPr lvl="4"/>
             <a:r>
-              <a:rPr lang="en-US" smtClean="0"/>
+              <a:rPr lang="en-US"/>
               <a:t>Fifth level</a:t>
             </a:r>
-            <a:endParaRPr lang="en-US"/>
           </a:p>
         </p:txBody>
       </p:sp>
@@ -3217,7 +2997,7 @@
           <a:p>
             <a:pPr lvl="0"/>
             <a:r>
-              <a:rPr lang="en-US" smtClean="0"/>
+              <a:rPr lang="en-US"/>
               <a:t>Click to edit Master text styles</a:t>
             </a:r>
           </a:p>
@@ -3273,38 +3053,37 @@
           <a:p>
             <a:pPr lvl="0"/>
             <a:r>
-              <a:rPr lang="en-US" smtClean="0"/>
+              <a:rPr lang="en-US"/>
               <a:t>Click to edit Master text styles</a:t>
             </a:r>
           </a:p>
           <a:p>
             <a:pPr lvl="1"/>
             <a:r>
-              <a:rPr lang="en-US" smtClean="0"/>
+              <a:rPr lang="en-US"/>
               <a:t>Second level</a:t>
             </a:r>
           </a:p>
           <a:p>
             <a:pPr lvl="2"/>
             <a:r>
-              <a:rPr lang="en-US" smtClean="0"/>
+              <a:rPr lang="en-US"/>
               <a:t>Third level</a:t>
             </a:r>
           </a:p>
           <a:p>
             <a:pPr lvl="3"/>
             <a:r>
-              <a:rPr lang="en-US" smtClean="0"/>
+              <a:rPr lang="en-US"/>
               <a:t>Fourth level</a:t>
             </a:r>
           </a:p>
           <a:p>
             <a:pPr lvl="4"/>
             <a:r>
-              <a:rPr lang="en-US" smtClean="0"/>
+              <a:rPr lang="en-US"/>
               <a:t>Fifth level</a:t>
             </a:r>
-            <a:endParaRPr lang="en-US"/>
           </a:p>
         </p:txBody>
       </p:sp>
@@ -3325,7 +3104,7 @@
           <a:p>
             <a:fld id="{5BCAD085-E8A6-8845-BD4E-CB4CCA059FC4}" type="datetimeFigureOut">
               <a:rPr lang="en-US" smtClean="0"/>
-              <a:t>1/27/13</a:t>
+              <a:t>10/28/2026</a:t>
             </a:fld>
             <a:endParaRPr lang="en-US"/>
           </a:p>
@@ -3419,10 +3198,9 @@
           <a:lstStyle/>
           <a:p>
             <a:r>
-              <a:rPr lang="en-US" smtClean="0"/>
+              <a:rPr lang="en-US"/>
               <a:t>Click to edit Master title style</a:t>
             </a:r>
-            <a:endParaRPr lang="en-US"/>
           </a:p>
         </p:txBody>
       </p:sp>
@@ -3443,7 +3221,7 @@
           <a:p>
             <a:fld id="{5BCAD085-E8A6-8845-BD4E-CB4CCA059FC4}" type="datetimeFigureOut">
               <a:rPr lang="en-US" smtClean="0"/>
-              <a:t>1/27/13</a:t>
+              <a:t>10/28/2026</a:t>
             </a:fld>
             <a:endParaRPr lang="en-US"/>
           </a:p>
@@ -3538,7 +3316,7 @@
           <a:p>
             <a:fld id="{5BCAD085-E8A6-8845-BD4E-CB4CCA059FC4}" type="datetimeFigureOut">
               <a:rPr lang="en-US" smtClean="0"/>
-              <a:t>1/27/13</a:t>
+              <a:t>10/28/2026</a:t>
             </a:fld>
             <a:endParaRPr lang="en-US"/>
           </a:p>
@@ -3641,10 +3419,9 @@
           </a:lstStyle>
           <a:p>
             <a:r>
-              <a:rPr lang="en-US" smtClean="0"/>
+              <a:rPr lang="en-US"/>
               <a:t>Click to edit Master title style</a:t>
             </a:r>
-            <a:endParaRPr lang="en-US"/>
           </a:p>
         </p:txBody>
       </p:sp>
@@ -3698,38 +3475,37 @@
           <a:p>
             <a:pPr lvl="0"/>
             <a:r>
-              <a:rPr lang="en-US" smtClean="0"/>
+              <a:rPr lang="en-US"/>
               <a:t>Click to edit Master text styles</a:t>
             </a:r>
           </a:p>
           <a:p>
             <a:pPr lvl="1"/>
             <a:r>
-              <a:rPr lang="en-US" smtClean="0"/>
+              <a:rPr lang="en-US"/>
               <a:t>Second level</a:t>
             </a:r>
           </a:p>
           <a:p>
             <a:pPr lvl="2"/>
             <a:r>
-              <a:rPr lang="en-US" smtClean="0"/>
+              <a:rPr lang="en-US"/>
               <a:t>Third level</a:t>
             </a:r>
           </a:p>
           <a:p>
             <a:pPr lvl="3"/>
             <a:r>
-              <a:rPr lang="en-US" smtClean="0"/>
+              <a:rPr lang="en-US"/>
               <a:t>Fourth level</a:t>
             </a:r>
           </a:p>
           <a:p>
             <a:pPr lvl="4"/>
             <a:r>
-              <a:rPr lang="en-US" smtClean="0"/>
+              <a:rPr lang="en-US"/>
               <a:t>Fifth level</a:t>
             </a:r>
-            <a:endParaRPr lang="en-US"/>
           </a:p>
         </p:txBody>
       </p:sp>
@@ -3792,7 +3568,7 @@
           <a:p>
             <a:pPr lvl="0"/>
             <a:r>
-              <a:rPr lang="en-US" smtClean="0"/>
+              <a:rPr lang="en-US"/>
               <a:t>Click to edit Master text styles</a:t>
             </a:r>
           </a:p>
@@ -3815,7 +3591,7 @@
           <a:p>
             <a:fld id="{5BCAD085-E8A6-8845-BD4E-CB4CCA059FC4}" type="datetimeFigureOut">
               <a:rPr lang="en-US" smtClean="0"/>
-              <a:t>1/27/13</a:t>
+              <a:t>10/28/2026</a:t>
             </a:fld>
             <a:endParaRPr lang="en-US"/>
           </a:p>
@@ -3918,10 +3694,9 @@
           </a:lstStyle>
           <a:p>
             <a:r>
-              <a:rPr lang="en-US" smtClean="0"/>
+              <a:rPr lang="en-US"/>
               <a:t>Click to edit Master title style</a:t>
             </a:r>
-            <a:endParaRPr lang="en-US"/>
           </a:p>
         </p:txBody>
       </p:sp>
@@ -4045,7 +3820,7 @@
           <a:p>
             <a:pPr lvl="0"/>
             <a:r>
-              <a:rPr lang="en-US" smtClean="0"/>
+              <a:rPr lang="en-US"/>
               <a:t>Click to edit Master text styles</a:t>
             </a:r>
           </a:p>
@@ -4068,7 +3843,7 @@
           <a:p>
             <a:fld id="{5BCAD085-E8A6-8845-BD4E-CB4CCA059FC4}" type="datetimeFigureOut">
               <a:rPr lang="en-US" smtClean="0"/>
-              <a:t>1/27/13</a:t>
+              <a:t>10/28/2026</a:t>
             </a:fld>
             <a:endParaRPr lang="en-US"/>
           </a:p>
@@ -4177,10 +3952,9 @@
           <a:lstStyle/>
           <a:p>
             <a:r>
-              <a:rPr lang="en-US" smtClean="0"/>
+              <a:rPr lang="en-US"/>
               <a:t>Click to edit Master title style</a:t>
             </a:r>
-            <a:endParaRPr lang="en-US"/>
           </a:p>
         </p:txBody>
       </p:sp>
@@ -4211,38 +3985,37 @@
           <a:p>
             <a:pPr lvl="0"/>
             <a:r>
-              <a:rPr lang="en-US" smtClean="0"/>
+              <a:rPr lang="en-US"/>
               <a:t>Click to edit Master text styles</a:t>
             </a:r>
           </a:p>
           <a:p>
             <a:pPr lvl="1"/>
             <a:r>
-              <a:rPr lang="en-US" smtClean="0"/>
+              <a:rPr lang="en-US"/>
               <a:t>Second level</a:t>
             </a:r>
           </a:p>
           <a:p>
             <a:pPr lvl="2"/>
             <a:r>
-              <a:rPr lang="en-US" smtClean="0"/>
+              <a:rPr lang="en-US"/>
               <a:t>Third level</a:t>
             </a:r>
           </a:p>
           <a:p>
             <a:pPr lvl="3"/>
             <a:r>
-              <a:rPr lang="en-US" smtClean="0"/>
+              <a:rPr lang="en-US"/>
               <a:t>Fourth level</a:t>
             </a:r>
           </a:p>
           <a:p>
             <a:pPr lvl="4"/>
             <a:r>
-              <a:rPr lang="en-US" smtClean="0"/>
+              <a:rPr lang="en-US"/>
               <a:t>Fifth level</a:t>
             </a:r>
-            <a:endParaRPr lang="en-US"/>
           </a:p>
         </p:txBody>
       </p:sp>
@@ -4281,7 +4054,7 @@
           <a:p>
             <a:fld id="{5BCAD085-E8A6-8845-BD4E-CB4CCA059FC4}" type="datetimeFigureOut">
               <a:rPr lang="en-US" smtClean="0"/>
-              <a:t>1/27/13</a:t>
+              <a:t>10/28/2026</a:t>
             </a:fld>
             <a:endParaRPr lang="en-US"/>
           </a:p>
@@ -4640,7 +4413,7 @@
 </file>
 
 <file path=ppt/slides/slide1.xml><?xml version="1.0" encoding="utf-8"?>
-<p:sld xmlns:a="http://schemas.openxmlformats.org/drawingml/2006/main" xmlns:p="http://schemas.openxmlformats.org/presentationml/2006/main" xmlns:r="http://schemas.openxmlformats.org/officeDocument/2006/relationships">
+<p:sld xmlns:a="http://schemas.openxmlformats.org/drawingml/2006/main" xmlns:r="http://schemas.openxmlformats.org/officeDocument/2006/relationships" xmlns:p="http://schemas.openxmlformats.org/presentationml/2006/main">
   <p:cSld>
     <p:spTree>
       <p:nvGrpSpPr>
@@ -4648,7 +4421,14 @@
         <p:cNvGrpSpPr/>
         <p:nvPr/>
       </p:nvGrpSpPr>
-      <p:grpSpPr/>
+      <p:grpSpPr>
+        <a:xfrm>
+          <a:off x="0" y="0"/>
+          <a:ext cx="0" cy="0"/>
+          <a:chOff x="0" y="0"/>
+          <a:chExt cx="0" cy="0"/>
+        </a:xfrm>
+      </p:grpSpPr>
       <p:sp>
         <p:nvSpPr>
           <p:cNvPr id="2" name="Rectangle 1"/>
@@ -4689,6 +4469,7 @@
           <a:lstStyle/>
           <a:p>
             <a:pPr algn="ctr"/>
+            <a:endParaRPr/>
           </a:p>
         </p:txBody>
       </p:sp>
@@ -4732,6 +4513,7 @@
           <a:lstStyle/>
           <a:p>
             <a:pPr algn="ctr"/>
+            <a:endParaRPr/>
           </a:p>
         </p:txBody>
       </p:sp>
@@ -4752,7 +4534,7 @@
           <a:noFill/>
         </p:spPr>
         <p:txBody>
-          <a:bodyPr wrap="square" anchor="t" lIns="50800" rIns="50800" tIns="25400" bIns="25400">
+          <a:bodyPr wrap="square" lIns="50800" tIns="25400" rIns="50800" bIns="25400" anchor="t">
             <a:spAutoFit/>
           </a:bodyPr>
           <a:lstStyle/>
@@ -4793,7 +4575,7 @@
           <a:noFill/>
         </p:spPr>
         <p:txBody>
-          <a:bodyPr wrap="square" anchor="t" lIns="50800" rIns="50800" tIns="25400" bIns="25400">
+          <a:bodyPr wrap="square" lIns="50800" tIns="25400" rIns="50800" bIns="25400" anchor="t">
             <a:spAutoFit/>
           </a:bodyPr>
           <a:lstStyle/>
@@ -4834,7 +4616,7 @@
           <a:noFill/>
         </p:spPr>
         <p:txBody>
-          <a:bodyPr wrap="square" anchor="t" lIns="50800" rIns="50800" tIns="25400" bIns="25400">
+          <a:bodyPr wrap="square" lIns="50800" tIns="25400" rIns="50800" bIns="25400" anchor="t">
             <a:spAutoFit/>
           </a:bodyPr>
           <a:lstStyle/>
@@ -4875,7 +4657,7 @@
           <a:noFill/>
         </p:spPr>
         <p:txBody>
-          <a:bodyPr wrap="square" anchor="t" lIns="50800" rIns="50800" tIns="25400" bIns="25400">
+          <a:bodyPr wrap="square" lIns="50800" tIns="25400" rIns="50800" bIns="25400" anchor="t">
             <a:spAutoFit/>
           </a:bodyPr>
           <a:lstStyle/>
@@ -4926,7 +4708,7 @@
 </file>
 
 <file path=ppt/slides/slide10.xml><?xml version="1.0" encoding="utf-8"?>
-<p:sld xmlns:a="http://schemas.openxmlformats.org/drawingml/2006/main" xmlns:p="http://schemas.openxmlformats.org/presentationml/2006/main" xmlns:r="http://schemas.openxmlformats.org/officeDocument/2006/relationships">
+<p:sld xmlns:a="http://schemas.openxmlformats.org/drawingml/2006/main" xmlns:r="http://schemas.openxmlformats.org/officeDocument/2006/relationships" xmlns:p="http://schemas.openxmlformats.org/presentationml/2006/main">
   <p:cSld>
     <p:spTree>
       <p:nvGrpSpPr>
@@ -4934,7 +4716,14 @@
         <p:cNvGrpSpPr/>
         <p:nvPr/>
       </p:nvGrpSpPr>
-      <p:grpSpPr/>
+      <p:grpSpPr>
+        <a:xfrm>
+          <a:off x="0" y="0"/>
+          <a:ext cx="0" cy="0"/>
+          <a:chOff x="0" y="0"/>
+          <a:chExt cx="0" cy="0"/>
+        </a:xfrm>
+      </p:grpSpPr>
       <p:sp>
         <p:nvSpPr>
           <p:cNvPr id="2" name="Rectangle 1"/>
@@ -4975,6 +4764,7 @@
           <a:lstStyle/>
           <a:p>
             <a:pPr algn="ctr"/>
+            <a:endParaRPr/>
           </a:p>
         </p:txBody>
       </p:sp>
@@ -5014,7 +4804,7 @@
           </a:fontRef>
         </p:style>
         <p:txBody>
-          <a:bodyPr rtlCol="0" anchor="ctr" wrap="none" lIns="25400" rIns="25400"/>
+          <a:bodyPr wrap="none" lIns="25400" rIns="25400" rtlCol="0" anchor="ctr"/>
           <a:lstStyle/>
           <a:p>
             <a:pPr algn="ctr"/>
@@ -5049,7 +4839,7 @@
           <a:noFill/>
         </p:spPr>
         <p:txBody>
-          <a:bodyPr wrap="square" anchor="ctr" lIns="50800" rIns="50800" tIns="25400" bIns="25400">
+          <a:bodyPr wrap="square" lIns="50800" tIns="25400" rIns="50800" bIns="25400" anchor="ctr">
             <a:spAutoFit/>
           </a:bodyPr>
           <a:lstStyle/>
@@ -5113,6 +4903,7 @@
           <a:lstStyle/>
           <a:p>
             <a:pPr algn="ctr"/>
+            <a:endParaRPr/>
           </a:p>
         </p:txBody>
       </p:sp>
@@ -5125,7 +4916,7 @@
           <p:nvPr/>
         </p:nvPicPr>
         <p:blipFill>
-          <a:blip r:embed="rId2"/>
+          <a:blip r:embed="rId3"/>
           <a:stretch>
             <a:fillRect/>
           </a:stretch>
@@ -5157,7 +4948,7 @@
           <a:noFill/>
         </p:spPr>
         <p:txBody>
-          <a:bodyPr wrap="square" anchor="t" lIns="50800" rIns="50800" tIns="25400" bIns="25400">
+          <a:bodyPr wrap="square" lIns="50800" tIns="25400" rIns="50800" bIns="25400" anchor="t">
             <a:spAutoFit/>
           </a:bodyPr>
           <a:lstStyle/>
@@ -5316,7 +5107,7 @@
 </file>
 
 <file path=ppt/slides/slide11.xml><?xml version="1.0" encoding="utf-8"?>
-<p:sld xmlns:a="http://schemas.openxmlformats.org/drawingml/2006/main" xmlns:p="http://schemas.openxmlformats.org/presentationml/2006/main" xmlns:r="http://schemas.openxmlformats.org/officeDocument/2006/relationships">
+<p:sld xmlns:a="http://schemas.openxmlformats.org/drawingml/2006/main" xmlns:r="http://schemas.openxmlformats.org/officeDocument/2006/relationships" xmlns:p="http://schemas.openxmlformats.org/presentationml/2006/main">
   <p:cSld>
     <p:spTree>
       <p:nvGrpSpPr>
@@ -5324,7 +5115,14 @@
         <p:cNvGrpSpPr/>
         <p:nvPr/>
       </p:nvGrpSpPr>
-      <p:grpSpPr/>
+      <p:grpSpPr>
+        <a:xfrm>
+          <a:off x="0" y="0"/>
+          <a:ext cx="0" cy="0"/>
+          <a:chOff x="0" y="0"/>
+          <a:chExt cx="0" cy="0"/>
+        </a:xfrm>
+      </p:grpSpPr>
       <p:sp>
         <p:nvSpPr>
           <p:cNvPr id="2" name="Rectangle 1"/>
@@ -5365,6 +5163,7 @@
           <a:lstStyle/>
           <a:p>
             <a:pPr algn="ctr"/>
+            <a:endParaRPr/>
           </a:p>
         </p:txBody>
       </p:sp>
@@ -5404,7 +5203,7 @@
           </a:fontRef>
         </p:style>
         <p:txBody>
-          <a:bodyPr rtlCol="0" anchor="ctr" wrap="none" lIns="25400" rIns="25400"/>
+          <a:bodyPr wrap="none" lIns="25400" rIns="25400" rtlCol="0" anchor="ctr"/>
           <a:lstStyle/>
           <a:p>
             <a:pPr algn="ctr"/>
@@ -5439,7 +5238,7 @@
           <a:noFill/>
         </p:spPr>
         <p:txBody>
-          <a:bodyPr wrap="square" anchor="ctr" lIns="50800" rIns="50800" tIns="25400" bIns="25400">
+          <a:bodyPr wrap="square" lIns="50800" tIns="25400" rIns="50800" bIns="25400" anchor="ctr">
             <a:spAutoFit/>
           </a:bodyPr>
           <a:lstStyle/>
@@ -5503,6 +5302,7 @@
           <a:lstStyle/>
           <a:p>
             <a:pPr algn="ctr"/>
+            <a:endParaRPr/>
           </a:p>
         </p:txBody>
       </p:sp>
@@ -5525,15 +5325,39 @@
                 <a:tableStyleId>{5C22544A-7EE6-4342-B048-85BDC9FD1C3A}</a:tableStyleId>
               </a:tblPr>
               <a:tblGrid>
-                <a:gridCol w="1925726"/>
-                <a:gridCol w="1711756"/>
-                <a:gridCol w="2139696"/>
-                <a:gridCol w="4921300"/>
+                <a:gridCol w="1925726">
+                  <a:extLst>
+                    <a:ext uri="{9D8B030D-6E8A-4147-A177-3AD203B41FA5}">
+                      <a16:colId xmlns:a16="http://schemas.microsoft.com/office/drawing/2014/main" val="20000"/>
+                    </a:ext>
+                  </a:extLst>
+                </a:gridCol>
+                <a:gridCol w="1711756">
+                  <a:extLst>
+                    <a:ext uri="{9D8B030D-6E8A-4147-A177-3AD203B41FA5}">
+                      <a16:colId xmlns:a16="http://schemas.microsoft.com/office/drawing/2014/main" val="20001"/>
+                    </a:ext>
+                  </a:extLst>
+                </a:gridCol>
+                <a:gridCol w="2139696">
+                  <a:extLst>
+                    <a:ext uri="{9D8B030D-6E8A-4147-A177-3AD203B41FA5}">
+                      <a16:colId xmlns:a16="http://schemas.microsoft.com/office/drawing/2014/main" val="20002"/>
+                    </a:ext>
+                  </a:extLst>
+                </a:gridCol>
+                <a:gridCol w="4921300">
+                  <a:extLst>
+                    <a:ext uri="{9D8B030D-6E8A-4147-A177-3AD203B41FA5}">
+                      <a16:colId xmlns:a16="http://schemas.microsoft.com/office/drawing/2014/main" val="20003"/>
+                    </a:ext>
+                  </a:extLst>
+                </a:gridCol>
               </a:tblGrid>
               <a:tr h="502920">
                 <a:tc>
                   <a:txBody>
-                    <a:bodyPr wrap="square"/>
+                    <a:bodyPr/>
                     <a:lstStyle/>
                     <a:p>
                       <a:pPr algn="l"/>
@@ -5558,7 +5382,7 @@
                 </a:tc>
                 <a:tc>
                   <a:txBody>
-                    <a:bodyPr wrap="square"/>
+                    <a:bodyPr/>
                     <a:lstStyle/>
                     <a:p>
                       <a:pPr algn="l"/>
@@ -5583,7 +5407,7 @@
                 </a:tc>
                 <a:tc>
                   <a:txBody>
-                    <a:bodyPr wrap="square"/>
+                    <a:bodyPr/>
                     <a:lstStyle/>
                     <a:p>
                       <a:pPr algn="l"/>
@@ -5608,7 +5432,7 @@
                 </a:tc>
                 <a:tc>
                   <a:txBody>
-                    <a:bodyPr wrap="square"/>
+                    <a:bodyPr/>
                     <a:lstStyle/>
                     <a:p>
                       <a:pPr algn="l"/>
@@ -5631,11 +5455,16 @@
                     </a:solidFill>
                   </a:tcPr>
                 </a:tc>
+                <a:extLst>
+                  <a:ext uri="{0D108BD9-81ED-4DB2-BD59-A6C34878D82A}">
+                    <a16:rowId xmlns:a16="http://schemas.microsoft.com/office/drawing/2014/main" val="10000"/>
+                  </a:ext>
+                </a:extLst>
               </a:tr>
               <a:tr h="502920">
                 <a:tc>
                   <a:txBody>
-                    <a:bodyPr wrap="square"/>
+                    <a:bodyPr/>
                     <a:lstStyle/>
                     <a:p>
                       <a:pPr algn="l"/>
@@ -5660,7 +5489,7 @@
                 </a:tc>
                 <a:tc>
                   <a:txBody>
-                    <a:bodyPr wrap="square"/>
+                    <a:bodyPr/>
                     <a:lstStyle/>
                     <a:p>
                       <a:pPr algn="l"/>
@@ -5685,7 +5514,7 @@
                 </a:tc>
                 <a:tc>
                   <a:txBody>
-                    <a:bodyPr wrap="square"/>
+                    <a:bodyPr/>
                     <a:lstStyle/>
                     <a:p>
                       <a:pPr algn="l"/>
@@ -5710,7 +5539,7 @@
                 </a:tc>
                 <a:tc>
                   <a:txBody>
-                    <a:bodyPr wrap="square"/>
+                    <a:bodyPr/>
                     <a:lstStyle/>
                     <a:p>
                       <a:pPr algn="l"/>
@@ -5733,11 +5562,16 @@
                     </a:solidFill>
                   </a:tcPr>
                 </a:tc>
+                <a:extLst>
+                  <a:ext uri="{0D108BD9-81ED-4DB2-BD59-A6C34878D82A}">
+                    <a16:rowId xmlns:a16="http://schemas.microsoft.com/office/drawing/2014/main" val="10001"/>
+                  </a:ext>
+                </a:extLst>
               </a:tr>
               <a:tr h="502920">
                 <a:tc>
                   <a:txBody>
-                    <a:bodyPr wrap="square"/>
+                    <a:bodyPr/>
                     <a:lstStyle/>
                     <a:p>
                       <a:pPr algn="l"/>
@@ -5762,7 +5596,7 @@
                 </a:tc>
                 <a:tc>
                   <a:txBody>
-                    <a:bodyPr wrap="square"/>
+                    <a:bodyPr/>
                     <a:lstStyle/>
                     <a:p>
                       <a:pPr algn="l"/>
@@ -5787,7 +5621,7 @@
                 </a:tc>
                 <a:tc>
                   <a:txBody>
-                    <a:bodyPr wrap="square"/>
+                    <a:bodyPr/>
                     <a:lstStyle/>
                     <a:p>
                       <a:pPr algn="l"/>
@@ -5812,7 +5646,7 @@
                 </a:tc>
                 <a:tc>
                   <a:txBody>
-                    <a:bodyPr wrap="square"/>
+                    <a:bodyPr/>
                     <a:lstStyle/>
                     <a:p>
                       <a:pPr algn="l"/>
@@ -5825,7 +5659,7 @@
                           <a:ea typeface="Microsoft YaHei"/>
                           <a:cs typeface="Microsoft YaHei"/>
                         </a:rPr>
-                        <a:t>三模块全部接入，零焊接</a:t>
+                        <a:t>三模块全部接入并验证</a:t>
                       </a:r>
                     </a:p>
                   </a:txBody>
@@ -5835,11 +5669,16 @@
                     </a:solidFill>
                   </a:tcPr>
                 </a:tc>
+                <a:extLst>
+                  <a:ext uri="{0D108BD9-81ED-4DB2-BD59-A6C34878D82A}">
+                    <a16:rowId xmlns:a16="http://schemas.microsoft.com/office/drawing/2014/main" val="10002"/>
+                  </a:ext>
+                </a:extLst>
               </a:tr>
               <a:tr h="502920">
                 <a:tc>
                   <a:txBody>
-                    <a:bodyPr wrap="square"/>
+                    <a:bodyPr/>
                     <a:lstStyle/>
                     <a:p>
                       <a:pPr algn="l"/>
@@ -5864,7 +5703,7 @@
                 </a:tc>
                 <a:tc>
                   <a:txBody>
-                    <a:bodyPr wrap="square"/>
+                    <a:bodyPr/>
                     <a:lstStyle/>
                     <a:p>
                       <a:pPr algn="l"/>
@@ -5889,7 +5728,7 @@
                 </a:tc>
                 <a:tc>
                   <a:txBody>
-                    <a:bodyPr wrap="square"/>
+                    <a:bodyPr/>
                     <a:lstStyle/>
                     <a:p>
                       <a:pPr algn="l"/>
@@ -5914,7 +5753,7 @@
                 </a:tc>
                 <a:tc>
                   <a:txBody>
-                    <a:bodyPr wrap="square"/>
+                    <a:bodyPr/>
                     <a:lstStyle/>
                     <a:p>
                       <a:pPr algn="l"/>
@@ -5937,11 +5776,16 @@
                     </a:solidFill>
                   </a:tcPr>
                 </a:tc>
+                <a:extLst>
+                  <a:ext uri="{0D108BD9-81ED-4DB2-BD59-A6C34878D82A}">
+                    <a16:rowId xmlns:a16="http://schemas.microsoft.com/office/drawing/2014/main" val="10003"/>
+                  </a:ext>
+                </a:extLst>
               </a:tr>
               <a:tr h="502920">
                 <a:tc>
                   <a:txBody>
-                    <a:bodyPr wrap="square"/>
+                    <a:bodyPr/>
                     <a:lstStyle/>
                     <a:p>
                       <a:pPr algn="l"/>
@@ -5966,7 +5810,7 @@
                 </a:tc>
                 <a:tc>
                   <a:txBody>
-                    <a:bodyPr wrap="square"/>
+                    <a:bodyPr/>
                     <a:lstStyle/>
                     <a:p>
                       <a:pPr algn="l"/>
@@ -5991,7 +5835,7 @@
                 </a:tc>
                 <a:tc>
                   <a:txBody>
-                    <a:bodyPr wrap="square"/>
+                    <a:bodyPr/>
                     <a:lstStyle/>
                     <a:p>
                       <a:pPr algn="l"/>
@@ -6016,7 +5860,7 @@
                 </a:tc>
                 <a:tc>
                   <a:txBody>
-                    <a:bodyPr wrap="square"/>
+                    <a:bodyPr/>
                     <a:lstStyle/>
                     <a:p>
                       <a:pPr algn="l"/>
@@ -6039,11 +5883,16 @@
                     </a:solidFill>
                   </a:tcPr>
                 </a:tc>
+                <a:extLst>
+                  <a:ext uri="{0D108BD9-81ED-4DB2-BD59-A6C34878D82A}">
+                    <a16:rowId xmlns:a16="http://schemas.microsoft.com/office/drawing/2014/main" val="10004"/>
+                  </a:ext>
+                </a:extLst>
               </a:tr>
               <a:tr h="502920">
                 <a:tc>
                   <a:txBody>
-                    <a:bodyPr wrap="square"/>
+                    <a:bodyPr/>
                     <a:lstStyle/>
                     <a:p>
                       <a:pPr algn="l"/>
@@ -6068,7 +5917,7 @@
                 </a:tc>
                 <a:tc>
                   <a:txBody>
-                    <a:bodyPr wrap="square"/>
+                    <a:bodyPr/>
                     <a:lstStyle/>
                     <a:p>
                       <a:pPr algn="l"/>
@@ -6093,7 +5942,7 @@
                 </a:tc>
                 <a:tc>
                   <a:txBody>
-                    <a:bodyPr wrap="square"/>
+                    <a:bodyPr/>
                     <a:lstStyle/>
                     <a:p>
                       <a:pPr algn="l"/>
@@ -6118,7 +5967,7 @@
                 </a:tc>
                 <a:tc>
                   <a:txBody>
-                    <a:bodyPr wrap="square"/>
+                    <a:bodyPr/>
                     <a:lstStyle/>
                     <a:p>
                       <a:pPr algn="l"/>
@@ -6141,11 +5990,16 @@
                     </a:solidFill>
                   </a:tcPr>
                 </a:tc>
+                <a:extLst>
+                  <a:ext uri="{0D108BD9-81ED-4DB2-BD59-A6C34878D82A}">
+                    <a16:rowId xmlns:a16="http://schemas.microsoft.com/office/drawing/2014/main" val="10005"/>
+                  </a:ext>
+                </a:extLst>
               </a:tr>
               <a:tr h="502920">
                 <a:tc>
                   <a:txBody>
-                    <a:bodyPr wrap="square"/>
+                    <a:bodyPr/>
                     <a:lstStyle/>
                     <a:p>
                       <a:pPr algn="l"/>
@@ -6170,7 +6024,7 @@
                 </a:tc>
                 <a:tc>
                   <a:txBody>
-                    <a:bodyPr wrap="square"/>
+                    <a:bodyPr/>
                     <a:lstStyle/>
                     <a:p>
                       <a:pPr algn="l"/>
@@ -6195,7 +6049,7 @@
                 </a:tc>
                 <a:tc>
                   <a:txBody>
-                    <a:bodyPr wrap="square"/>
+                    <a:bodyPr/>
                     <a:lstStyle/>
                     <a:p>
                       <a:pPr algn="l"/>
@@ -6220,7 +6074,7 @@
                 </a:tc>
                 <a:tc>
                   <a:txBody>
-                    <a:bodyPr wrap="square"/>
+                    <a:bodyPr/>
                     <a:lstStyle/>
                     <a:p>
                       <a:pPr algn="l"/>
@@ -6243,6 +6097,11 @@
                     </a:solidFill>
                   </a:tcPr>
                 </a:tc>
+                <a:extLst>
+                  <a:ext uri="{0D108BD9-81ED-4DB2-BD59-A6C34878D82A}">
+                    <a16:rowId xmlns:a16="http://schemas.microsoft.com/office/drawing/2014/main" val="10006"/>
+                  </a:ext>
+                </a:extLst>
               </a:tr>
             </a:tbl>
           </a:graphicData>
@@ -6288,6 +6147,7 @@
           <a:lstStyle/>
           <a:p>
             <a:pPr algn="ctr"/>
+            <a:endParaRPr/>
           </a:p>
         </p:txBody>
       </p:sp>
@@ -6308,7 +6168,7 @@
           <a:noFill/>
         </p:spPr>
         <p:txBody>
-          <a:bodyPr wrap="square" anchor="t" lIns="50800" rIns="50800" tIns="25400" bIns="25400">
+          <a:bodyPr wrap="square" lIns="50800" tIns="25400" rIns="50800" bIns="25400" anchor="t">
             <a:spAutoFit/>
           </a:bodyPr>
           <a:lstStyle/>
@@ -6341,7 +6201,7 @@
 </file>
 
 <file path=ppt/slides/slide12.xml><?xml version="1.0" encoding="utf-8"?>
-<p:sld xmlns:a="http://schemas.openxmlformats.org/drawingml/2006/main" xmlns:p="http://schemas.openxmlformats.org/presentationml/2006/main" xmlns:r="http://schemas.openxmlformats.org/officeDocument/2006/relationships">
+<p:sld xmlns:a="http://schemas.openxmlformats.org/drawingml/2006/main" xmlns:r="http://schemas.openxmlformats.org/officeDocument/2006/relationships" xmlns:p="http://schemas.openxmlformats.org/presentationml/2006/main">
   <p:cSld>
     <p:spTree>
       <p:nvGrpSpPr>
@@ -6349,7 +6209,14 @@
         <p:cNvGrpSpPr/>
         <p:nvPr/>
       </p:nvGrpSpPr>
-      <p:grpSpPr/>
+      <p:grpSpPr>
+        <a:xfrm>
+          <a:off x="0" y="0"/>
+          <a:ext cx="0" cy="0"/>
+          <a:chOff x="0" y="0"/>
+          <a:chExt cx="0" cy="0"/>
+        </a:xfrm>
+      </p:grpSpPr>
       <p:sp>
         <p:nvSpPr>
           <p:cNvPr id="2" name="Rectangle 1"/>
@@ -6390,6 +6257,7 @@
           <a:lstStyle/>
           <a:p>
             <a:pPr algn="ctr"/>
+            <a:endParaRPr/>
           </a:p>
         </p:txBody>
       </p:sp>
@@ -6429,7 +6297,7 @@
           </a:fontRef>
         </p:style>
         <p:txBody>
-          <a:bodyPr rtlCol="0" anchor="ctr" wrap="none" lIns="25400" rIns="25400"/>
+          <a:bodyPr wrap="none" lIns="25400" rIns="25400" rtlCol="0" anchor="ctr"/>
           <a:lstStyle/>
           <a:p>
             <a:pPr algn="ctr"/>
@@ -6464,7 +6332,7 @@
           <a:noFill/>
         </p:spPr>
         <p:txBody>
-          <a:bodyPr wrap="square" anchor="ctr" lIns="50800" rIns="50800" tIns="25400" bIns="25400">
+          <a:bodyPr wrap="square" lIns="50800" tIns="25400" rIns="50800" bIns="25400" anchor="ctr">
             <a:spAutoFit/>
           </a:bodyPr>
           <a:lstStyle/>
@@ -6528,6 +6396,7 @@
           <a:lstStyle/>
           <a:p>
             <a:pPr algn="ctr"/>
+            <a:endParaRPr/>
           </a:p>
         </p:txBody>
       </p:sp>
@@ -6550,16 +6419,46 @@
                 <a:tableStyleId>{5C22544A-7EE6-4342-B048-85BDC9FD1C3A}</a:tableStyleId>
               </a:tblPr>
               <a:tblGrid>
-                <a:gridCol w="1069848"/>
-                <a:gridCol w="1711756"/>
-                <a:gridCol w="3209544"/>
-                <a:gridCol w="2781604"/>
-                <a:gridCol w="1925726"/>
+                <a:gridCol w="1069848">
+                  <a:extLst>
+                    <a:ext uri="{9D8B030D-6E8A-4147-A177-3AD203B41FA5}">
+                      <a16:colId xmlns:a16="http://schemas.microsoft.com/office/drawing/2014/main" val="20000"/>
+                    </a:ext>
+                  </a:extLst>
+                </a:gridCol>
+                <a:gridCol w="1711756">
+                  <a:extLst>
+                    <a:ext uri="{9D8B030D-6E8A-4147-A177-3AD203B41FA5}">
+                      <a16:colId xmlns:a16="http://schemas.microsoft.com/office/drawing/2014/main" val="20001"/>
+                    </a:ext>
+                  </a:extLst>
+                </a:gridCol>
+                <a:gridCol w="3209544">
+                  <a:extLst>
+                    <a:ext uri="{9D8B030D-6E8A-4147-A177-3AD203B41FA5}">
+                      <a16:colId xmlns:a16="http://schemas.microsoft.com/office/drawing/2014/main" val="20002"/>
+                    </a:ext>
+                  </a:extLst>
+                </a:gridCol>
+                <a:gridCol w="2781604">
+                  <a:extLst>
+                    <a:ext uri="{9D8B030D-6E8A-4147-A177-3AD203B41FA5}">
+                      <a16:colId xmlns:a16="http://schemas.microsoft.com/office/drawing/2014/main" val="20003"/>
+                    </a:ext>
+                  </a:extLst>
+                </a:gridCol>
+                <a:gridCol w="1925726">
+                  <a:extLst>
+                    <a:ext uri="{9D8B030D-6E8A-4147-A177-3AD203B41FA5}">
+                      <a16:colId xmlns:a16="http://schemas.microsoft.com/office/drawing/2014/main" val="20004"/>
+                    </a:ext>
+                  </a:extLst>
+                </a:gridCol>
               </a:tblGrid>
               <a:tr h="420624">
                 <a:tc>
                   <a:txBody>
-                    <a:bodyPr wrap="square"/>
+                    <a:bodyPr/>
                     <a:lstStyle/>
                     <a:p>
                       <a:pPr algn="l"/>
@@ -6584,7 +6483,7 @@
                 </a:tc>
                 <a:tc>
                   <a:txBody>
-                    <a:bodyPr wrap="square"/>
+                    <a:bodyPr/>
                     <a:lstStyle/>
                     <a:p>
                       <a:pPr algn="l"/>
@@ -6609,7 +6508,7 @@
                 </a:tc>
                 <a:tc>
                   <a:txBody>
-                    <a:bodyPr wrap="square"/>
+                    <a:bodyPr/>
                     <a:lstStyle/>
                     <a:p>
                       <a:pPr algn="l"/>
@@ -6634,7 +6533,7 @@
                 </a:tc>
                 <a:tc>
                   <a:txBody>
-                    <a:bodyPr wrap="square"/>
+                    <a:bodyPr/>
                     <a:lstStyle/>
                     <a:p>
                       <a:pPr algn="l"/>
@@ -6659,7 +6558,7 @@
                 </a:tc>
                 <a:tc>
                   <a:txBody>
-                    <a:bodyPr wrap="square"/>
+                    <a:bodyPr/>
                     <a:lstStyle/>
                     <a:p>
                       <a:pPr algn="l"/>
@@ -6682,11 +6581,16 @@
                     </a:solidFill>
                   </a:tcPr>
                 </a:tc>
+                <a:extLst>
+                  <a:ext uri="{0D108BD9-81ED-4DB2-BD59-A6C34878D82A}">
+                    <a16:rowId xmlns:a16="http://schemas.microsoft.com/office/drawing/2014/main" val="10000"/>
+                  </a:ext>
+                </a:extLst>
               </a:tr>
               <a:tr h="420624">
                 <a:tc>
                   <a:txBody>
-                    <a:bodyPr wrap="square"/>
+                    <a:bodyPr/>
                     <a:lstStyle/>
                     <a:p>
                       <a:pPr algn="l"/>
@@ -6711,7 +6615,7 @@
                 </a:tc>
                 <a:tc>
                   <a:txBody>
-                    <a:bodyPr wrap="square"/>
+                    <a:bodyPr/>
                     <a:lstStyle/>
                     <a:p>
                       <a:pPr algn="l"/>
@@ -6736,7 +6640,7 @@
                 </a:tc>
                 <a:tc>
                   <a:txBody>
-                    <a:bodyPr wrap="square"/>
+                    <a:bodyPr/>
                     <a:lstStyle/>
                     <a:p>
                       <a:pPr algn="l"/>
@@ -6761,7 +6665,7 @@
                 </a:tc>
                 <a:tc>
                   <a:txBody>
-                    <a:bodyPr wrap="square"/>
+                    <a:bodyPr/>
                     <a:lstStyle/>
                     <a:p>
                       <a:pPr algn="l"/>
@@ -6786,7 +6690,7 @@
                 </a:tc>
                 <a:tc>
                   <a:txBody>
-                    <a:bodyPr wrap="square"/>
+                    <a:bodyPr/>
                     <a:lstStyle/>
                     <a:p>
                       <a:pPr algn="l"/>
@@ -6809,11 +6713,16 @@
                     </a:solidFill>
                   </a:tcPr>
                 </a:tc>
+                <a:extLst>
+                  <a:ext uri="{0D108BD9-81ED-4DB2-BD59-A6C34878D82A}">
+                    <a16:rowId xmlns:a16="http://schemas.microsoft.com/office/drawing/2014/main" val="10001"/>
+                  </a:ext>
+                </a:extLst>
               </a:tr>
               <a:tr h="420624">
                 <a:tc>
                   <a:txBody>
-                    <a:bodyPr wrap="square"/>
+                    <a:bodyPr/>
                     <a:lstStyle/>
                     <a:p>
                       <a:pPr algn="l"/>
@@ -6838,7 +6747,7 @@
                 </a:tc>
                 <a:tc>
                   <a:txBody>
-                    <a:bodyPr wrap="square"/>
+                    <a:bodyPr/>
                     <a:lstStyle/>
                     <a:p>
                       <a:pPr algn="l"/>
@@ -6863,7 +6772,7 @@
                 </a:tc>
                 <a:tc>
                   <a:txBody>
-                    <a:bodyPr wrap="square"/>
+                    <a:bodyPr/>
                     <a:lstStyle/>
                     <a:p>
                       <a:pPr algn="l"/>
@@ -6888,7 +6797,7 @@
                 </a:tc>
                 <a:tc>
                   <a:txBody>
-                    <a:bodyPr wrap="square"/>
+                    <a:bodyPr/>
                     <a:lstStyle/>
                     <a:p>
                       <a:pPr algn="l"/>
@@ -6913,7 +6822,7 @@
                 </a:tc>
                 <a:tc>
                   <a:txBody>
-                    <a:bodyPr wrap="square"/>
+                    <a:bodyPr/>
                     <a:lstStyle/>
                     <a:p>
                       <a:pPr algn="l"/>
@@ -6936,11 +6845,16 @@
                     </a:solidFill>
                   </a:tcPr>
                 </a:tc>
+                <a:extLst>
+                  <a:ext uri="{0D108BD9-81ED-4DB2-BD59-A6C34878D82A}">
+                    <a16:rowId xmlns:a16="http://schemas.microsoft.com/office/drawing/2014/main" val="10002"/>
+                  </a:ext>
+                </a:extLst>
               </a:tr>
               <a:tr h="420624">
                 <a:tc>
                   <a:txBody>
-                    <a:bodyPr wrap="square"/>
+                    <a:bodyPr/>
                     <a:lstStyle/>
                     <a:p>
                       <a:pPr algn="l"/>
@@ -6965,7 +6879,7 @@
                 </a:tc>
                 <a:tc>
                   <a:txBody>
-                    <a:bodyPr wrap="square"/>
+                    <a:bodyPr/>
                     <a:lstStyle/>
                     <a:p>
                       <a:pPr algn="l"/>
@@ -6990,7 +6904,7 @@
                 </a:tc>
                 <a:tc>
                   <a:txBody>
-                    <a:bodyPr wrap="square"/>
+                    <a:bodyPr/>
                     <a:lstStyle/>
                     <a:p>
                       <a:pPr algn="l"/>
@@ -7015,7 +6929,7 @@
                 </a:tc>
                 <a:tc>
                   <a:txBody>
-                    <a:bodyPr wrap="square"/>
+                    <a:bodyPr/>
                     <a:lstStyle/>
                     <a:p>
                       <a:pPr algn="l"/>
@@ -7040,7 +6954,7 @@
                 </a:tc>
                 <a:tc>
                   <a:txBody>
-                    <a:bodyPr wrap="square"/>
+                    <a:bodyPr/>
                     <a:lstStyle/>
                     <a:p>
                       <a:pPr algn="l"/>
@@ -7063,11 +6977,16 @@
                     </a:solidFill>
                   </a:tcPr>
                 </a:tc>
+                <a:extLst>
+                  <a:ext uri="{0D108BD9-81ED-4DB2-BD59-A6C34878D82A}">
+                    <a16:rowId xmlns:a16="http://schemas.microsoft.com/office/drawing/2014/main" val="10003"/>
+                  </a:ext>
+                </a:extLst>
               </a:tr>
               <a:tr h="420624">
                 <a:tc>
                   <a:txBody>
-                    <a:bodyPr wrap="square"/>
+                    <a:bodyPr/>
                     <a:lstStyle/>
                     <a:p>
                       <a:pPr algn="l"/>
@@ -7092,7 +7011,7 @@
                 </a:tc>
                 <a:tc>
                   <a:txBody>
-                    <a:bodyPr wrap="square"/>
+                    <a:bodyPr/>
                     <a:lstStyle/>
                     <a:p>
                       <a:pPr algn="l"/>
@@ -7117,7 +7036,7 @@
                 </a:tc>
                 <a:tc>
                   <a:txBody>
-                    <a:bodyPr wrap="square"/>
+                    <a:bodyPr/>
                     <a:lstStyle/>
                     <a:p>
                       <a:pPr algn="l"/>
@@ -7142,7 +7061,7 @@
                 </a:tc>
                 <a:tc>
                   <a:txBody>
-                    <a:bodyPr wrap="square"/>
+                    <a:bodyPr/>
                     <a:lstStyle/>
                     <a:p>
                       <a:pPr algn="l"/>
@@ -7167,7 +7086,7 @@
                 </a:tc>
                 <a:tc>
                   <a:txBody>
-                    <a:bodyPr wrap="square"/>
+                    <a:bodyPr/>
                     <a:lstStyle/>
                     <a:p>
                       <a:pPr algn="l"/>
@@ -7190,11 +7109,16 @@
                     </a:solidFill>
                   </a:tcPr>
                 </a:tc>
+                <a:extLst>
+                  <a:ext uri="{0D108BD9-81ED-4DB2-BD59-A6C34878D82A}">
+                    <a16:rowId xmlns:a16="http://schemas.microsoft.com/office/drawing/2014/main" val="10004"/>
+                  </a:ext>
+                </a:extLst>
               </a:tr>
               <a:tr h="420624">
                 <a:tc>
                   <a:txBody>
-                    <a:bodyPr wrap="square"/>
+                    <a:bodyPr/>
                     <a:lstStyle/>
                     <a:p>
                       <a:pPr algn="l"/>
@@ -7219,7 +7143,7 @@
                 </a:tc>
                 <a:tc>
                   <a:txBody>
-                    <a:bodyPr wrap="square"/>
+                    <a:bodyPr/>
                     <a:lstStyle/>
                     <a:p>
                       <a:pPr algn="l"/>
@@ -7244,7 +7168,7 @@
                 </a:tc>
                 <a:tc>
                   <a:txBody>
-                    <a:bodyPr wrap="square"/>
+                    <a:bodyPr/>
                     <a:lstStyle/>
                     <a:p>
                       <a:pPr algn="l"/>
@@ -7269,7 +7193,7 @@
                 </a:tc>
                 <a:tc>
                   <a:txBody>
-                    <a:bodyPr wrap="square"/>
+                    <a:bodyPr/>
                     <a:lstStyle/>
                     <a:p>
                       <a:pPr algn="l"/>
@@ -7294,7 +7218,7 @@
                 </a:tc>
                 <a:tc>
                   <a:txBody>
-                    <a:bodyPr wrap="square"/>
+                    <a:bodyPr/>
                     <a:lstStyle/>
                     <a:p>
                       <a:pPr algn="l"/>
@@ -7317,11 +7241,16 @@
                     </a:solidFill>
                   </a:tcPr>
                 </a:tc>
+                <a:extLst>
+                  <a:ext uri="{0D108BD9-81ED-4DB2-BD59-A6C34878D82A}">
+                    <a16:rowId xmlns:a16="http://schemas.microsoft.com/office/drawing/2014/main" val="10005"/>
+                  </a:ext>
+                </a:extLst>
               </a:tr>
               <a:tr h="420624">
                 <a:tc>
                   <a:txBody>
-                    <a:bodyPr wrap="square"/>
+                    <a:bodyPr/>
                     <a:lstStyle/>
                     <a:p>
                       <a:pPr algn="l"/>
@@ -7346,7 +7275,7 @@
                 </a:tc>
                 <a:tc>
                   <a:txBody>
-                    <a:bodyPr wrap="square"/>
+                    <a:bodyPr/>
                     <a:lstStyle/>
                     <a:p>
                       <a:pPr algn="l"/>
@@ -7371,7 +7300,7 @@
                 </a:tc>
                 <a:tc>
                   <a:txBody>
-                    <a:bodyPr wrap="square"/>
+                    <a:bodyPr/>
                     <a:lstStyle/>
                     <a:p>
                       <a:pPr algn="l"/>
@@ -7396,7 +7325,7 @@
                 </a:tc>
                 <a:tc>
                   <a:txBody>
-                    <a:bodyPr wrap="square"/>
+                    <a:bodyPr/>
                     <a:lstStyle/>
                     <a:p>
                       <a:pPr algn="l"/>
@@ -7421,7 +7350,7 @@
                 </a:tc>
                 <a:tc>
                   <a:txBody>
-                    <a:bodyPr wrap="square"/>
+                    <a:bodyPr/>
                     <a:lstStyle/>
                     <a:p>
                       <a:pPr algn="l"/>
@@ -7444,11 +7373,16 @@
                     </a:solidFill>
                   </a:tcPr>
                 </a:tc>
+                <a:extLst>
+                  <a:ext uri="{0D108BD9-81ED-4DB2-BD59-A6C34878D82A}">
+                    <a16:rowId xmlns:a16="http://schemas.microsoft.com/office/drawing/2014/main" val="10006"/>
+                  </a:ext>
+                </a:extLst>
               </a:tr>
               <a:tr h="420624">
                 <a:tc>
                   <a:txBody>
-                    <a:bodyPr wrap="square"/>
+                    <a:bodyPr/>
                     <a:lstStyle/>
                     <a:p>
                       <a:pPr algn="l"/>
@@ -7473,7 +7407,7 @@
                 </a:tc>
                 <a:tc>
                   <a:txBody>
-                    <a:bodyPr wrap="square"/>
+                    <a:bodyPr/>
                     <a:lstStyle/>
                     <a:p>
                       <a:pPr algn="l"/>
@@ -7498,7 +7432,7 @@
                 </a:tc>
                 <a:tc>
                   <a:txBody>
-                    <a:bodyPr wrap="square"/>
+                    <a:bodyPr/>
                     <a:lstStyle/>
                     <a:p>
                       <a:pPr algn="l"/>
@@ -7523,7 +7457,7 @@
                 </a:tc>
                 <a:tc>
                   <a:txBody>
-                    <a:bodyPr wrap="square"/>
+                    <a:bodyPr/>
                     <a:lstStyle/>
                     <a:p>
                       <a:pPr algn="l"/>
@@ -7548,7 +7482,7 @@
                 </a:tc>
                 <a:tc>
                   <a:txBody>
-                    <a:bodyPr wrap="square"/>
+                    <a:bodyPr/>
                     <a:lstStyle/>
                     <a:p>
                       <a:pPr algn="l"/>
@@ -7571,6 +7505,11 @@
                     </a:solidFill>
                   </a:tcPr>
                 </a:tc>
+                <a:extLst>
+                  <a:ext uri="{0D108BD9-81ED-4DB2-BD59-A6C34878D82A}">
+                    <a16:rowId xmlns:a16="http://schemas.microsoft.com/office/drawing/2014/main" val="10007"/>
+                  </a:ext>
+                </a:extLst>
               </a:tr>
             </a:tbl>
           </a:graphicData>
@@ -7593,7 +7532,7 @@
           <a:noFill/>
         </p:spPr>
         <p:txBody>
-          <a:bodyPr wrap="square" anchor="t" lIns="50800" rIns="50800" tIns="25400" bIns="25400">
+          <a:bodyPr wrap="square" lIns="50800" tIns="25400" rIns="50800" bIns="25400" anchor="t">
             <a:spAutoFit/>
           </a:bodyPr>
           <a:lstStyle/>
@@ -7662,7 +7601,7 @@
 </file>
 
 <file path=ppt/slides/slide13.xml><?xml version="1.0" encoding="utf-8"?>
-<p:sld xmlns:a="http://schemas.openxmlformats.org/drawingml/2006/main" xmlns:p="http://schemas.openxmlformats.org/presentationml/2006/main" xmlns:r="http://schemas.openxmlformats.org/officeDocument/2006/relationships">
+<p:sld xmlns:a="http://schemas.openxmlformats.org/drawingml/2006/main" xmlns:r="http://schemas.openxmlformats.org/officeDocument/2006/relationships" xmlns:p="http://schemas.openxmlformats.org/presentationml/2006/main">
   <p:cSld>
     <p:spTree>
       <p:nvGrpSpPr>
@@ -7670,7 +7609,14 @@
         <p:cNvGrpSpPr/>
         <p:nvPr/>
       </p:nvGrpSpPr>
-      <p:grpSpPr/>
+      <p:grpSpPr>
+        <a:xfrm>
+          <a:off x="0" y="0"/>
+          <a:ext cx="0" cy="0"/>
+          <a:chOff x="0" y="0"/>
+          <a:chExt cx="0" cy="0"/>
+        </a:xfrm>
+      </p:grpSpPr>
       <p:sp>
         <p:nvSpPr>
           <p:cNvPr id="2" name="Rectangle 1"/>
@@ -7711,6 +7657,7 @@
           <a:lstStyle/>
           <a:p>
             <a:pPr algn="ctr"/>
+            <a:endParaRPr/>
           </a:p>
         </p:txBody>
       </p:sp>
@@ -7750,7 +7697,7 @@
           </a:fontRef>
         </p:style>
         <p:txBody>
-          <a:bodyPr rtlCol="0" anchor="ctr" wrap="none" lIns="25400" rIns="25400"/>
+          <a:bodyPr wrap="none" lIns="25400" rIns="25400" rtlCol="0" anchor="ctr"/>
           <a:lstStyle/>
           <a:p>
             <a:pPr algn="ctr"/>
@@ -7785,7 +7732,7 @@
           <a:noFill/>
         </p:spPr>
         <p:txBody>
-          <a:bodyPr wrap="square" anchor="ctr" lIns="50800" rIns="50800" tIns="25400" bIns="25400">
+          <a:bodyPr wrap="square" lIns="50800" tIns="25400" rIns="50800" bIns="25400" anchor="ctr">
             <a:spAutoFit/>
           </a:bodyPr>
           <a:lstStyle/>
@@ -7849,6 +7796,7 @@
           <a:lstStyle/>
           <a:p>
             <a:pPr algn="ctr"/>
+            <a:endParaRPr/>
           </a:p>
         </p:txBody>
       </p:sp>
@@ -7861,7 +7809,7 @@
           <p:nvPr/>
         </p:nvPicPr>
         <p:blipFill>
-          <a:blip r:embed="rId2"/>
+          <a:blip r:embed="rId3"/>
           <a:stretch>
             <a:fillRect/>
           </a:stretch>
@@ -7895,14 +7843,32 @@
                 <a:tableStyleId>{5C22544A-7EE6-4342-B048-85BDC9FD1C3A}</a:tableStyleId>
               </a:tblPr>
               <a:tblGrid>
-                <a:gridCol w="1207008"/>
-                <a:gridCol w="1528876"/>
-                <a:gridCol w="1287475"/>
+                <a:gridCol w="1207008">
+                  <a:extLst>
+                    <a:ext uri="{9D8B030D-6E8A-4147-A177-3AD203B41FA5}">
+                      <a16:colId xmlns:a16="http://schemas.microsoft.com/office/drawing/2014/main" val="20000"/>
+                    </a:ext>
+                  </a:extLst>
+                </a:gridCol>
+                <a:gridCol w="1528876">
+                  <a:extLst>
+                    <a:ext uri="{9D8B030D-6E8A-4147-A177-3AD203B41FA5}">
+                      <a16:colId xmlns:a16="http://schemas.microsoft.com/office/drawing/2014/main" val="20001"/>
+                    </a:ext>
+                  </a:extLst>
+                </a:gridCol>
+                <a:gridCol w="1287475">
+                  <a:extLst>
+                    <a:ext uri="{9D8B030D-6E8A-4147-A177-3AD203B41FA5}">
+                      <a16:colId xmlns:a16="http://schemas.microsoft.com/office/drawing/2014/main" val="20002"/>
+                    </a:ext>
+                  </a:extLst>
+                </a:gridCol>
               </a:tblGrid>
               <a:tr h="384048">
                 <a:tc>
                   <a:txBody>
-                    <a:bodyPr wrap="square"/>
+                    <a:bodyPr/>
                     <a:lstStyle/>
                     <a:p>
                       <a:pPr algn="l"/>
@@ -7927,7 +7893,7 @@
                 </a:tc>
                 <a:tc>
                   <a:txBody>
-                    <a:bodyPr wrap="square"/>
+                    <a:bodyPr/>
                     <a:lstStyle/>
                     <a:p>
                       <a:pPr algn="l"/>
@@ -7952,7 +7918,7 @@
                 </a:tc>
                 <a:tc>
                   <a:txBody>
-                    <a:bodyPr wrap="square"/>
+                    <a:bodyPr/>
                     <a:lstStyle/>
                     <a:p>
                       <a:pPr algn="l"/>
@@ -7975,11 +7941,16 @@
                     </a:solidFill>
                   </a:tcPr>
                 </a:tc>
+                <a:extLst>
+                  <a:ext uri="{0D108BD9-81ED-4DB2-BD59-A6C34878D82A}">
+                    <a16:rowId xmlns:a16="http://schemas.microsoft.com/office/drawing/2014/main" val="10000"/>
+                  </a:ext>
+                </a:extLst>
               </a:tr>
               <a:tr h="384048">
                 <a:tc>
                   <a:txBody>
-                    <a:bodyPr wrap="square"/>
+                    <a:bodyPr/>
                     <a:lstStyle/>
                     <a:p>
                       <a:pPr algn="l"/>
@@ -8004,7 +7975,7 @@
                 </a:tc>
                 <a:tc>
                   <a:txBody>
-                    <a:bodyPr wrap="square"/>
+                    <a:bodyPr/>
                     <a:lstStyle/>
                     <a:p>
                       <a:pPr algn="l"/>
@@ -8029,7 +8000,7 @@
                 </a:tc>
                 <a:tc>
                   <a:txBody>
-                    <a:bodyPr wrap="square"/>
+                    <a:bodyPr/>
                     <a:lstStyle/>
                     <a:p>
                       <a:pPr algn="l"/>
@@ -8052,11 +8023,16 @@
                     </a:solidFill>
                   </a:tcPr>
                 </a:tc>
+                <a:extLst>
+                  <a:ext uri="{0D108BD9-81ED-4DB2-BD59-A6C34878D82A}">
+                    <a16:rowId xmlns:a16="http://schemas.microsoft.com/office/drawing/2014/main" val="10001"/>
+                  </a:ext>
+                </a:extLst>
               </a:tr>
               <a:tr h="384048">
                 <a:tc>
                   <a:txBody>
-                    <a:bodyPr wrap="square"/>
+                    <a:bodyPr/>
                     <a:lstStyle/>
                     <a:p>
                       <a:pPr algn="l"/>
@@ -8081,7 +8057,7 @@
                 </a:tc>
                 <a:tc>
                   <a:txBody>
-                    <a:bodyPr wrap="square"/>
+                    <a:bodyPr/>
                     <a:lstStyle/>
                     <a:p>
                       <a:pPr algn="l"/>
@@ -8106,7 +8082,7 @@
                 </a:tc>
                 <a:tc>
                   <a:txBody>
-                    <a:bodyPr wrap="square"/>
+                    <a:bodyPr/>
                     <a:lstStyle/>
                     <a:p>
                       <a:pPr algn="l"/>
@@ -8129,11 +8105,16 @@
                     </a:solidFill>
                   </a:tcPr>
                 </a:tc>
+                <a:extLst>
+                  <a:ext uri="{0D108BD9-81ED-4DB2-BD59-A6C34878D82A}">
+                    <a16:rowId xmlns:a16="http://schemas.microsoft.com/office/drawing/2014/main" val="10002"/>
+                  </a:ext>
+                </a:extLst>
               </a:tr>
               <a:tr h="384048">
                 <a:tc>
                   <a:txBody>
-                    <a:bodyPr wrap="square"/>
+                    <a:bodyPr/>
                     <a:lstStyle/>
                     <a:p>
                       <a:pPr algn="l"/>
@@ -8158,7 +8139,7 @@
                 </a:tc>
                 <a:tc>
                   <a:txBody>
-                    <a:bodyPr wrap="square"/>
+                    <a:bodyPr/>
                     <a:lstStyle/>
                     <a:p>
                       <a:pPr algn="l"/>
@@ -8183,7 +8164,7 @@
                 </a:tc>
                 <a:tc>
                   <a:txBody>
-                    <a:bodyPr wrap="square"/>
+                    <a:bodyPr/>
                     <a:lstStyle/>
                     <a:p>
                       <a:pPr algn="l"/>
@@ -8206,6 +8187,11 @@
                     </a:solidFill>
                   </a:tcPr>
                 </a:tc>
+                <a:extLst>
+                  <a:ext uri="{0D108BD9-81ED-4DB2-BD59-A6C34878D82A}">
+                    <a16:rowId xmlns:a16="http://schemas.microsoft.com/office/drawing/2014/main" val="10003"/>
+                  </a:ext>
+                </a:extLst>
               </a:tr>
             </a:tbl>
           </a:graphicData>
@@ -8228,7 +8214,7 @@
           <a:noFill/>
         </p:spPr>
         <p:txBody>
-          <a:bodyPr wrap="square" anchor="t" lIns="50800" rIns="50800" tIns="25400" bIns="25400">
+          <a:bodyPr wrap="square" lIns="50800" tIns="25400" rIns="50800" bIns="25400" anchor="t">
             <a:spAutoFit/>
           </a:bodyPr>
           <a:lstStyle/>
@@ -8323,7 +8309,7 @@
           <a:noFill/>
         </p:spPr>
         <p:txBody>
-          <a:bodyPr wrap="square" anchor="t" lIns="50800" rIns="50800" tIns="25400" bIns="25400">
+          <a:bodyPr wrap="square" lIns="50800" tIns="25400" rIns="50800" bIns="25400" anchor="t">
             <a:spAutoFit/>
           </a:bodyPr>
           <a:lstStyle/>
@@ -8356,7 +8342,7 @@
 </file>
 
 <file path=ppt/slides/slide14.xml><?xml version="1.0" encoding="utf-8"?>
-<p:sld xmlns:a="http://schemas.openxmlformats.org/drawingml/2006/main" xmlns:p="http://schemas.openxmlformats.org/presentationml/2006/main" xmlns:r="http://schemas.openxmlformats.org/officeDocument/2006/relationships">
+<p:sld xmlns:a="http://schemas.openxmlformats.org/drawingml/2006/main" xmlns:r="http://schemas.openxmlformats.org/officeDocument/2006/relationships" xmlns:p="http://schemas.openxmlformats.org/presentationml/2006/main">
   <p:cSld>
     <p:spTree>
       <p:nvGrpSpPr>
@@ -8364,7 +8350,14 @@
         <p:cNvGrpSpPr/>
         <p:nvPr/>
       </p:nvGrpSpPr>
-      <p:grpSpPr/>
+      <p:grpSpPr>
+        <a:xfrm>
+          <a:off x="0" y="0"/>
+          <a:ext cx="0" cy="0"/>
+          <a:chOff x="0" y="0"/>
+          <a:chExt cx="0" cy="0"/>
+        </a:xfrm>
+      </p:grpSpPr>
       <p:sp>
         <p:nvSpPr>
           <p:cNvPr id="2" name="Rectangle 1"/>
@@ -8405,6 +8398,7 @@
           <a:lstStyle/>
           <a:p>
             <a:pPr algn="ctr"/>
+            <a:endParaRPr/>
           </a:p>
         </p:txBody>
       </p:sp>
@@ -8444,7 +8438,7 @@
           </a:fontRef>
         </p:style>
         <p:txBody>
-          <a:bodyPr rtlCol="0" anchor="ctr" wrap="none" lIns="25400" rIns="25400"/>
+          <a:bodyPr wrap="none" lIns="25400" rIns="25400" rtlCol="0" anchor="ctr"/>
           <a:lstStyle/>
           <a:p>
             <a:pPr algn="ctr"/>
@@ -8479,7 +8473,7 @@
           <a:noFill/>
         </p:spPr>
         <p:txBody>
-          <a:bodyPr wrap="square" anchor="ctr" lIns="50800" rIns="50800" tIns="25400" bIns="25400">
+          <a:bodyPr wrap="square" lIns="50800" tIns="25400" rIns="50800" bIns="25400" anchor="ctr">
             <a:spAutoFit/>
           </a:bodyPr>
           <a:lstStyle/>
@@ -8543,6 +8537,7 @@
           <a:lstStyle/>
           <a:p>
             <a:pPr algn="ctr"/>
+            <a:endParaRPr/>
           </a:p>
         </p:txBody>
       </p:sp>
@@ -8565,16 +8560,46 @@
                 <a:tableStyleId>{5C22544A-7EE6-4342-B048-85BDC9FD1C3A}</a:tableStyleId>
               </a:tblPr>
               <a:tblGrid>
-                <a:gridCol w="1711756"/>
-                <a:gridCol w="2353665"/>
-                <a:gridCol w="2353665"/>
-                <a:gridCol w="2353665"/>
-                <a:gridCol w="1925726"/>
+                <a:gridCol w="1711756">
+                  <a:extLst>
+                    <a:ext uri="{9D8B030D-6E8A-4147-A177-3AD203B41FA5}">
+                      <a16:colId xmlns:a16="http://schemas.microsoft.com/office/drawing/2014/main" val="20000"/>
+                    </a:ext>
+                  </a:extLst>
+                </a:gridCol>
+                <a:gridCol w="2353665">
+                  <a:extLst>
+                    <a:ext uri="{9D8B030D-6E8A-4147-A177-3AD203B41FA5}">
+                      <a16:colId xmlns:a16="http://schemas.microsoft.com/office/drawing/2014/main" val="20001"/>
+                    </a:ext>
+                  </a:extLst>
+                </a:gridCol>
+                <a:gridCol w="2353665">
+                  <a:extLst>
+                    <a:ext uri="{9D8B030D-6E8A-4147-A177-3AD203B41FA5}">
+                      <a16:colId xmlns:a16="http://schemas.microsoft.com/office/drawing/2014/main" val="20002"/>
+                    </a:ext>
+                  </a:extLst>
+                </a:gridCol>
+                <a:gridCol w="2353665">
+                  <a:extLst>
+                    <a:ext uri="{9D8B030D-6E8A-4147-A177-3AD203B41FA5}">
+                      <a16:colId xmlns:a16="http://schemas.microsoft.com/office/drawing/2014/main" val="20003"/>
+                    </a:ext>
+                  </a:extLst>
+                </a:gridCol>
+                <a:gridCol w="1925726">
+                  <a:extLst>
+                    <a:ext uri="{9D8B030D-6E8A-4147-A177-3AD203B41FA5}">
+                      <a16:colId xmlns:a16="http://schemas.microsoft.com/office/drawing/2014/main" val="20004"/>
+                    </a:ext>
+                  </a:extLst>
+                </a:gridCol>
               </a:tblGrid>
               <a:tr h="420624">
                 <a:tc>
                   <a:txBody>
-                    <a:bodyPr wrap="square"/>
+                    <a:bodyPr/>
                     <a:lstStyle/>
                     <a:p>
                       <a:pPr algn="l"/>
@@ -8599,7 +8624,7 @@
                 </a:tc>
                 <a:tc>
                   <a:txBody>
-                    <a:bodyPr wrap="square"/>
+                    <a:bodyPr/>
                     <a:lstStyle/>
                     <a:p>
                       <a:pPr algn="l"/>
@@ -8624,7 +8649,7 @@
                 </a:tc>
                 <a:tc>
                   <a:txBody>
-                    <a:bodyPr wrap="square"/>
+                    <a:bodyPr/>
                     <a:lstStyle/>
                     <a:p>
                       <a:pPr algn="l"/>
@@ -8649,7 +8674,7 @@
                 </a:tc>
                 <a:tc>
                   <a:txBody>
-                    <a:bodyPr wrap="square"/>
+                    <a:bodyPr/>
                     <a:lstStyle/>
                     <a:p>
                       <a:pPr algn="l"/>
@@ -8674,7 +8699,7 @@
                 </a:tc>
                 <a:tc>
                   <a:txBody>
-                    <a:bodyPr wrap="square"/>
+                    <a:bodyPr/>
                     <a:lstStyle/>
                     <a:p>
                       <a:pPr algn="l"/>
@@ -8697,11 +8722,16 @@
                     </a:solidFill>
                   </a:tcPr>
                 </a:tc>
+                <a:extLst>
+                  <a:ext uri="{0D108BD9-81ED-4DB2-BD59-A6C34878D82A}">
+                    <a16:rowId xmlns:a16="http://schemas.microsoft.com/office/drawing/2014/main" val="10000"/>
+                  </a:ext>
+                </a:extLst>
               </a:tr>
               <a:tr h="420624">
                 <a:tc>
                   <a:txBody>
-                    <a:bodyPr wrap="square"/>
+                    <a:bodyPr/>
                     <a:lstStyle/>
                     <a:p>
                       <a:pPr algn="l"/>
@@ -8726,7 +8756,7 @@
                 </a:tc>
                 <a:tc>
                   <a:txBody>
-                    <a:bodyPr wrap="square"/>
+                    <a:bodyPr/>
                     <a:lstStyle/>
                     <a:p>
                       <a:pPr algn="l"/>
@@ -8751,7 +8781,7 @@
                 </a:tc>
                 <a:tc>
                   <a:txBody>
-                    <a:bodyPr wrap="square"/>
+                    <a:bodyPr/>
                     <a:lstStyle/>
                     <a:p>
                       <a:pPr algn="l"/>
@@ -8776,7 +8806,7 @@
                 </a:tc>
                 <a:tc>
                   <a:txBody>
-                    <a:bodyPr wrap="square"/>
+                    <a:bodyPr/>
                     <a:lstStyle/>
                     <a:p>
                       <a:pPr algn="l"/>
@@ -8801,7 +8831,7 @@
                 </a:tc>
                 <a:tc>
                   <a:txBody>
-                    <a:bodyPr wrap="square"/>
+                    <a:bodyPr/>
                     <a:lstStyle/>
                     <a:p>
                       <a:pPr algn="l"/>
@@ -8824,11 +8854,16 @@
                     </a:solidFill>
                   </a:tcPr>
                 </a:tc>
+                <a:extLst>
+                  <a:ext uri="{0D108BD9-81ED-4DB2-BD59-A6C34878D82A}">
+                    <a16:rowId xmlns:a16="http://schemas.microsoft.com/office/drawing/2014/main" val="10001"/>
+                  </a:ext>
+                </a:extLst>
               </a:tr>
               <a:tr h="420624">
                 <a:tc>
                   <a:txBody>
-                    <a:bodyPr wrap="square"/>
+                    <a:bodyPr/>
                     <a:lstStyle/>
                     <a:p>
                       <a:pPr algn="l"/>
@@ -8853,7 +8888,7 @@
                 </a:tc>
                 <a:tc>
                   <a:txBody>
-                    <a:bodyPr wrap="square"/>
+                    <a:bodyPr/>
                     <a:lstStyle/>
                     <a:p>
                       <a:pPr algn="l"/>
@@ -8878,7 +8913,7 @@
                 </a:tc>
                 <a:tc>
                   <a:txBody>
-                    <a:bodyPr wrap="square"/>
+                    <a:bodyPr/>
                     <a:lstStyle/>
                     <a:p>
                       <a:pPr algn="l"/>
@@ -8903,7 +8938,7 @@
                 </a:tc>
                 <a:tc>
                   <a:txBody>
-                    <a:bodyPr wrap="square"/>
+                    <a:bodyPr/>
                     <a:lstStyle/>
                     <a:p>
                       <a:pPr algn="l"/>
@@ -8928,7 +8963,7 @@
                 </a:tc>
                 <a:tc>
                   <a:txBody>
-                    <a:bodyPr wrap="square"/>
+                    <a:bodyPr/>
                     <a:lstStyle/>
                     <a:p>
                       <a:pPr algn="l"/>
@@ -8951,11 +8986,16 @@
                     </a:solidFill>
                   </a:tcPr>
                 </a:tc>
+                <a:extLst>
+                  <a:ext uri="{0D108BD9-81ED-4DB2-BD59-A6C34878D82A}">
+                    <a16:rowId xmlns:a16="http://schemas.microsoft.com/office/drawing/2014/main" val="10002"/>
+                  </a:ext>
+                </a:extLst>
               </a:tr>
               <a:tr h="420624">
                 <a:tc>
                   <a:txBody>
-                    <a:bodyPr wrap="square"/>
+                    <a:bodyPr/>
                     <a:lstStyle/>
                     <a:p>
                       <a:pPr algn="l"/>
@@ -8980,7 +9020,7 @@
                 </a:tc>
                 <a:tc>
                   <a:txBody>
-                    <a:bodyPr wrap="square"/>
+                    <a:bodyPr/>
                     <a:lstStyle/>
                     <a:p>
                       <a:pPr algn="l"/>
@@ -9005,7 +9045,7 @@
                 </a:tc>
                 <a:tc>
                   <a:txBody>
-                    <a:bodyPr wrap="square"/>
+                    <a:bodyPr/>
                     <a:lstStyle/>
                     <a:p>
                       <a:pPr algn="l"/>
@@ -9030,7 +9070,7 @@
                 </a:tc>
                 <a:tc>
                   <a:txBody>
-                    <a:bodyPr wrap="square"/>
+                    <a:bodyPr/>
                     <a:lstStyle/>
                     <a:p>
                       <a:pPr algn="l"/>
@@ -9055,7 +9095,7 @@
                 </a:tc>
                 <a:tc>
                   <a:txBody>
-                    <a:bodyPr wrap="square"/>
+                    <a:bodyPr/>
                     <a:lstStyle/>
                     <a:p>
                       <a:pPr algn="l"/>
@@ -9078,6 +9118,11 @@
                     </a:solidFill>
                   </a:tcPr>
                 </a:tc>
+                <a:extLst>
+                  <a:ext uri="{0D108BD9-81ED-4DB2-BD59-A6C34878D82A}">
+                    <a16:rowId xmlns:a16="http://schemas.microsoft.com/office/drawing/2014/main" val="10003"/>
+                  </a:ext>
+                </a:extLst>
               </a:tr>
             </a:tbl>
           </a:graphicData>
@@ -9100,7 +9145,7 @@
           <a:noFill/>
         </p:spPr>
         <p:txBody>
-          <a:bodyPr wrap="square" anchor="t" lIns="50800" rIns="50800" tIns="25400" bIns="25400">
+          <a:bodyPr wrap="square" lIns="50800" tIns="25400" rIns="50800" bIns="25400" anchor="t">
             <a:spAutoFit/>
           </a:bodyPr>
           <a:lstStyle/>
@@ -9236,6 +9281,7 @@
           <a:lstStyle/>
           <a:p>
             <a:pPr algn="ctr"/>
+            <a:endParaRPr/>
           </a:p>
         </p:txBody>
       </p:sp>
@@ -9256,7 +9302,7 @@
           <a:noFill/>
         </p:spPr>
         <p:txBody>
-          <a:bodyPr wrap="square" anchor="t" lIns="50800" rIns="50800" tIns="25400" bIns="25400">
+          <a:bodyPr wrap="square" lIns="50800" tIns="25400" rIns="50800" bIns="25400" anchor="t">
             <a:spAutoFit/>
           </a:bodyPr>
           <a:lstStyle/>
@@ -9343,7 +9389,7 @@
 </file>
 
 <file path=ppt/slides/slide15.xml><?xml version="1.0" encoding="utf-8"?>
-<p:sld xmlns:a="http://schemas.openxmlformats.org/drawingml/2006/main" xmlns:p="http://schemas.openxmlformats.org/presentationml/2006/main" xmlns:r="http://schemas.openxmlformats.org/officeDocument/2006/relationships">
+<p:sld xmlns:a="http://schemas.openxmlformats.org/drawingml/2006/main" xmlns:r="http://schemas.openxmlformats.org/officeDocument/2006/relationships" xmlns:p="http://schemas.openxmlformats.org/presentationml/2006/main">
   <p:cSld>
     <p:spTree>
       <p:nvGrpSpPr>
@@ -9351,7 +9397,14 @@
         <p:cNvGrpSpPr/>
         <p:nvPr/>
       </p:nvGrpSpPr>
-      <p:grpSpPr/>
+      <p:grpSpPr>
+        <a:xfrm>
+          <a:off x="0" y="0"/>
+          <a:ext cx="0" cy="0"/>
+          <a:chOff x="0" y="0"/>
+          <a:chExt cx="0" cy="0"/>
+        </a:xfrm>
+      </p:grpSpPr>
       <p:sp>
         <p:nvSpPr>
           <p:cNvPr id="2" name="Rectangle 1"/>
@@ -9392,6 +9445,7 @@
           <a:lstStyle/>
           <a:p>
             <a:pPr algn="ctr"/>
+            <a:endParaRPr/>
           </a:p>
         </p:txBody>
       </p:sp>
@@ -9431,7 +9485,7 @@
           </a:fontRef>
         </p:style>
         <p:txBody>
-          <a:bodyPr rtlCol="0" anchor="ctr" wrap="none" lIns="25400" rIns="25400"/>
+          <a:bodyPr wrap="none" lIns="25400" rIns="25400" rtlCol="0" anchor="ctr"/>
           <a:lstStyle/>
           <a:p>
             <a:pPr algn="ctr"/>
@@ -9466,7 +9520,7 @@
           <a:noFill/>
         </p:spPr>
         <p:txBody>
-          <a:bodyPr wrap="square" anchor="ctr" lIns="50800" rIns="50800" tIns="25400" bIns="25400">
+          <a:bodyPr wrap="square" lIns="50800" tIns="25400" rIns="50800" bIns="25400" anchor="ctr">
             <a:spAutoFit/>
           </a:bodyPr>
           <a:lstStyle/>
@@ -9530,6 +9584,7 @@
           <a:lstStyle/>
           <a:p>
             <a:pPr algn="ctr"/>
+            <a:endParaRPr/>
           </a:p>
         </p:txBody>
       </p:sp>
@@ -9550,7 +9605,7 @@
           <a:noFill/>
         </p:spPr>
         <p:txBody>
-          <a:bodyPr wrap="square" anchor="t" lIns="50800" rIns="50800" tIns="25400" bIns="25400">
+          <a:bodyPr wrap="square" lIns="50800" tIns="25400" rIns="50800" bIns="25400" anchor="t">
             <a:spAutoFit/>
           </a:bodyPr>
           <a:lstStyle/>
@@ -9722,6 +9777,7 @@
           <a:lstStyle/>
           <a:p>
             <a:pPr algn="ctr"/>
+            <a:endParaRPr/>
           </a:p>
         </p:txBody>
       </p:sp>
@@ -9742,7 +9798,7 @@
           <a:noFill/>
         </p:spPr>
         <p:txBody>
-          <a:bodyPr wrap="square" anchor="t" lIns="50800" rIns="50800" tIns="25400" bIns="25400">
+          <a:bodyPr wrap="square" lIns="50800" tIns="25400" rIns="50800" bIns="25400" anchor="t">
             <a:spAutoFit/>
           </a:bodyPr>
           <a:lstStyle/>
@@ -9860,6 +9916,7 @@
           <a:lstStyle/>
           <a:p>
             <a:pPr algn="ctr"/>
+            <a:endParaRPr/>
           </a:p>
         </p:txBody>
       </p:sp>
@@ -9880,7 +9937,7 @@
           <a:noFill/>
         </p:spPr>
         <p:txBody>
-          <a:bodyPr wrap="square" anchor="t" lIns="50800" rIns="50800" tIns="25400" bIns="25400">
+          <a:bodyPr wrap="square" lIns="50800" tIns="25400" rIns="50800" bIns="25400" anchor="t">
             <a:spAutoFit/>
           </a:bodyPr>
           <a:lstStyle/>
@@ -9931,7 +9988,7 @@
 </file>
 
 <file path=ppt/slides/slide16.xml><?xml version="1.0" encoding="utf-8"?>
-<p:sld xmlns:a="http://schemas.openxmlformats.org/drawingml/2006/main" xmlns:p="http://schemas.openxmlformats.org/presentationml/2006/main" xmlns:r="http://schemas.openxmlformats.org/officeDocument/2006/relationships">
+<p:sld xmlns:a="http://schemas.openxmlformats.org/drawingml/2006/main" xmlns:r="http://schemas.openxmlformats.org/officeDocument/2006/relationships" xmlns:p="http://schemas.openxmlformats.org/presentationml/2006/main">
   <p:cSld>
     <p:spTree>
       <p:nvGrpSpPr>
@@ -9939,7 +9996,14 @@
         <p:cNvGrpSpPr/>
         <p:nvPr/>
       </p:nvGrpSpPr>
-      <p:grpSpPr/>
+      <p:grpSpPr>
+        <a:xfrm>
+          <a:off x="0" y="0"/>
+          <a:ext cx="0" cy="0"/>
+          <a:chOff x="0" y="0"/>
+          <a:chExt cx="0" cy="0"/>
+        </a:xfrm>
+      </p:grpSpPr>
       <p:sp>
         <p:nvSpPr>
           <p:cNvPr id="2" name="Rectangle 1"/>
@@ -9980,6 +10044,7 @@
           <a:lstStyle/>
           <a:p>
             <a:pPr algn="ctr"/>
+            <a:endParaRPr/>
           </a:p>
         </p:txBody>
       </p:sp>
@@ -10019,7 +10084,7 @@
           </a:fontRef>
         </p:style>
         <p:txBody>
-          <a:bodyPr rtlCol="0" anchor="ctr" wrap="none" lIns="25400" rIns="25400"/>
+          <a:bodyPr wrap="none" lIns="25400" rIns="25400" rtlCol="0" anchor="ctr"/>
           <a:lstStyle/>
           <a:p>
             <a:pPr algn="ctr"/>
@@ -10054,7 +10119,7 @@
           <a:noFill/>
         </p:spPr>
         <p:txBody>
-          <a:bodyPr wrap="square" anchor="ctr" lIns="50800" rIns="50800" tIns="25400" bIns="25400">
+          <a:bodyPr wrap="square" lIns="50800" tIns="25400" rIns="50800" bIns="25400" anchor="ctr">
             <a:spAutoFit/>
           </a:bodyPr>
           <a:lstStyle/>
@@ -10118,6 +10183,7 @@
           <a:lstStyle/>
           <a:p>
             <a:pPr algn="ctr"/>
+            <a:endParaRPr/>
           </a:p>
         </p:txBody>
       </p:sp>
@@ -10140,14 +10206,32 @@
                 <a:tableStyleId>{5C22544A-7EE6-4342-B048-85BDC9FD1C3A}</a:tableStyleId>
               </a:tblPr>
               <a:tblGrid>
-                <a:gridCol w="1711756"/>
-                <a:gridCol w="5991148"/>
-                <a:gridCol w="2995574"/>
+                <a:gridCol w="1711756">
+                  <a:extLst>
+                    <a:ext uri="{9D8B030D-6E8A-4147-A177-3AD203B41FA5}">
+                      <a16:colId xmlns:a16="http://schemas.microsoft.com/office/drawing/2014/main" val="20000"/>
+                    </a:ext>
+                  </a:extLst>
+                </a:gridCol>
+                <a:gridCol w="5991148">
+                  <a:extLst>
+                    <a:ext uri="{9D8B030D-6E8A-4147-A177-3AD203B41FA5}">
+                      <a16:colId xmlns:a16="http://schemas.microsoft.com/office/drawing/2014/main" val="20001"/>
+                    </a:ext>
+                  </a:extLst>
+                </a:gridCol>
+                <a:gridCol w="2995574">
+                  <a:extLst>
+                    <a:ext uri="{9D8B030D-6E8A-4147-A177-3AD203B41FA5}">
+                      <a16:colId xmlns:a16="http://schemas.microsoft.com/office/drawing/2014/main" val="20002"/>
+                    </a:ext>
+                  </a:extLst>
+                </a:gridCol>
               </a:tblGrid>
               <a:tr h="475488">
                 <a:tc>
                   <a:txBody>
-                    <a:bodyPr wrap="square"/>
+                    <a:bodyPr/>
                     <a:lstStyle/>
                     <a:p>
                       <a:pPr algn="l"/>
@@ -10172,7 +10256,7 @@
                 </a:tc>
                 <a:tc>
                   <a:txBody>
-                    <a:bodyPr wrap="square"/>
+                    <a:bodyPr/>
                     <a:lstStyle/>
                     <a:p>
                       <a:pPr algn="l"/>
@@ -10197,7 +10281,7 @@
                 </a:tc>
                 <a:tc>
                   <a:txBody>
-                    <a:bodyPr wrap="square"/>
+                    <a:bodyPr/>
                     <a:lstStyle/>
                     <a:p>
                       <a:pPr algn="l"/>
@@ -10220,11 +10304,16 @@
                     </a:solidFill>
                   </a:tcPr>
                 </a:tc>
+                <a:extLst>
+                  <a:ext uri="{0D108BD9-81ED-4DB2-BD59-A6C34878D82A}">
+                    <a16:rowId xmlns:a16="http://schemas.microsoft.com/office/drawing/2014/main" val="10000"/>
+                  </a:ext>
+                </a:extLst>
               </a:tr>
               <a:tr h="475488">
                 <a:tc>
                   <a:txBody>
-                    <a:bodyPr wrap="square"/>
+                    <a:bodyPr/>
                     <a:lstStyle/>
                     <a:p>
                       <a:pPr algn="l"/>
@@ -10249,7 +10338,7 @@
                 </a:tc>
                 <a:tc>
                   <a:txBody>
-                    <a:bodyPr wrap="square"/>
+                    <a:bodyPr/>
                     <a:lstStyle/>
                     <a:p>
                       <a:pPr algn="l"/>
@@ -10274,7 +10363,7 @@
                 </a:tc>
                 <a:tc>
                   <a:txBody>
-                    <a:bodyPr wrap="square"/>
+                    <a:bodyPr/>
                     <a:lstStyle/>
                     <a:p>
                       <a:pPr algn="l"/>
@@ -10297,11 +10386,16 @@
                     </a:solidFill>
                   </a:tcPr>
                 </a:tc>
+                <a:extLst>
+                  <a:ext uri="{0D108BD9-81ED-4DB2-BD59-A6C34878D82A}">
+                    <a16:rowId xmlns:a16="http://schemas.microsoft.com/office/drawing/2014/main" val="10001"/>
+                  </a:ext>
+                </a:extLst>
               </a:tr>
               <a:tr h="475488">
                 <a:tc>
                   <a:txBody>
-                    <a:bodyPr wrap="square"/>
+                    <a:bodyPr/>
                     <a:lstStyle/>
                     <a:p>
                       <a:pPr algn="l"/>
@@ -10326,7 +10420,7 @@
                 </a:tc>
                 <a:tc>
                   <a:txBody>
-                    <a:bodyPr wrap="square"/>
+                    <a:bodyPr/>
                     <a:lstStyle/>
                     <a:p>
                       <a:pPr algn="l"/>
@@ -10351,7 +10445,7 @@
                 </a:tc>
                 <a:tc>
                   <a:txBody>
-                    <a:bodyPr wrap="square"/>
+                    <a:bodyPr/>
                     <a:lstStyle/>
                     <a:p>
                       <a:pPr algn="l"/>
@@ -10374,11 +10468,16 @@
                     </a:solidFill>
                   </a:tcPr>
                 </a:tc>
+                <a:extLst>
+                  <a:ext uri="{0D108BD9-81ED-4DB2-BD59-A6C34878D82A}">
+                    <a16:rowId xmlns:a16="http://schemas.microsoft.com/office/drawing/2014/main" val="10002"/>
+                  </a:ext>
+                </a:extLst>
               </a:tr>
               <a:tr h="475488">
                 <a:tc>
                   <a:txBody>
-                    <a:bodyPr wrap="square"/>
+                    <a:bodyPr/>
                     <a:lstStyle/>
                     <a:p>
                       <a:pPr algn="l"/>
@@ -10403,7 +10502,7 @@
                 </a:tc>
                 <a:tc>
                   <a:txBody>
-                    <a:bodyPr wrap="square"/>
+                    <a:bodyPr/>
                     <a:lstStyle/>
                     <a:p>
                       <a:pPr algn="l"/>
@@ -10428,7 +10527,7 @@
                 </a:tc>
                 <a:tc>
                   <a:txBody>
-                    <a:bodyPr wrap="square"/>
+                    <a:bodyPr/>
                     <a:lstStyle/>
                     <a:p>
                       <a:pPr algn="l"/>
@@ -10451,11 +10550,16 @@
                     </a:solidFill>
                   </a:tcPr>
                 </a:tc>
+                <a:extLst>
+                  <a:ext uri="{0D108BD9-81ED-4DB2-BD59-A6C34878D82A}">
+                    <a16:rowId xmlns:a16="http://schemas.microsoft.com/office/drawing/2014/main" val="10003"/>
+                  </a:ext>
+                </a:extLst>
               </a:tr>
               <a:tr h="475488">
                 <a:tc>
                   <a:txBody>
-                    <a:bodyPr wrap="square"/>
+                    <a:bodyPr/>
                     <a:lstStyle/>
                     <a:p>
                       <a:pPr algn="l"/>
@@ -10480,7 +10584,7 @@
                 </a:tc>
                 <a:tc>
                   <a:txBody>
-                    <a:bodyPr wrap="square"/>
+                    <a:bodyPr/>
                     <a:lstStyle/>
                     <a:p>
                       <a:pPr algn="l"/>
@@ -10505,7 +10609,7 @@
                 </a:tc>
                 <a:tc>
                   <a:txBody>
-                    <a:bodyPr wrap="square"/>
+                    <a:bodyPr/>
                     <a:lstStyle/>
                     <a:p>
                       <a:pPr algn="l"/>
@@ -10528,11 +10632,16 @@
                     </a:solidFill>
                   </a:tcPr>
                 </a:tc>
+                <a:extLst>
+                  <a:ext uri="{0D108BD9-81ED-4DB2-BD59-A6C34878D82A}">
+                    <a16:rowId xmlns:a16="http://schemas.microsoft.com/office/drawing/2014/main" val="10004"/>
+                  </a:ext>
+                </a:extLst>
               </a:tr>
               <a:tr h="475488">
                 <a:tc>
                   <a:txBody>
-                    <a:bodyPr wrap="square"/>
+                    <a:bodyPr/>
                     <a:lstStyle/>
                     <a:p>
                       <a:pPr algn="l"/>
@@ -10557,7 +10666,7 @@
                 </a:tc>
                 <a:tc>
                   <a:txBody>
-                    <a:bodyPr wrap="square"/>
+                    <a:bodyPr/>
                     <a:lstStyle/>
                     <a:p>
                       <a:pPr algn="l"/>
@@ -10582,7 +10691,7 @@
                 </a:tc>
                 <a:tc>
                   <a:txBody>
-                    <a:bodyPr wrap="square"/>
+                    <a:bodyPr/>
                     <a:lstStyle/>
                     <a:p>
                       <a:pPr algn="l"/>
@@ -10605,6 +10714,11 @@
                     </a:solidFill>
                   </a:tcPr>
                 </a:tc>
+                <a:extLst>
+                  <a:ext uri="{0D108BD9-81ED-4DB2-BD59-A6C34878D82A}">
+                    <a16:rowId xmlns:a16="http://schemas.microsoft.com/office/drawing/2014/main" val="10005"/>
+                  </a:ext>
+                </a:extLst>
               </a:tr>
             </a:tbl>
           </a:graphicData>
@@ -10650,6 +10764,7 @@
           <a:lstStyle/>
           <a:p>
             <a:pPr algn="ctr"/>
+            <a:endParaRPr/>
           </a:p>
         </p:txBody>
       </p:sp>
@@ -10670,7 +10785,7 @@
           <a:noFill/>
         </p:spPr>
         <p:txBody>
-          <a:bodyPr wrap="square" anchor="t" lIns="50800" rIns="50800" tIns="25400" bIns="25400">
+          <a:bodyPr wrap="square" lIns="50800" tIns="25400" rIns="50800" bIns="25400" anchor="t">
             <a:spAutoFit/>
           </a:bodyPr>
           <a:lstStyle/>
@@ -10721,7 +10836,7 @@
 </file>
 
 <file path=ppt/slides/slide17.xml><?xml version="1.0" encoding="utf-8"?>
-<p:sld xmlns:a="http://schemas.openxmlformats.org/drawingml/2006/main" xmlns:p="http://schemas.openxmlformats.org/presentationml/2006/main" xmlns:r="http://schemas.openxmlformats.org/officeDocument/2006/relationships">
+<p:sld xmlns:a="http://schemas.openxmlformats.org/drawingml/2006/main" xmlns:r="http://schemas.openxmlformats.org/officeDocument/2006/relationships" xmlns:p="http://schemas.openxmlformats.org/presentationml/2006/main">
   <p:cSld>
     <p:spTree>
       <p:nvGrpSpPr>
@@ -10729,7 +10844,14 @@
         <p:cNvGrpSpPr/>
         <p:nvPr/>
       </p:nvGrpSpPr>
-      <p:grpSpPr/>
+      <p:grpSpPr>
+        <a:xfrm>
+          <a:off x="0" y="0"/>
+          <a:ext cx="0" cy="0"/>
+          <a:chOff x="0" y="0"/>
+          <a:chExt cx="0" cy="0"/>
+        </a:xfrm>
+      </p:grpSpPr>
       <p:sp>
         <p:nvSpPr>
           <p:cNvPr id="2" name="Rectangle 1"/>
@@ -10770,6 +10892,7 @@
           <a:lstStyle/>
           <a:p>
             <a:pPr algn="ctr"/>
+            <a:endParaRPr/>
           </a:p>
         </p:txBody>
       </p:sp>
@@ -10813,6 +10936,7 @@
           <a:lstStyle/>
           <a:p>
             <a:pPr algn="ctr"/>
+            <a:endParaRPr/>
           </a:p>
         </p:txBody>
       </p:sp>
@@ -10833,7 +10957,7 @@
           <a:noFill/>
         </p:spPr>
         <p:txBody>
-          <a:bodyPr wrap="square" anchor="t" lIns="50800" rIns="50800" tIns="25400" bIns="25400">
+          <a:bodyPr wrap="square" lIns="50800" tIns="25400" rIns="50800" bIns="25400" anchor="t">
             <a:spAutoFit/>
           </a:bodyPr>
           <a:lstStyle/>
@@ -10874,7 +10998,7 @@
           <a:noFill/>
         </p:spPr>
         <p:txBody>
-          <a:bodyPr wrap="square" anchor="t" lIns="50800" rIns="50800" tIns="25400" bIns="25400">
+          <a:bodyPr wrap="square" lIns="50800" tIns="25400" rIns="50800" bIns="25400" anchor="t">
             <a:spAutoFit/>
           </a:bodyPr>
           <a:lstStyle/>
@@ -10915,7 +11039,7 @@
           <a:noFill/>
         </p:spPr>
         <p:txBody>
-          <a:bodyPr wrap="square" anchor="t" lIns="50800" rIns="50800" tIns="25400" bIns="25400">
+          <a:bodyPr wrap="square" lIns="50800" tIns="25400" rIns="50800" bIns="25400" anchor="t">
             <a:spAutoFit/>
           </a:bodyPr>
           <a:lstStyle/>
@@ -10966,7 +11090,7 @@
 </file>
 
 <file path=ppt/slides/slide2.xml><?xml version="1.0" encoding="utf-8"?>
-<p:sld xmlns:a="http://schemas.openxmlformats.org/drawingml/2006/main" xmlns:p="http://schemas.openxmlformats.org/presentationml/2006/main" xmlns:r="http://schemas.openxmlformats.org/officeDocument/2006/relationships">
+<p:sld xmlns:a="http://schemas.openxmlformats.org/drawingml/2006/main" xmlns:r="http://schemas.openxmlformats.org/officeDocument/2006/relationships" xmlns:p="http://schemas.openxmlformats.org/presentationml/2006/main">
   <p:cSld>
     <p:spTree>
       <p:nvGrpSpPr>
@@ -10974,7 +11098,14 @@
         <p:cNvGrpSpPr/>
         <p:nvPr/>
       </p:nvGrpSpPr>
-      <p:grpSpPr/>
+      <p:grpSpPr>
+        <a:xfrm>
+          <a:off x="0" y="0"/>
+          <a:ext cx="0" cy="0"/>
+          <a:chOff x="0" y="0"/>
+          <a:chExt cx="0" cy="0"/>
+        </a:xfrm>
+      </p:grpSpPr>
       <p:sp>
         <p:nvSpPr>
           <p:cNvPr id="2" name="Rectangle 1"/>
@@ -11015,6 +11146,7 @@
           <a:lstStyle/>
           <a:p>
             <a:pPr algn="ctr"/>
+            <a:endParaRPr/>
           </a:p>
         </p:txBody>
       </p:sp>
@@ -11054,7 +11186,7 @@
           </a:fontRef>
         </p:style>
         <p:txBody>
-          <a:bodyPr rtlCol="0" anchor="ctr" wrap="none" lIns="25400" rIns="25400"/>
+          <a:bodyPr wrap="none" lIns="25400" rIns="25400" rtlCol="0" anchor="ctr"/>
           <a:lstStyle/>
           <a:p>
             <a:pPr algn="ctr"/>
@@ -11089,7 +11221,7 @@
           <a:noFill/>
         </p:spPr>
         <p:txBody>
-          <a:bodyPr wrap="square" anchor="ctr" lIns="50800" rIns="50800" tIns="25400" bIns="25400">
+          <a:bodyPr wrap="square" lIns="50800" tIns="25400" rIns="50800" bIns="25400" anchor="ctr">
             <a:spAutoFit/>
           </a:bodyPr>
           <a:lstStyle/>
@@ -11153,6 +11285,7 @@
           <a:lstStyle/>
           <a:p>
             <a:pPr algn="ctr"/>
+            <a:endParaRPr/>
           </a:p>
         </p:txBody>
       </p:sp>
@@ -11175,14 +11308,32 @@
                 <a:tableStyleId>{5C22544A-7EE6-4342-B048-85BDC9FD1C3A}</a:tableStyleId>
               </a:tblPr>
               <a:tblGrid>
-                <a:gridCol w="1925726"/>
-                <a:gridCol w="6633057"/>
-                <a:gridCol w="2139696"/>
+                <a:gridCol w="1925726">
+                  <a:extLst>
+                    <a:ext uri="{9D8B030D-6E8A-4147-A177-3AD203B41FA5}">
+                      <a16:colId xmlns:a16="http://schemas.microsoft.com/office/drawing/2014/main" val="20000"/>
+                    </a:ext>
+                  </a:extLst>
+                </a:gridCol>
+                <a:gridCol w="6633057">
+                  <a:extLst>
+                    <a:ext uri="{9D8B030D-6E8A-4147-A177-3AD203B41FA5}">
+                      <a16:colId xmlns:a16="http://schemas.microsoft.com/office/drawing/2014/main" val="20001"/>
+                    </a:ext>
+                  </a:extLst>
+                </a:gridCol>
+                <a:gridCol w="2139696">
+                  <a:extLst>
+                    <a:ext uri="{9D8B030D-6E8A-4147-A177-3AD203B41FA5}">
+                      <a16:colId xmlns:a16="http://schemas.microsoft.com/office/drawing/2014/main" val="20002"/>
+                    </a:ext>
+                  </a:extLst>
+                </a:gridCol>
               </a:tblGrid>
               <a:tr h="475488">
                 <a:tc>
                   <a:txBody>
-                    <a:bodyPr wrap="square"/>
+                    <a:bodyPr/>
                     <a:lstStyle/>
                     <a:p>
                       <a:pPr algn="l"/>
@@ -11207,7 +11358,7 @@
                 </a:tc>
                 <a:tc>
                   <a:txBody>
-                    <a:bodyPr wrap="square"/>
+                    <a:bodyPr/>
                     <a:lstStyle/>
                     <a:p>
                       <a:pPr algn="l"/>
@@ -11232,7 +11383,7 @@
                 </a:tc>
                 <a:tc>
                   <a:txBody>
-                    <a:bodyPr wrap="square"/>
+                    <a:bodyPr/>
                     <a:lstStyle/>
                     <a:p>
                       <a:pPr algn="l"/>
@@ -11255,11 +11406,16 @@
                     </a:solidFill>
                   </a:tcPr>
                 </a:tc>
+                <a:extLst>
+                  <a:ext uri="{0D108BD9-81ED-4DB2-BD59-A6C34878D82A}">
+                    <a16:rowId xmlns:a16="http://schemas.microsoft.com/office/drawing/2014/main" val="10000"/>
+                  </a:ext>
+                </a:extLst>
               </a:tr>
               <a:tr h="475488">
                 <a:tc>
                   <a:txBody>
-                    <a:bodyPr wrap="square"/>
+                    <a:bodyPr/>
                     <a:lstStyle/>
                     <a:p>
                       <a:pPr algn="l"/>
@@ -11284,7 +11440,7 @@
                 </a:tc>
                 <a:tc>
                   <a:txBody>
-                    <a:bodyPr wrap="square"/>
+                    <a:bodyPr/>
                     <a:lstStyle/>
                     <a:p>
                       <a:pPr algn="l"/>
@@ -11309,7 +11465,7 @@
                 </a:tc>
                 <a:tc>
                   <a:txBody>
-                    <a:bodyPr wrap="square"/>
+                    <a:bodyPr/>
                     <a:lstStyle/>
                     <a:p>
                       <a:pPr algn="l"/>
@@ -11332,11 +11488,16 @@
                     </a:solidFill>
                   </a:tcPr>
                 </a:tc>
+                <a:extLst>
+                  <a:ext uri="{0D108BD9-81ED-4DB2-BD59-A6C34878D82A}">
+                    <a16:rowId xmlns:a16="http://schemas.microsoft.com/office/drawing/2014/main" val="10001"/>
+                  </a:ext>
+                </a:extLst>
               </a:tr>
               <a:tr h="475488">
                 <a:tc>
                   <a:txBody>
-                    <a:bodyPr wrap="square"/>
+                    <a:bodyPr/>
                     <a:lstStyle/>
                     <a:p>
                       <a:pPr algn="l"/>
@@ -11361,7 +11522,7 @@
                 </a:tc>
                 <a:tc>
                   <a:txBody>
-                    <a:bodyPr wrap="square"/>
+                    <a:bodyPr/>
                     <a:lstStyle/>
                     <a:p>
                       <a:pPr algn="l"/>
@@ -11386,7 +11547,7 @@
                 </a:tc>
                 <a:tc>
                   <a:txBody>
-                    <a:bodyPr wrap="square"/>
+                    <a:bodyPr/>
                     <a:lstStyle/>
                     <a:p>
                       <a:pPr algn="l"/>
@@ -11409,11 +11570,16 @@
                     </a:solidFill>
                   </a:tcPr>
                 </a:tc>
+                <a:extLst>
+                  <a:ext uri="{0D108BD9-81ED-4DB2-BD59-A6C34878D82A}">
+                    <a16:rowId xmlns:a16="http://schemas.microsoft.com/office/drawing/2014/main" val="10002"/>
+                  </a:ext>
+                </a:extLst>
               </a:tr>
               <a:tr h="475488">
                 <a:tc>
                   <a:txBody>
-                    <a:bodyPr wrap="square"/>
+                    <a:bodyPr/>
                     <a:lstStyle/>
                     <a:p>
                       <a:pPr algn="l"/>
@@ -11438,7 +11604,7 @@
                 </a:tc>
                 <a:tc>
                   <a:txBody>
-                    <a:bodyPr wrap="square"/>
+                    <a:bodyPr/>
                     <a:lstStyle/>
                     <a:p>
                       <a:pPr algn="l"/>
@@ -11463,7 +11629,7 @@
                 </a:tc>
                 <a:tc>
                   <a:txBody>
-                    <a:bodyPr wrap="square"/>
+                    <a:bodyPr/>
                     <a:lstStyle/>
                     <a:p>
                       <a:pPr algn="l"/>
@@ -11486,11 +11652,16 @@
                     </a:solidFill>
                   </a:tcPr>
                 </a:tc>
+                <a:extLst>
+                  <a:ext uri="{0D108BD9-81ED-4DB2-BD59-A6C34878D82A}">
+                    <a16:rowId xmlns:a16="http://schemas.microsoft.com/office/drawing/2014/main" val="10003"/>
+                  </a:ext>
+                </a:extLst>
               </a:tr>
               <a:tr h="475488">
                 <a:tc>
                   <a:txBody>
-                    <a:bodyPr wrap="square"/>
+                    <a:bodyPr/>
                     <a:lstStyle/>
                     <a:p>
                       <a:pPr algn="l"/>
@@ -11515,7 +11686,7 @@
                 </a:tc>
                 <a:tc>
                   <a:txBody>
-                    <a:bodyPr wrap="square"/>
+                    <a:bodyPr/>
                     <a:lstStyle/>
                     <a:p>
                       <a:pPr algn="l"/>
@@ -11540,7 +11711,7 @@
                 </a:tc>
                 <a:tc>
                   <a:txBody>
-                    <a:bodyPr wrap="square"/>
+                    <a:bodyPr/>
                     <a:lstStyle/>
                     <a:p>
                       <a:pPr algn="l"/>
@@ -11563,6 +11734,11 @@
                     </a:solidFill>
                   </a:tcPr>
                 </a:tc>
+                <a:extLst>
+                  <a:ext uri="{0D108BD9-81ED-4DB2-BD59-A6C34878D82A}">
+                    <a16:rowId xmlns:a16="http://schemas.microsoft.com/office/drawing/2014/main" val="10004"/>
+                  </a:ext>
+                </a:extLst>
               </a:tr>
             </a:tbl>
           </a:graphicData>
@@ -11585,7 +11761,7 @@
           <a:noFill/>
         </p:spPr>
         <p:txBody>
-          <a:bodyPr wrap="square" anchor="t" lIns="50800" rIns="50800" tIns="25400" bIns="25400">
+          <a:bodyPr wrap="square" lIns="50800" tIns="25400" rIns="50800" bIns="25400" anchor="t">
             <a:spAutoFit/>
           </a:bodyPr>
           <a:lstStyle/>
@@ -11672,7 +11848,7 @@
 </file>
 
 <file path=ppt/slides/slide3.xml><?xml version="1.0" encoding="utf-8"?>
-<p:sld xmlns:a="http://schemas.openxmlformats.org/drawingml/2006/main" xmlns:p="http://schemas.openxmlformats.org/presentationml/2006/main" xmlns:r="http://schemas.openxmlformats.org/officeDocument/2006/relationships">
+<p:sld xmlns:a="http://schemas.openxmlformats.org/drawingml/2006/main" xmlns:r="http://schemas.openxmlformats.org/officeDocument/2006/relationships" xmlns:p="http://schemas.openxmlformats.org/presentationml/2006/main">
   <p:cSld>
     <p:spTree>
       <p:nvGrpSpPr>
@@ -11680,7 +11856,14 @@
         <p:cNvGrpSpPr/>
         <p:nvPr/>
       </p:nvGrpSpPr>
-      <p:grpSpPr/>
+      <p:grpSpPr>
+        <a:xfrm>
+          <a:off x="0" y="0"/>
+          <a:ext cx="0" cy="0"/>
+          <a:chOff x="0" y="0"/>
+          <a:chExt cx="0" cy="0"/>
+        </a:xfrm>
+      </p:grpSpPr>
       <p:sp>
         <p:nvSpPr>
           <p:cNvPr id="2" name="Rectangle 1"/>
@@ -11721,6 +11904,7 @@
           <a:lstStyle/>
           <a:p>
             <a:pPr algn="ctr"/>
+            <a:endParaRPr/>
           </a:p>
         </p:txBody>
       </p:sp>
@@ -11760,7 +11944,7 @@
           </a:fontRef>
         </p:style>
         <p:txBody>
-          <a:bodyPr rtlCol="0" anchor="ctr" wrap="none" lIns="25400" rIns="25400"/>
+          <a:bodyPr wrap="none" lIns="25400" rIns="25400" rtlCol="0" anchor="ctr"/>
           <a:lstStyle/>
           <a:p>
             <a:pPr algn="ctr"/>
@@ -11795,7 +11979,7 @@
           <a:noFill/>
         </p:spPr>
         <p:txBody>
-          <a:bodyPr wrap="square" anchor="ctr" lIns="50800" rIns="50800" tIns="25400" bIns="25400">
+          <a:bodyPr wrap="square" lIns="50800" tIns="25400" rIns="50800" bIns="25400" anchor="ctr">
             <a:spAutoFit/>
           </a:bodyPr>
           <a:lstStyle/>
@@ -11859,6 +12043,7 @@
           <a:lstStyle/>
           <a:p>
             <a:pPr algn="ctr"/>
+            <a:endParaRPr/>
           </a:p>
         </p:txBody>
       </p:sp>
@@ -11870,8 +12055,8 @@
         </p:nvSpPr>
         <p:spPr>
           <a:xfrm>
-            <a:off x="731520" y="1133856"/>
-            <a:ext cx="5760720" cy="3840480"/>
+            <a:off x="457199" y="1033272"/>
+            <a:ext cx="7054381" cy="3170099"/>
           </a:xfrm>
           <a:prstGeom prst="rect">
             <a:avLst/>
@@ -11879,7 +12064,7 @@
           <a:noFill/>
         </p:spPr>
         <p:txBody>
-          <a:bodyPr wrap="square" anchor="t" lIns="50800" rIns="50800" tIns="25400" bIns="25400">
+          <a:bodyPr wrap="square" lIns="50800" tIns="25400" rIns="50800" bIns="25400" anchor="t">
             <a:spAutoFit/>
           </a:bodyPr>
           <a:lstStyle/>
@@ -11890,7 +12075,7 @@
               </a:spcAft>
             </a:pPr>
             <a:r>
-              <a:rPr sz="1500" b="1">
+              <a:rPr sz="2000" b="1" dirty="0" err="1">
                 <a:solidFill>
                   <a:srgbClr val="1F3864"/>
                 </a:solidFill>
@@ -11900,15 +12085,23 @@
               </a:rPr>
               <a:t>旋转机械的常见故障</a:t>
             </a:r>
-          </a:p>
-          <a:p>
-            <a:pPr algn="l" lvl="1">
+            <a:endParaRPr sz="2000" b="1" dirty="0">
+              <a:solidFill>
+                <a:srgbClr val="1F3864"/>
+              </a:solidFill>
+              <a:latin typeface="Microsoft YaHei"/>
+              <a:ea typeface="Microsoft YaHei"/>
+              <a:cs typeface="Microsoft YaHei"/>
+            </a:endParaRPr>
+          </a:p>
+          <a:p>
+            <a:pPr lvl="1" algn="l">
               <a:spcAft>
                 <a:spcPts val="800"/>
               </a:spcAft>
             </a:pPr>
             <a:r>
-              <a:rPr sz="1300" b="0">
+              <a:rPr sz="1300" b="0" dirty="0">
                 <a:solidFill>
                   <a:srgbClr val="595959"/>
                 </a:solidFill>
@@ -11916,17 +12109,10 @@
                 <a:ea typeface="Microsoft YaHei"/>
                 <a:cs typeface="Microsoft YaHei"/>
               </a:rPr>
-              <a:t>· 风机、水泵、电机等设备，故障多由转子不平衡、轴承磨损、地脚松动引起</a:t>
-            </a:r>
-          </a:p>
-          <a:p>
-            <a:pPr algn="l" lvl="1">
-              <a:spcAft>
-                <a:spcPts val="800"/>
-              </a:spcAft>
-            </a:pPr>
-            <a:r>
-              <a:rPr sz="1300" b="0">
+              <a:t>· </a:t>
+            </a:r>
+            <a:r>
+              <a:rPr sz="1600" b="0" dirty="0" err="1">
                 <a:solidFill>
                   <a:srgbClr val="595959"/>
                 </a:solidFill>
@@ -11934,8 +12120,53 @@
                 <a:ea typeface="Microsoft YaHei"/>
                 <a:cs typeface="Microsoft YaHei"/>
               </a:rPr>
-              <a:t>· 这些故障在早期都会表现为振动特征的变化</a:t>
-            </a:r>
+              <a:t>风机、水泵、电机等设备，故障多由转子不平衡、轴承磨损、地脚松动引起</a:t>
+            </a:r>
+            <a:endParaRPr sz="1600" b="0" dirty="0">
+              <a:solidFill>
+                <a:srgbClr val="595959"/>
+              </a:solidFill>
+              <a:latin typeface="Microsoft YaHei"/>
+              <a:ea typeface="Microsoft YaHei"/>
+              <a:cs typeface="Microsoft YaHei"/>
+            </a:endParaRPr>
+          </a:p>
+          <a:p>
+            <a:pPr lvl="1" algn="l">
+              <a:spcAft>
+                <a:spcPts val="800"/>
+              </a:spcAft>
+            </a:pPr>
+            <a:r>
+              <a:rPr sz="1600" b="0" dirty="0">
+                <a:solidFill>
+                  <a:srgbClr val="595959"/>
+                </a:solidFill>
+                <a:latin typeface="Microsoft YaHei"/>
+                <a:ea typeface="Microsoft YaHei"/>
+                <a:cs typeface="Microsoft YaHei"/>
+              </a:rPr>
+              <a:t>· </a:t>
+            </a:r>
+            <a:r>
+              <a:rPr sz="1600" b="0" dirty="0" err="1">
+                <a:solidFill>
+                  <a:srgbClr val="595959"/>
+                </a:solidFill>
+                <a:latin typeface="Microsoft YaHei"/>
+                <a:ea typeface="Microsoft YaHei"/>
+                <a:cs typeface="Microsoft YaHei"/>
+              </a:rPr>
+              <a:t>这些故障在早期都会表现为振动特征的变化</a:t>
+            </a:r>
+            <a:endParaRPr sz="1600" b="0" dirty="0">
+              <a:solidFill>
+                <a:srgbClr val="595959"/>
+              </a:solidFill>
+              <a:latin typeface="Microsoft YaHei"/>
+              <a:ea typeface="Microsoft YaHei"/>
+              <a:cs typeface="Microsoft YaHei"/>
+            </a:endParaRPr>
           </a:p>
           <a:p>
             <a:pPr algn="l">
@@ -11944,7 +12175,7 @@
               </a:spcAft>
             </a:pPr>
             <a:r>
-              <a:rPr sz="1500" b="1">
+              <a:rPr sz="2000" b="1" dirty="0" err="1">
                 <a:solidFill>
                   <a:srgbClr val="1F3864"/>
                 </a:solidFill>
@@ -11954,15 +12185,23 @@
               </a:rPr>
               <a:t>传统做法的问题</a:t>
             </a:r>
-          </a:p>
-          <a:p>
-            <a:pPr algn="l" lvl="1">
+            <a:endParaRPr sz="2000" b="1" dirty="0">
+              <a:solidFill>
+                <a:srgbClr val="1F3864"/>
+              </a:solidFill>
+              <a:latin typeface="Microsoft YaHei"/>
+              <a:ea typeface="Microsoft YaHei"/>
+              <a:cs typeface="Microsoft YaHei"/>
+            </a:endParaRPr>
+          </a:p>
+          <a:p>
+            <a:pPr lvl="1" algn="l">
               <a:spcAft>
                 <a:spcPts val="800"/>
               </a:spcAft>
             </a:pPr>
             <a:r>
-              <a:rPr sz="1300" b="0">
+              <a:rPr sz="1600" b="0" dirty="0">
                 <a:solidFill>
                   <a:srgbClr val="595959"/>
                 </a:solidFill>
@@ -11970,17 +12209,10 @@
                 <a:ea typeface="Microsoft YaHei"/>
                 <a:cs typeface="Microsoft YaHei"/>
               </a:rPr>
-              <a:t>· 定期人工巡检：依赖经验，间隔期内故障可能突发</a:t>
-            </a:r>
-          </a:p>
-          <a:p>
-            <a:pPr algn="l" lvl="1">
-              <a:spcAft>
-                <a:spcPts val="800"/>
-              </a:spcAft>
-            </a:pPr>
-            <a:r>
-              <a:rPr sz="1300" b="0">
+              <a:t>· </a:t>
+            </a:r>
+            <a:r>
+              <a:rPr sz="1600" b="0" dirty="0" err="1">
                 <a:solidFill>
                   <a:srgbClr val="595959"/>
                 </a:solidFill>
@@ -11988,8 +12220,53 @@
                 <a:ea typeface="Microsoft YaHei"/>
                 <a:cs typeface="Microsoft YaHei"/>
               </a:rPr>
-              <a:t>· 事后维修：故障发生后才处理，停机损失大</a:t>
-            </a:r>
+              <a:t>定期人工巡检：依赖经验，间隔期内故障可能突发</a:t>
+            </a:r>
+            <a:endParaRPr sz="1600" b="0" dirty="0">
+              <a:solidFill>
+                <a:srgbClr val="595959"/>
+              </a:solidFill>
+              <a:latin typeface="Microsoft YaHei"/>
+              <a:ea typeface="Microsoft YaHei"/>
+              <a:cs typeface="Microsoft YaHei"/>
+            </a:endParaRPr>
+          </a:p>
+          <a:p>
+            <a:pPr lvl="1" algn="l">
+              <a:spcAft>
+                <a:spcPts val="800"/>
+              </a:spcAft>
+            </a:pPr>
+            <a:r>
+              <a:rPr sz="1600" b="0" dirty="0">
+                <a:solidFill>
+                  <a:srgbClr val="595959"/>
+                </a:solidFill>
+                <a:latin typeface="Microsoft YaHei"/>
+                <a:ea typeface="Microsoft YaHei"/>
+                <a:cs typeface="Microsoft YaHei"/>
+              </a:rPr>
+              <a:t>· </a:t>
+            </a:r>
+            <a:r>
+              <a:rPr sz="1600" b="0" dirty="0" err="1">
+                <a:solidFill>
+                  <a:srgbClr val="595959"/>
+                </a:solidFill>
+                <a:latin typeface="Microsoft YaHei"/>
+                <a:ea typeface="Microsoft YaHei"/>
+                <a:cs typeface="Microsoft YaHei"/>
+              </a:rPr>
+              <a:t>事后维修：故障发生后才处理，停机损失大</a:t>
+            </a:r>
+            <a:endParaRPr sz="1600" b="0" dirty="0">
+              <a:solidFill>
+                <a:srgbClr val="595959"/>
+              </a:solidFill>
+              <a:latin typeface="Microsoft YaHei"/>
+              <a:ea typeface="Microsoft YaHei"/>
+              <a:cs typeface="Microsoft YaHei"/>
+            </a:endParaRPr>
           </a:p>
           <a:p>
             <a:pPr algn="l">
@@ -11998,7 +12275,7 @@
               </a:spcAft>
             </a:pPr>
             <a:r>
-              <a:rPr sz="1500" b="1">
+              <a:rPr sz="2000" b="1" dirty="0" err="1">
                 <a:solidFill>
                   <a:srgbClr val="1F3864"/>
                 </a:solidFill>
@@ -12008,15 +12285,23 @@
               </a:rPr>
               <a:t>状态监测的价值</a:t>
             </a:r>
-          </a:p>
-          <a:p>
-            <a:pPr algn="l" lvl="1">
+            <a:endParaRPr sz="2000" b="1" dirty="0">
+              <a:solidFill>
+                <a:srgbClr val="1F3864"/>
+              </a:solidFill>
+              <a:latin typeface="Microsoft YaHei"/>
+              <a:ea typeface="Microsoft YaHei"/>
+              <a:cs typeface="Microsoft YaHei"/>
+            </a:endParaRPr>
+          </a:p>
+          <a:p>
+            <a:pPr lvl="1" algn="l">
               <a:spcAft>
                 <a:spcPts val="800"/>
               </a:spcAft>
             </a:pPr>
             <a:r>
-              <a:rPr sz="1300" b="0">
+              <a:rPr sz="1600" b="0" dirty="0">
                 <a:solidFill>
                   <a:srgbClr val="595959"/>
                 </a:solidFill>
@@ -12024,101 +12309,10 @@
                 <a:ea typeface="Microsoft YaHei"/>
                 <a:cs typeface="Microsoft YaHei"/>
               </a:rPr>
-              <a:t>· 在故障早期发现征兆，把「事后维修」变为「预测性维护」</a:t>
-            </a:r>
-          </a:p>
-        </p:txBody>
-      </p:sp>
-      <p:sp>
-        <p:nvSpPr>
-          <p:cNvPr id="7" name="Rectangle 6"/>
-          <p:cNvSpPr/>
-          <p:nvPr/>
-        </p:nvSpPr>
-        <p:spPr>
-          <a:xfrm>
-            <a:off x="6812280" y="1179575"/>
-            <a:ext cx="4663440" cy="3566160"/>
-          </a:xfrm>
-          <a:prstGeom prst="rect">
-            <a:avLst/>
-          </a:prstGeom>
-          <a:solidFill>
-            <a:srgbClr val="F2F2F2"/>
-          </a:solidFill>
-          <a:ln>
-            <a:noFill/>
-          </a:ln>
-        </p:spPr>
-        <p:style>
-          <a:lnRef idx="1">
-            <a:schemeClr val="accent1"/>
-          </a:lnRef>
-          <a:fillRef idx="3">
-            <a:schemeClr val="accent1"/>
-          </a:fillRef>
-          <a:effectRef idx="2">
-            <a:schemeClr val="accent1"/>
-          </a:effectRef>
-          <a:fontRef idx="minor">
-            <a:schemeClr val="lt1"/>
-          </a:fontRef>
-        </p:style>
-        <p:txBody>
-          <a:bodyPr rtlCol="0" anchor="ctr"/>
-          <a:lstStyle/>
-          <a:p>
-            <a:pPr algn="ctr"/>
-          </a:p>
-        </p:txBody>
-      </p:sp>
-      <p:sp>
-        <p:nvSpPr>
-          <p:cNvPr id="8" name="TextBox 7"/>
-          <p:cNvSpPr txBox="1"/>
-          <p:nvPr/>
-        </p:nvSpPr>
-        <p:spPr>
-          <a:xfrm>
-            <a:off x="7040880" y="1362455"/>
-            <a:ext cx="4206240" cy="3200400"/>
-          </a:xfrm>
-          <a:prstGeom prst="rect">
-            <a:avLst/>
-          </a:prstGeom>
-          <a:noFill/>
-        </p:spPr>
-        <p:txBody>
-          <a:bodyPr wrap="square" anchor="t" lIns="50800" rIns="50800" tIns="25400" bIns="25400">
-            <a:spAutoFit/>
-          </a:bodyPr>
-          <a:lstStyle/>
-          <a:p>
-            <a:pPr algn="l">
-              <a:spcAft>
-                <a:spcPts val="1000"/>
-              </a:spcAft>
-            </a:pPr>
-            <a:r>
-              <a:rPr sz="1600" b="1">
-                <a:solidFill>
-                  <a:srgbClr val="1F3864"/>
-                </a:solidFill>
-                <a:latin typeface="Microsoft YaHei"/>
-                <a:ea typeface="Microsoft YaHei"/>
-                <a:cs typeface="Microsoft YaHei"/>
-              </a:rPr>
-              <a:t>本课题的约束条件</a:t>
-            </a:r>
-          </a:p>
-          <a:p>
-            <a:pPr algn="l">
-              <a:spcAft>
-                <a:spcPts val="600"/>
-              </a:spcAft>
-            </a:pPr>
-            <a:r>
-              <a:rPr sz="1500" b="0">
+              <a:t>· </a:t>
+            </a:r>
+            <a:r>
+              <a:rPr sz="1600" b="0" dirty="0" err="1">
                 <a:solidFill>
                   <a:srgbClr val="595959"/>
                 </a:solidFill>
@@ -12126,17 +12320,10 @@
                 <a:ea typeface="Microsoft YaHei"/>
                 <a:cs typeface="Microsoft YaHei"/>
               </a:rPr>
-              <a:t>预算 ≤ ¥150</a:t>
-            </a:r>
-          </a:p>
-          <a:p>
-            <a:pPr algn="l">
-              <a:spcAft>
-                <a:spcPts val="600"/>
-              </a:spcAft>
-            </a:pPr>
-            <a:r>
-              <a:rPr sz="1500" b="0">
+              <a:t>在故障早期发现征兆，把「事后维修」变为「预测性维护</a:t>
+            </a:r>
+            <a:r>
+              <a:rPr sz="1300" b="0" dirty="0">
                 <a:solidFill>
                   <a:srgbClr val="595959"/>
                 </a:solidFill>
@@ -12144,61 +12331,7 @@
                 <a:ea typeface="Microsoft YaHei"/>
                 <a:cs typeface="Microsoft YaHei"/>
               </a:rPr>
-              <a:t>零焊接（无焊接条件，全部选用已焊针模块）</a:t>
-            </a:r>
-          </a:p>
-          <a:p>
-            <a:pPr algn="l">
-              <a:spcAft>
-                <a:spcPts val="600"/>
-              </a:spcAft>
-            </a:pPr>
-            <a:r>
-              <a:rPr sz="1500" b="0">
-                <a:solidFill>
-                  <a:srgbClr val="595959"/>
-                </a:solidFill>
-                <a:latin typeface="Microsoft YaHei"/>
-                <a:ea typeface="Microsoft YaHei"/>
-                <a:cs typeface="Microsoft YaHei"/>
-              </a:rPr>
-              <a:t>只用公开可得的器件与免费软件</a:t>
-            </a:r>
-          </a:p>
-          <a:p>
-            <a:pPr algn="l">
-              <a:spcAft>
-                <a:spcPts val="600"/>
-              </a:spcAft>
-            </a:pPr>
-            <a:r>
-              <a:rPr sz="1500" b="0">
-                <a:solidFill>
-                  <a:srgbClr val="595959"/>
-                </a:solidFill>
-                <a:latin typeface="Microsoft YaHei"/>
-                <a:ea typeface="Microsoft YaHei"/>
-                <a:cs typeface="Microsoft YaHei"/>
-              </a:rPr>
-              <a:t>结果需可复现、可被 LICHPU 复制</a:t>
-            </a:r>
-          </a:p>
-          <a:p>
-            <a:pPr algn="l">
-              <a:spcAft>
-                <a:spcPts val="0"/>
-              </a:spcAft>
-            </a:pPr>
-            <a:r>
-              <a:rPr sz="1400" b="1">
-                <a:solidFill>
-                  <a:srgbClr val="378A3E"/>
-                </a:solidFill>
-                <a:latin typeface="Microsoft YaHei"/>
-                <a:ea typeface="Microsoft YaHei"/>
-                <a:cs typeface="Microsoft YaHei"/>
-              </a:rPr>
-              <a:t>实测结果：总支出 ¥119.50，结余 ¥30.50（19.7%）</a:t>
+              <a:t>」</a:t>
             </a:r>
           </a:p>
         </p:txBody>
@@ -12212,7 +12345,7 @@
 </file>
 
 <file path=ppt/slides/slide4.xml><?xml version="1.0" encoding="utf-8"?>
-<p:sld xmlns:a="http://schemas.openxmlformats.org/drawingml/2006/main" xmlns:p="http://schemas.openxmlformats.org/presentationml/2006/main" xmlns:r="http://schemas.openxmlformats.org/officeDocument/2006/relationships">
+<p:sld xmlns:a="http://schemas.openxmlformats.org/drawingml/2006/main" xmlns:r="http://schemas.openxmlformats.org/officeDocument/2006/relationships" xmlns:p="http://schemas.openxmlformats.org/presentationml/2006/main">
   <p:cSld>
     <p:spTree>
       <p:nvGrpSpPr>
@@ -12220,7 +12353,14 @@
         <p:cNvGrpSpPr/>
         <p:nvPr/>
       </p:nvGrpSpPr>
-      <p:grpSpPr/>
+      <p:grpSpPr>
+        <a:xfrm>
+          <a:off x="0" y="0"/>
+          <a:ext cx="0" cy="0"/>
+          <a:chOff x="0" y="0"/>
+          <a:chExt cx="0" cy="0"/>
+        </a:xfrm>
+      </p:grpSpPr>
       <p:sp>
         <p:nvSpPr>
           <p:cNvPr id="2" name="Rectangle 1"/>
@@ -12261,6 +12401,7 @@
           <a:lstStyle/>
           <a:p>
             <a:pPr algn="ctr"/>
+            <a:endParaRPr/>
           </a:p>
         </p:txBody>
       </p:sp>
@@ -12300,7 +12441,7 @@
           </a:fontRef>
         </p:style>
         <p:txBody>
-          <a:bodyPr rtlCol="0" anchor="ctr" wrap="none" lIns="25400" rIns="25400"/>
+          <a:bodyPr wrap="none" lIns="25400" rIns="25400" rtlCol="0" anchor="ctr"/>
           <a:lstStyle/>
           <a:p>
             <a:pPr algn="ctr"/>
@@ -12335,7 +12476,7 @@
           <a:noFill/>
         </p:spPr>
         <p:txBody>
-          <a:bodyPr wrap="square" anchor="ctr" lIns="50800" rIns="50800" tIns="25400" bIns="25400">
+          <a:bodyPr wrap="square" lIns="50800" tIns="25400" rIns="50800" bIns="25400" anchor="ctr">
             <a:spAutoFit/>
           </a:bodyPr>
           <a:lstStyle/>
@@ -12399,6 +12540,7 @@
           <a:lstStyle/>
           <a:p>
             <a:pPr algn="ctr"/>
+            <a:endParaRPr/>
           </a:p>
         </p:txBody>
       </p:sp>
@@ -12442,6 +12584,7 @@
           <a:lstStyle/>
           <a:p>
             <a:pPr algn="ctr"/>
+            <a:endParaRPr/>
           </a:p>
         </p:txBody>
       </p:sp>
@@ -12485,6 +12628,7 @@
           <a:lstStyle/>
           <a:p>
             <a:pPr algn="ctr"/>
+            <a:endParaRPr/>
           </a:p>
         </p:txBody>
       </p:sp>
@@ -12505,7 +12649,7 @@
           <a:noFill/>
         </p:spPr>
         <p:txBody>
-          <a:bodyPr wrap="square" anchor="t" lIns="50800" rIns="50800" tIns="25400" bIns="25400">
+          <a:bodyPr wrap="square" lIns="50800" tIns="25400" rIns="50800" bIns="25400" anchor="t">
             <a:spAutoFit/>
           </a:bodyPr>
           <a:lstStyle/>
@@ -12546,7 +12690,7 @@
           <a:noFill/>
         </p:spPr>
         <p:txBody>
-          <a:bodyPr wrap="square" anchor="t" lIns="50800" rIns="50800" tIns="25400" bIns="25400">
+          <a:bodyPr wrap="square" lIns="50800" tIns="25400" rIns="50800" bIns="25400" anchor="t">
             <a:spAutoFit/>
           </a:bodyPr>
           <a:lstStyle/>
@@ -12587,7 +12731,7 @@
           <a:noFill/>
         </p:spPr>
         <p:txBody>
-          <a:bodyPr wrap="square" anchor="t" lIns="50800" rIns="50800" tIns="25400" bIns="25400">
+          <a:bodyPr wrap="square" lIns="50800" tIns="25400" rIns="50800" bIns="25400" anchor="t">
             <a:spAutoFit/>
           </a:bodyPr>
           <a:lstStyle/>
@@ -12651,6 +12795,7 @@
           <a:lstStyle/>
           <a:p>
             <a:pPr algn="ctr"/>
+            <a:endParaRPr/>
           </a:p>
         </p:txBody>
       </p:sp>
@@ -12694,6 +12839,7 @@
           <a:lstStyle/>
           <a:p>
             <a:pPr algn="ctr"/>
+            <a:endParaRPr/>
           </a:p>
         </p:txBody>
       </p:sp>
@@ -12714,7 +12860,7 @@
           <a:noFill/>
         </p:spPr>
         <p:txBody>
-          <a:bodyPr wrap="square" anchor="t" lIns="50800" rIns="50800" tIns="25400" bIns="25400">
+          <a:bodyPr wrap="square" lIns="50800" tIns="25400" rIns="50800" bIns="25400" anchor="t">
             <a:spAutoFit/>
           </a:bodyPr>
           <a:lstStyle/>
@@ -12755,7 +12901,7 @@
           <a:noFill/>
         </p:spPr>
         <p:txBody>
-          <a:bodyPr wrap="square" anchor="t" lIns="50800" rIns="50800" tIns="25400" bIns="25400">
+          <a:bodyPr wrap="square" lIns="50800" tIns="25400" rIns="50800" bIns="25400" anchor="t">
             <a:spAutoFit/>
           </a:bodyPr>
           <a:lstStyle/>
@@ -12796,7 +12942,7 @@
           <a:noFill/>
         </p:spPr>
         <p:txBody>
-          <a:bodyPr wrap="square" anchor="t" lIns="50800" rIns="50800" tIns="25400" bIns="25400">
+          <a:bodyPr wrap="square" lIns="50800" tIns="25400" rIns="50800" bIns="25400" anchor="t">
             <a:spAutoFit/>
           </a:bodyPr>
           <a:lstStyle/>
@@ -12815,7 +12961,7 @@
                 <a:ea typeface="Microsoft YaHei"/>
                 <a:cs typeface="Microsoft YaHei"/>
               </a:rPr>
-              <a:t>成本 ≤ ¥150、零焊接、采样率 ≥ 1 kHz、无线上报、可用性、可维护性、数据不丢失、电气安全、可复制</a:t>
+              <a:t>采样率 ≥ 1 kHz、无线上报、数据不丢失、可用性与可维护性、电气安全、可复制性等 9 条</a:t>
             </a:r>
           </a:p>
         </p:txBody>
@@ -12860,6 +13006,7 @@
           <a:lstStyle/>
           <a:p>
             <a:pPr algn="ctr"/>
+            <a:endParaRPr/>
           </a:p>
         </p:txBody>
       </p:sp>
@@ -12903,6 +13050,7 @@
           <a:lstStyle/>
           <a:p>
             <a:pPr algn="ctr"/>
+            <a:endParaRPr/>
           </a:p>
         </p:txBody>
       </p:sp>
@@ -12923,7 +13071,7 @@
           <a:noFill/>
         </p:spPr>
         <p:txBody>
-          <a:bodyPr wrap="square" anchor="t" lIns="50800" rIns="50800" tIns="25400" bIns="25400">
+          <a:bodyPr wrap="square" lIns="50800" tIns="25400" rIns="50800" bIns="25400" anchor="t">
             <a:spAutoFit/>
           </a:bodyPr>
           <a:lstStyle/>
@@ -12964,7 +13112,7 @@
           <a:noFill/>
         </p:spPr>
         <p:txBody>
-          <a:bodyPr wrap="square" anchor="t" lIns="50800" rIns="50800" tIns="25400" bIns="25400">
+          <a:bodyPr wrap="square" lIns="50800" tIns="25400" rIns="50800" bIns="25400" anchor="t">
             <a:spAutoFit/>
           </a:bodyPr>
           <a:lstStyle/>
@@ -13005,7 +13153,7 @@
           <a:noFill/>
         </p:spPr>
         <p:txBody>
-          <a:bodyPr wrap="square" anchor="t" lIns="50800" rIns="50800" tIns="25400" bIns="25400">
+          <a:bodyPr wrap="square" lIns="50800" tIns="25400" rIns="50800" bIns="25400" anchor="t">
             <a:spAutoFit/>
           </a:bodyPr>
           <a:lstStyle/>
@@ -13024,7 +13172,7 @@
                 <a:ea typeface="Microsoft YaHei"/>
                 <a:cs typeface="Microsoft YaHei"/>
               </a:rPr>
-              <a:t>每条均可量化验证：采样率误差 ≤ 0.5%、静止模长 1.000 ± 0.2 g、报警响应 ≤ 10 s、成本 ≤ ¥150</a:t>
+              <a:t>每条均可量化验证：采样率误差 ≤ 0.5%、静止模长 1.000 ± 0.2 g、报警响应 ≤ 10 s 等</a:t>
             </a:r>
           </a:p>
         </p:txBody>
@@ -13046,7 +13194,7 @@
           <a:noFill/>
         </p:spPr>
         <p:txBody>
-          <a:bodyPr wrap="square" anchor="t" lIns="50800" rIns="50800" tIns="25400" bIns="25400">
+          <a:bodyPr wrap="square" lIns="50800" tIns="25400" rIns="50800" bIns="25400" anchor="t">
             <a:spAutoFit/>
           </a:bodyPr>
           <a:lstStyle/>
@@ -13083,7 +13231,7 @@
                 <a:ea typeface="Microsoft YaHei"/>
                 <a:cs typeface="Microsoft YaHei"/>
               </a:rPr>
-              <a:t>已达成的关键指标：采样率误差 −0.03%（判据 ≤0.5%）、成本 ¥119.50（预算 ¥150）、报警响应 6 s（判据 ≤10 s）</a:t>
+              <a:t>已达成的关键指标：采样率误差 −0.03%（判据 ≤0.5%）、报警响应 6 s（判据 ≤10 s）</a:t>
             </a:r>
           </a:p>
         </p:txBody>
@@ -13097,7 +13245,7 @@
 </file>
 
 <file path=ppt/slides/slide5.xml><?xml version="1.0" encoding="utf-8"?>
-<p:sld xmlns:a="http://schemas.openxmlformats.org/drawingml/2006/main" xmlns:p="http://schemas.openxmlformats.org/presentationml/2006/main" xmlns:r="http://schemas.openxmlformats.org/officeDocument/2006/relationships">
+<p:sld xmlns:a="http://schemas.openxmlformats.org/drawingml/2006/main" xmlns:r="http://schemas.openxmlformats.org/officeDocument/2006/relationships" xmlns:p="http://schemas.openxmlformats.org/presentationml/2006/main">
   <p:cSld>
     <p:spTree>
       <p:nvGrpSpPr>
@@ -13105,7 +13253,14 @@
         <p:cNvGrpSpPr/>
         <p:nvPr/>
       </p:nvGrpSpPr>
-      <p:grpSpPr/>
+      <p:grpSpPr>
+        <a:xfrm>
+          <a:off x="0" y="0"/>
+          <a:ext cx="0" cy="0"/>
+          <a:chOff x="0" y="0"/>
+          <a:chExt cx="0" cy="0"/>
+        </a:xfrm>
+      </p:grpSpPr>
       <p:sp>
         <p:nvSpPr>
           <p:cNvPr id="2" name="Rectangle 1"/>
@@ -13146,6 +13301,7 @@
           <a:lstStyle/>
           <a:p>
             <a:pPr algn="ctr"/>
+            <a:endParaRPr/>
           </a:p>
         </p:txBody>
       </p:sp>
@@ -13185,7 +13341,7 @@
           </a:fontRef>
         </p:style>
         <p:txBody>
-          <a:bodyPr rtlCol="0" anchor="ctr" wrap="none" lIns="25400" rIns="25400"/>
+          <a:bodyPr wrap="none" lIns="25400" rIns="25400" rtlCol="0" anchor="ctr"/>
           <a:lstStyle/>
           <a:p>
             <a:pPr algn="ctr"/>
@@ -13220,7 +13376,7 @@
           <a:noFill/>
         </p:spPr>
         <p:txBody>
-          <a:bodyPr wrap="square" anchor="ctr" lIns="50800" rIns="50800" tIns="25400" bIns="25400">
+          <a:bodyPr wrap="square" lIns="50800" tIns="25400" rIns="50800" bIns="25400" anchor="ctr">
             <a:spAutoFit/>
           </a:bodyPr>
           <a:lstStyle/>
@@ -13284,6 +13440,7 @@
           <a:lstStyle/>
           <a:p>
             <a:pPr algn="ctr"/>
+            <a:endParaRPr/>
           </a:p>
         </p:txBody>
       </p:sp>
@@ -13327,6 +13484,7 @@
           <a:lstStyle/>
           <a:p>
             <a:pPr algn="ctr"/>
+            <a:endParaRPr/>
           </a:p>
         </p:txBody>
       </p:sp>
@@ -13347,7 +13505,7 @@
           <a:noFill/>
         </p:spPr>
         <p:txBody>
-          <a:bodyPr wrap="square" anchor="ctr" lIns="50800" rIns="50800" tIns="25400" bIns="25400">
+          <a:bodyPr wrap="square" lIns="50800" tIns="25400" rIns="50800" bIns="25400" anchor="ctr">
             <a:spAutoFit/>
           </a:bodyPr>
           <a:lstStyle/>
@@ -13411,6 +13569,7 @@
           <a:lstStyle/>
           <a:p>
             <a:pPr algn="ctr"/>
+            <a:endParaRPr/>
           </a:p>
         </p:txBody>
       </p:sp>
@@ -13431,7 +13590,7 @@
           <a:noFill/>
         </p:spPr>
         <p:txBody>
-          <a:bodyPr wrap="square" anchor="ctr" lIns="50800" rIns="50800" tIns="25400" bIns="25400">
+          <a:bodyPr wrap="square" lIns="50800" tIns="25400" rIns="50800" bIns="25400" anchor="ctr">
             <a:spAutoFit/>
           </a:bodyPr>
           <a:lstStyle/>
@@ -13495,6 +13654,7 @@
           <a:lstStyle/>
           <a:p>
             <a:pPr algn="ctr"/>
+            <a:endParaRPr/>
           </a:p>
         </p:txBody>
       </p:sp>
@@ -13515,7 +13675,7 @@
           <a:noFill/>
         </p:spPr>
         <p:txBody>
-          <a:bodyPr wrap="square" anchor="ctr" lIns="50800" rIns="50800" tIns="25400" bIns="25400">
+          <a:bodyPr wrap="square" lIns="50800" tIns="25400" rIns="50800" bIns="25400" anchor="ctr">
             <a:spAutoFit/>
           </a:bodyPr>
           <a:lstStyle/>
@@ -13579,6 +13739,7 @@
           <a:lstStyle/>
           <a:p>
             <a:pPr algn="ctr"/>
+            <a:endParaRPr/>
           </a:p>
         </p:txBody>
       </p:sp>
@@ -13599,7 +13760,7 @@
           <a:noFill/>
         </p:spPr>
         <p:txBody>
-          <a:bodyPr wrap="square" anchor="ctr" lIns="50800" rIns="50800" tIns="25400" bIns="25400">
+          <a:bodyPr wrap="square" lIns="50800" tIns="25400" rIns="50800" bIns="25400" anchor="ctr">
             <a:spAutoFit/>
           </a:bodyPr>
           <a:lstStyle/>
@@ -13663,6 +13824,7 @@
           <a:lstStyle/>
           <a:p>
             <a:pPr algn="ctr"/>
+            <a:endParaRPr/>
           </a:p>
         </p:txBody>
       </p:sp>
@@ -13683,7 +13845,7 @@
           <a:noFill/>
         </p:spPr>
         <p:txBody>
-          <a:bodyPr wrap="square" anchor="ctr" lIns="50800" rIns="50800" tIns="25400" bIns="25400">
+          <a:bodyPr wrap="square" lIns="50800" tIns="25400" rIns="50800" bIns="25400" anchor="ctr">
             <a:spAutoFit/>
           </a:bodyPr>
           <a:lstStyle/>
@@ -13747,6 +13909,7 @@
           <a:lstStyle/>
           <a:p>
             <a:pPr algn="ctr"/>
+            <a:endParaRPr/>
           </a:p>
         </p:txBody>
       </p:sp>
@@ -13767,7 +13930,7 @@
           <a:noFill/>
         </p:spPr>
         <p:txBody>
-          <a:bodyPr wrap="square" anchor="ctr" lIns="50800" rIns="50800" tIns="25400" bIns="25400">
+          <a:bodyPr wrap="square" lIns="50800" tIns="25400" rIns="50800" bIns="25400" anchor="ctr">
             <a:spAutoFit/>
           </a:bodyPr>
           <a:lstStyle/>
@@ -13831,6 +13994,7 @@
           <a:lstStyle/>
           <a:p>
             <a:pPr algn="ctr"/>
+            <a:endParaRPr/>
           </a:p>
         </p:txBody>
       </p:sp>
@@ -13851,7 +14015,7 @@
           <a:noFill/>
         </p:spPr>
         <p:txBody>
-          <a:bodyPr wrap="square" anchor="t" lIns="50800" rIns="50800" tIns="25400" bIns="25400">
+          <a:bodyPr wrap="square" lIns="50800" tIns="25400" rIns="50800" bIns="25400" anchor="t">
             <a:spAutoFit/>
           </a:bodyPr>
           <a:lstStyle/>
@@ -13902,7 +14066,7 @@
 </file>
 
 <file path=ppt/slides/slide6.xml><?xml version="1.0" encoding="utf-8"?>
-<p:sld xmlns:a="http://schemas.openxmlformats.org/drawingml/2006/main" xmlns:p="http://schemas.openxmlformats.org/presentationml/2006/main" xmlns:r="http://schemas.openxmlformats.org/officeDocument/2006/relationships">
+<p:sld xmlns:a="http://schemas.openxmlformats.org/drawingml/2006/main" xmlns:r="http://schemas.openxmlformats.org/officeDocument/2006/relationships" xmlns:p="http://schemas.openxmlformats.org/presentationml/2006/main">
   <p:cSld>
     <p:spTree>
       <p:nvGrpSpPr>
@@ -13910,7 +14074,14 @@
         <p:cNvGrpSpPr/>
         <p:nvPr/>
       </p:nvGrpSpPr>
-      <p:grpSpPr/>
+      <p:grpSpPr>
+        <a:xfrm>
+          <a:off x="0" y="0"/>
+          <a:ext cx="0" cy="0"/>
+          <a:chOff x="0" y="0"/>
+          <a:chExt cx="0" cy="0"/>
+        </a:xfrm>
+      </p:grpSpPr>
       <p:sp>
         <p:nvSpPr>
           <p:cNvPr id="2" name="Rectangle 1"/>
@@ -13951,6 +14122,7 @@
           <a:lstStyle/>
           <a:p>
             <a:pPr algn="ctr"/>
+            <a:endParaRPr/>
           </a:p>
         </p:txBody>
       </p:sp>
@@ -13990,7 +14162,7 @@
           </a:fontRef>
         </p:style>
         <p:txBody>
-          <a:bodyPr rtlCol="0" anchor="ctr" wrap="none" lIns="25400" rIns="25400"/>
+          <a:bodyPr wrap="none" lIns="25400" rIns="25400" rtlCol="0" anchor="ctr"/>
           <a:lstStyle/>
           <a:p>
             <a:pPr algn="ctr"/>
@@ -14025,7 +14197,7 @@
           <a:noFill/>
         </p:spPr>
         <p:txBody>
-          <a:bodyPr wrap="square" anchor="ctr" lIns="50800" rIns="50800" tIns="25400" bIns="25400">
+          <a:bodyPr wrap="square" lIns="50800" tIns="25400" rIns="50800" bIns="25400" anchor="ctr">
             <a:spAutoFit/>
           </a:bodyPr>
           <a:lstStyle/>
@@ -14089,6 +14261,7 @@
           <a:lstStyle/>
           <a:p>
             <a:pPr algn="ctr"/>
+            <a:endParaRPr/>
           </a:p>
         </p:txBody>
       </p:sp>
@@ -14111,15 +14284,39 @@
                 <a:tableStyleId>{5C22544A-7EE6-4342-B048-85BDC9FD1C3A}</a:tableStyleId>
               </a:tblPr>
               <a:tblGrid>
-                <a:gridCol w="1711756"/>
-                <a:gridCol w="3209544"/>
-                <a:gridCol w="2139696"/>
-                <a:gridCol w="3637483"/>
+                <a:gridCol w="1711756">
+                  <a:extLst>
+                    <a:ext uri="{9D8B030D-6E8A-4147-A177-3AD203B41FA5}">
+                      <a16:colId xmlns:a16="http://schemas.microsoft.com/office/drawing/2014/main" val="20000"/>
+                    </a:ext>
+                  </a:extLst>
+                </a:gridCol>
+                <a:gridCol w="3209544">
+                  <a:extLst>
+                    <a:ext uri="{9D8B030D-6E8A-4147-A177-3AD203B41FA5}">
+                      <a16:colId xmlns:a16="http://schemas.microsoft.com/office/drawing/2014/main" val="20001"/>
+                    </a:ext>
+                  </a:extLst>
+                </a:gridCol>
+                <a:gridCol w="2139696">
+                  <a:extLst>
+                    <a:ext uri="{9D8B030D-6E8A-4147-A177-3AD203B41FA5}">
+                      <a16:colId xmlns:a16="http://schemas.microsoft.com/office/drawing/2014/main" val="20002"/>
+                    </a:ext>
+                  </a:extLst>
+                </a:gridCol>
+                <a:gridCol w="3637483">
+                  <a:extLst>
+                    <a:ext uri="{9D8B030D-6E8A-4147-A177-3AD203B41FA5}">
+                      <a16:colId xmlns:a16="http://schemas.microsoft.com/office/drawing/2014/main" val="20003"/>
+                    </a:ext>
+                  </a:extLst>
+                </a:gridCol>
               </a:tblGrid>
               <a:tr h="603504">
                 <a:tc>
                   <a:txBody>
-                    <a:bodyPr wrap="square"/>
+                    <a:bodyPr/>
                     <a:lstStyle/>
                     <a:p>
                       <a:pPr algn="l"/>
@@ -14144,7 +14341,7 @@
                 </a:tc>
                 <a:tc>
                   <a:txBody>
-                    <a:bodyPr wrap="square"/>
+                    <a:bodyPr/>
                     <a:lstStyle/>
                     <a:p>
                       <a:pPr algn="l"/>
@@ -14169,7 +14366,7 @@
                 </a:tc>
                 <a:tc>
                   <a:txBody>
-                    <a:bodyPr wrap="square"/>
+                    <a:bodyPr/>
                     <a:lstStyle/>
                     <a:p>
                       <a:pPr algn="l"/>
@@ -14194,7 +14391,7 @@
                 </a:tc>
                 <a:tc>
                   <a:txBody>
-                    <a:bodyPr wrap="square"/>
+                    <a:bodyPr/>
                     <a:lstStyle/>
                     <a:p>
                       <a:pPr algn="l"/>
@@ -14217,11 +14414,16 @@
                     </a:solidFill>
                   </a:tcPr>
                 </a:tc>
+                <a:extLst>
+                  <a:ext uri="{0D108BD9-81ED-4DB2-BD59-A6C34878D82A}">
+                    <a16:rowId xmlns:a16="http://schemas.microsoft.com/office/drawing/2014/main" val="10000"/>
+                  </a:ext>
+                </a:extLst>
               </a:tr>
               <a:tr h="603504">
                 <a:tc>
                   <a:txBody>
-                    <a:bodyPr wrap="square"/>
+                    <a:bodyPr/>
                     <a:lstStyle/>
                     <a:p>
                       <a:pPr algn="l"/>
@@ -14246,7 +14448,7 @@
                 </a:tc>
                 <a:tc>
                   <a:txBody>
-                    <a:bodyPr wrap="square"/>
+                    <a:bodyPr/>
                     <a:lstStyle/>
                     <a:p>
                       <a:pPr algn="l"/>
@@ -14271,7 +14473,7 @@
                 </a:tc>
                 <a:tc>
                   <a:txBody>
-                    <a:bodyPr wrap="square"/>
+                    <a:bodyPr/>
                     <a:lstStyle/>
                     <a:p>
                       <a:pPr algn="l"/>
@@ -14296,7 +14498,7 @@
                 </a:tc>
                 <a:tc>
                   <a:txBody>
-                    <a:bodyPr wrap="square"/>
+                    <a:bodyPr/>
                     <a:lstStyle/>
                     <a:p>
                       <a:pPr algn="l"/>
@@ -14309,7 +14511,7 @@
                           <a:ea typeface="Microsoft YaHei"/>
                           <a:cs typeface="Microsoft YaHei"/>
                         </a:rPr>
-                        <a:t>成本低、I²C 简单、有已焊针版本</a:t>
+                        <a:t>I²C 接口简单、资料丰富、量程满足需求</a:t>
                       </a:r>
                     </a:p>
                   </a:txBody>
@@ -14319,11 +14521,16 @@
                     </a:solidFill>
                   </a:tcPr>
                 </a:tc>
+                <a:extLst>
+                  <a:ext uri="{0D108BD9-81ED-4DB2-BD59-A6C34878D82A}">
+                    <a16:rowId xmlns:a16="http://schemas.microsoft.com/office/drawing/2014/main" val="10001"/>
+                  </a:ext>
+                </a:extLst>
               </a:tr>
               <a:tr h="603504">
                 <a:tc>
                   <a:txBody>
-                    <a:bodyPr wrap="square"/>
+                    <a:bodyPr/>
                     <a:lstStyle/>
                     <a:p>
                       <a:pPr algn="l"/>
@@ -14348,7 +14555,7 @@
                 </a:tc>
                 <a:tc>
                   <a:txBody>
-                    <a:bodyPr wrap="square"/>
+                    <a:bodyPr/>
                     <a:lstStyle/>
                     <a:p>
                       <a:pPr algn="l"/>
@@ -14373,7 +14580,7 @@
                 </a:tc>
                 <a:tc>
                   <a:txBody>
-                    <a:bodyPr wrap="square"/>
+                    <a:bodyPr/>
                     <a:lstStyle/>
                     <a:p>
                       <a:pPr algn="l"/>
@@ -14398,7 +14605,7 @@
                 </a:tc>
                 <a:tc>
                   <a:txBody>
-                    <a:bodyPr wrap="square"/>
+                    <a:bodyPr/>
                     <a:lstStyle/>
                     <a:p>
                       <a:pPr algn="l"/>
@@ -14421,11 +14628,16 @@
                     </a:solidFill>
                   </a:tcPr>
                 </a:tc>
+                <a:extLst>
+                  <a:ext uri="{0D108BD9-81ED-4DB2-BD59-A6C34878D82A}">
+                    <a16:rowId xmlns:a16="http://schemas.microsoft.com/office/drawing/2014/main" val="10002"/>
+                  </a:ext>
+                </a:extLst>
               </a:tr>
               <a:tr h="603504">
                 <a:tc>
                   <a:txBody>
-                    <a:bodyPr wrap="square"/>
+                    <a:bodyPr/>
                     <a:lstStyle/>
                     <a:p>
                       <a:pPr algn="l"/>
@@ -14450,7 +14662,7 @@
                 </a:tc>
                 <a:tc>
                   <a:txBody>
-                    <a:bodyPr wrap="square"/>
+                    <a:bodyPr/>
                     <a:lstStyle/>
                     <a:p>
                       <a:pPr algn="l"/>
@@ -14475,7 +14687,7 @@
                 </a:tc>
                 <a:tc>
                   <a:txBody>
-                    <a:bodyPr wrap="square"/>
+                    <a:bodyPr/>
                     <a:lstStyle/>
                     <a:p>
                       <a:pPr algn="l"/>
@@ -14500,7 +14712,7 @@
                 </a:tc>
                 <a:tc>
                   <a:txBody>
-                    <a:bodyPr wrap="square"/>
+                    <a:bodyPr/>
                     <a:lstStyle/>
                     <a:p>
                       <a:pPr algn="l"/>
@@ -14523,11 +14735,16 @@
                     </a:solidFill>
                   </a:tcPr>
                 </a:tc>
+                <a:extLst>
+                  <a:ext uri="{0D108BD9-81ED-4DB2-BD59-A6C34878D82A}">
+                    <a16:rowId xmlns:a16="http://schemas.microsoft.com/office/drawing/2014/main" val="10003"/>
+                  </a:ext>
+                </a:extLst>
               </a:tr>
               <a:tr h="603504">
                 <a:tc>
                   <a:txBody>
-                    <a:bodyPr wrap="square"/>
+                    <a:bodyPr/>
                     <a:lstStyle/>
                     <a:p>
                       <a:pPr algn="l"/>
@@ -14552,7 +14769,7 @@
                 </a:tc>
                 <a:tc>
                   <a:txBody>
-                    <a:bodyPr wrap="square"/>
+                    <a:bodyPr/>
                     <a:lstStyle/>
                     <a:p>
                       <a:pPr algn="l"/>
@@ -14577,7 +14794,7 @@
                 </a:tc>
                 <a:tc>
                   <a:txBody>
-                    <a:bodyPr wrap="square"/>
+                    <a:bodyPr/>
                     <a:lstStyle/>
                     <a:p>
                       <a:pPr algn="l"/>
@@ -14602,7 +14819,7 @@
                 </a:tc>
                 <a:tc>
                   <a:txBody>
-                    <a:bodyPr wrap="square"/>
+                    <a:bodyPr/>
                     <a:lstStyle/>
                     <a:p>
                       <a:pPr algn="l"/>
@@ -14625,11 +14842,16 @@
                     </a:solidFill>
                   </a:tcPr>
                 </a:tc>
+                <a:extLst>
+                  <a:ext uri="{0D108BD9-81ED-4DB2-BD59-A6C34878D82A}">
+                    <a16:rowId xmlns:a16="http://schemas.microsoft.com/office/drawing/2014/main" val="10004"/>
+                  </a:ext>
+                </a:extLst>
               </a:tr>
               <a:tr h="603504">
                 <a:tc>
                   <a:txBody>
-                    <a:bodyPr wrap="square"/>
+                    <a:bodyPr/>
                     <a:lstStyle/>
                     <a:p>
                       <a:pPr algn="l"/>
@@ -14654,7 +14876,7 @@
                 </a:tc>
                 <a:tc>
                   <a:txBody>
-                    <a:bodyPr wrap="square"/>
+                    <a:bodyPr/>
                     <a:lstStyle/>
                     <a:p>
                       <a:pPr algn="l"/>
@@ -14679,7 +14901,7 @@
                 </a:tc>
                 <a:tc>
                   <a:txBody>
-                    <a:bodyPr wrap="square"/>
+                    <a:bodyPr/>
                     <a:lstStyle/>
                     <a:p>
                       <a:pPr algn="l"/>
@@ -14704,7 +14926,7 @@
                 </a:tc>
                 <a:tc>
                   <a:txBody>
-                    <a:bodyPr wrap="square"/>
+                    <a:bodyPr/>
                     <a:lstStyle/>
                     <a:p>
                       <a:pPr algn="l"/>
@@ -14727,6 +14949,11 @@
                     </a:solidFill>
                   </a:tcPr>
                 </a:tc>
+                <a:extLst>
+                  <a:ext uri="{0D108BD9-81ED-4DB2-BD59-A6C34878D82A}">
+                    <a16:rowId xmlns:a16="http://schemas.microsoft.com/office/drawing/2014/main" val="10005"/>
+                  </a:ext>
+                </a:extLst>
               </a:tr>
             </a:tbl>
           </a:graphicData>
@@ -14749,7 +14976,7 @@
           <a:noFill/>
         </p:spPr>
         <p:txBody>
-          <a:bodyPr wrap="square" anchor="t" lIns="50800" rIns="50800" tIns="25400" bIns="25400">
+          <a:bodyPr wrap="square" lIns="50800" tIns="25400" rIns="50800" bIns="25400" anchor="t">
             <a:spAutoFit/>
           </a:bodyPr>
           <a:lstStyle/>
@@ -14768,7 +14995,7 @@
                 <a:ea typeface="Microsoft YaHei"/>
                 <a:cs typeface="Microsoft YaHei"/>
               </a:rPr>
-              <a:t>选型的共同原则：在满足需求前提下优先选「零焊接、低门槛、易复现」的方案，以保证被 LICHPU 复制时不需要专业设备。</a:t>
+              <a:t>选型的共同原则：在满足需求前提下优先选「接口简单、资料丰富、易于复现」的方案，便于在不同环境中复制。</a:t>
             </a:r>
           </a:p>
         </p:txBody>
@@ -14782,7 +15009,7 @@
 </file>
 
 <file path=ppt/slides/slide7.xml><?xml version="1.0" encoding="utf-8"?>
-<p:sld xmlns:a="http://schemas.openxmlformats.org/drawingml/2006/main" xmlns:p="http://schemas.openxmlformats.org/presentationml/2006/main" xmlns:r="http://schemas.openxmlformats.org/officeDocument/2006/relationships">
+<p:sld xmlns:a="http://schemas.openxmlformats.org/drawingml/2006/main" xmlns:r="http://schemas.openxmlformats.org/officeDocument/2006/relationships" xmlns:p="http://schemas.openxmlformats.org/presentationml/2006/main">
   <p:cSld>
     <p:spTree>
       <p:nvGrpSpPr>
@@ -14790,7 +15017,14 @@
         <p:cNvGrpSpPr/>
         <p:nvPr/>
       </p:nvGrpSpPr>
-      <p:grpSpPr/>
+      <p:grpSpPr>
+        <a:xfrm>
+          <a:off x="0" y="0"/>
+          <a:ext cx="0" cy="0"/>
+          <a:chOff x="0" y="0"/>
+          <a:chExt cx="0" cy="0"/>
+        </a:xfrm>
+      </p:grpSpPr>
       <p:sp>
         <p:nvSpPr>
           <p:cNvPr id="2" name="Rectangle 1"/>
@@ -14831,6 +15065,7 @@
           <a:lstStyle/>
           <a:p>
             <a:pPr algn="ctr"/>
+            <a:endParaRPr/>
           </a:p>
         </p:txBody>
       </p:sp>
@@ -14870,7 +15105,7 @@
           </a:fontRef>
         </p:style>
         <p:txBody>
-          <a:bodyPr rtlCol="0" anchor="ctr" wrap="none" lIns="25400" rIns="25400"/>
+          <a:bodyPr wrap="none" lIns="25400" rIns="25400" rtlCol="0" anchor="ctr"/>
           <a:lstStyle/>
           <a:p>
             <a:pPr algn="ctr"/>
@@ -14905,7 +15140,7 @@
           <a:noFill/>
         </p:spPr>
         <p:txBody>
-          <a:bodyPr wrap="square" anchor="ctr" lIns="50800" rIns="50800" tIns="25400" bIns="25400">
+          <a:bodyPr wrap="square" lIns="50800" tIns="25400" rIns="50800" bIns="25400" anchor="ctr">
             <a:spAutoFit/>
           </a:bodyPr>
           <a:lstStyle/>
@@ -14969,6 +15204,7 @@
           <a:lstStyle/>
           <a:p>
             <a:pPr algn="ctr"/>
+            <a:endParaRPr/>
           </a:p>
         </p:txBody>
       </p:sp>
@@ -14989,7 +15225,7 @@
           <a:noFill/>
         </p:spPr>
         <p:txBody>
-          <a:bodyPr wrap="square" anchor="t" lIns="50800" rIns="50800" tIns="25400" bIns="25400">
+          <a:bodyPr wrap="square" lIns="50800" tIns="25400" rIns="50800" bIns="25400" anchor="t">
             <a:spAutoFit/>
           </a:bodyPr>
           <a:lstStyle/>
@@ -15197,6 +15433,7 @@
           <a:lstStyle/>
           <a:p>
             <a:pPr algn="ctr"/>
+            <a:endParaRPr/>
           </a:p>
         </p:txBody>
       </p:sp>
@@ -15217,7 +15454,7 @@
           <a:noFill/>
         </p:spPr>
         <p:txBody>
-          <a:bodyPr wrap="square" anchor="t" lIns="50800" rIns="50800" tIns="25400" bIns="25400">
+          <a:bodyPr wrap="square" lIns="50800" tIns="25400" rIns="50800" bIns="25400" anchor="t">
             <a:spAutoFit/>
           </a:bodyPr>
           <a:lstStyle/>
@@ -15358,7 +15595,7 @@
 </file>
 
 <file path=ppt/slides/slide8.xml><?xml version="1.0" encoding="utf-8"?>
-<p:sld xmlns:a="http://schemas.openxmlformats.org/drawingml/2006/main" xmlns:p="http://schemas.openxmlformats.org/presentationml/2006/main" xmlns:r="http://schemas.openxmlformats.org/officeDocument/2006/relationships">
+<p:sld xmlns:a="http://schemas.openxmlformats.org/drawingml/2006/main" xmlns:r="http://schemas.openxmlformats.org/officeDocument/2006/relationships" xmlns:p="http://schemas.openxmlformats.org/presentationml/2006/main">
   <p:cSld>
     <p:spTree>
       <p:nvGrpSpPr>
@@ -15366,7 +15603,14 @@
         <p:cNvGrpSpPr/>
         <p:nvPr/>
       </p:nvGrpSpPr>
-      <p:grpSpPr/>
+      <p:grpSpPr>
+        <a:xfrm>
+          <a:off x="0" y="0"/>
+          <a:ext cx="0" cy="0"/>
+          <a:chOff x="0" y="0"/>
+          <a:chExt cx="0" cy="0"/>
+        </a:xfrm>
+      </p:grpSpPr>
       <p:sp>
         <p:nvSpPr>
           <p:cNvPr id="2" name="Rectangle 1"/>
@@ -15407,6 +15651,7 @@
           <a:lstStyle/>
           <a:p>
             <a:pPr algn="ctr"/>
+            <a:endParaRPr/>
           </a:p>
         </p:txBody>
       </p:sp>
@@ -15446,7 +15691,7 @@
           </a:fontRef>
         </p:style>
         <p:txBody>
-          <a:bodyPr rtlCol="0" anchor="ctr" wrap="none" lIns="25400" rIns="25400"/>
+          <a:bodyPr wrap="none" lIns="25400" rIns="25400" rtlCol="0" anchor="ctr"/>
           <a:lstStyle/>
           <a:p>
             <a:pPr algn="ctr"/>
@@ -15481,7 +15726,7 @@
           <a:noFill/>
         </p:spPr>
         <p:txBody>
-          <a:bodyPr wrap="square" anchor="ctr" lIns="50800" rIns="50800" tIns="25400" bIns="25400">
+          <a:bodyPr wrap="square" lIns="50800" tIns="25400" rIns="50800" bIns="25400" anchor="ctr">
             <a:spAutoFit/>
           </a:bodyPr>
           <a:lstStyle/>
@@ -15500,7 +15745,7 @@
                 <a:ea typeface="Microsoft YaHei"/>
                 <a:cs typeface="Microsoft YaHei"/>
               </a:rPr>
-              <a:t>硬件实现：零焊接的完整样机</a:t>
+              <a:t>硬件实现：完整样机与安装方式</a:t>
             </a:r>
           </a:p>
         </p:txBody>
@@ -15545,6 +15790,7 @@
           <a:lstStyle/>
           <a:p>
             <a:pPr algn="ctr"/>
+            <a:endParaRPr/>
           </a:p>
         </p:txBody>
       </p:sp>
@@ -15557,7 +15803,7 @@
           <p:nvPr/>
         </p:nvPicPr>
         <p:blipFill>
-          <a:blip r:embed="rId2"/>
+          <a:blip r:embed="rId3"/>
           <a:stretch>
             <a:fillRect/>
           </a:stretch>
@@ -15581,7 +15827,7 @@
           <p:nvPr/>
         </p:nvPicPr>
         <p:blipFill>
-          <a:blip r:embed="rId3"/>
+          <a:blip r:embed="rId4"/>
           <a:stretch>
             <a:fillRect/>
           </a:stretch>
@@ -15613,7 +15859,7 @@
           <a:noFill/>
         </p:spPr>
         <p:txBody>
-          <a:bodyPr wrap="square" anchor="t" lIns="50800" rIns="50800" tIns="25400" bIns="25400">
+          <a:bodyPr wrap="square" lIns="50800" tIns="25400" rIns="50800" bIns="25400" anchor="t">
             <a:spAutoFit/>
           </a:bodyPr>
           <a:lstStyle/>
@@ -15654,7 +15900,7 @@
           <a:noFill/>
         </p:spPr>
         <p:txBody>
-          <a:bodyPr wrap="square" anchor="t" lIns="50800" rIns="50800" tIns="25400" bIns="25400">
+          <a:bodyPr wrap="square" lIns="50800" tIns="25400" rIns="50800" bIns="25400" anchor="t">
             <a:spAutoFit/>
           </a:bodyPr>
           <a:lstStyle/>
@@ -15718,6 +15964,7 @@
           <a:lstStyle/>
           <a:p>
             <a:pPr algn="ctr"/>
+            <a:endParaRPr/>
           </a:p>
         </p:txBody>
       </p:sp>
@@ -15738,7 +15985,7 @@
           <a:noFill/>
         </p:spPr>
         <p:txBody>
-          <a:bodyPr wrap="square" anchor="ctr" lIns="50800" rIns="50800" tIns="25400" bIns="25400">
+          <a:bodyPr wrap="square" lIns="50800" tIns="25400" rIns="50800" bIns="25400" anchor="ctr">
             <a:spAutoFit/>
           </a:bodyPr>
           <a:lstStyle/>
@@ -15757,7 +16004,7 @@
                 <a:ea typeface="Microsoft YaHei"/>
                 <a:cs typeface="Microsoft YaHei"/>
               </a:rPr>
-              <a:t>全部模块选用已焊针版本，用面包板与杜邦线连接，全程无焊接——满足「零焊接」这一硬性约束。</a:t>
+              <a:t>三部分模块通过标准化接口连接，结构清晰、便于拆装与更换。</a:t>
             </a:r>
           </a:p>
         </p:txBody>
@@ -15771,7 +16018,7 @@
 </file>
 
 <file path=ppt/slides/slide9.xml><?xml version="1.0" encoding="utf-8"?>
-<p:sld xmlns:a="http://schemas.openxmlformats.org/drawingml/2006/main" xmlns:p="http://schemas.openxmlformats.org/presentationml/2006/main" xmlns:r="http://schemas.openxmlformats.org/officeDocument/2006/relationships">
+<p:sld xmlns:a="http://schemas.openxmlformats.org/drawingml/2006/main" xmlns:r="http://schemas.openxmlformats.org/officeDocument/2006/relationships" xmlns:p="http://schemas.openxmlformats.org/presentationml/2006/main">
   <p:cSld>
     <p:spTree>
       <p:nvGrpSpPr>
@@ -15779,7 +16026,14 @@
         <p:cNvGrpSpPr/>
         <p:nvPr/>
       </p:nvGrpSpPr>
-      <p:grpSpPr/>
+      <p:grpSpPr>
+        <a:xfrm>
+          <a:off x="0" y="0"/>
+          <a:ext cx="0" cy="0"/>
+          <a:chOff x="0" y="0"/>
+          <a:chExt cx="0" cy="0"/>
+        </a:xfrm>
+      </p:grpSpPr>
       <p:sp>
         <p:nvSpPr>
           <p:cNvPr id="2" name="Rectangle 1"/>
@@ -15820,6 +16074,7 @@
           <a:lstStyle/>
           <a:p>
             <a:pPr algn="ctr"/>
+            <a:endParaRPr/>
           </a:p>
         </p:txBody>
       </p:sp>
@@ -15859,7 +16114,7 @@
           </a:fontRef>
         </p:style>
         <p:txBody>
-          <a:bodyPr rtlCol="0" anchor="ctr" wrap="none" lIns="25400" rIns="25400"/>
+          <a:bodyPr wrap="none" lIns="25400" rIns="25400" rtlCol="0" anchor="ctr"/>
           <a:lstStyle/>
           <a:p>
             <a:pPr algn="ctr"/>
@@ -15894,7 +16149,7 @@
           <a:noFill/>
         </p:spPr>
         <p:txBody>
-          <a:bodyPr wrap="square" anchor="ctr" lIns="50800" rIns="50800" tIns="25400" bIns="25400">
+          <a:bodyPr wrap="square" lIns="50800" tIns="25400" rIns="50800" bIns="25400" anchor="ctr">
             <a:spAutoFit/>
           </a:bodyPr>
           <a:lstStyle/>
@@ -15958,6 +16213,7 @@
           <a:lstStyle/>
           <a:p>
             <a:pPr algn="ctr"/>
+            <a:endParaRPr/>
           </a:p>
         </p:txBody>
       </p:sp>
@@ -15980,14 +16236,32 @@
                 <a:tableStyleId>{5C22544A-7EE6-4342-B048-85BDC9FD1C3A}</a:tableStyleId>
               </a:tblPr>
               <a:tblGrid>
-                <a:gridCol w="1283817"/>
-                <a:gridCol w="4921300"/>
-                <a:gridCol w="4493361"/>
+                <a:gridCol w="1283817">
+                  <a:extLst>
+                    <a:ext uri="{9D8B030D-6E8A-4147-A177-3AD203B41FA5}">
+                      <a16:colId xmlns:a16="http://schemas.microsoft.com/office/drawing/2014/main" val="20000"/>
+                    </a:ext>
+                  </a:extLst>
+                </a:gridCol>
+                <a:gridCol w="4921300">
+                  <a:extLst>
+                    <a:ext uri="{9D8B030D-6E8A-4147-A177-3AD203B41FA5}">
+                      <a16:colId xmlns:a16="http://schemas.microsoft.com/office/drawing/2014/main" val="20001"/>
+                    </a:ext>
+                  </a:extLst>
+                </a:gridCol>
+                <a:gridCol w="4493361">
+                  <a:extLst>
+                    <a:ext uri="{9D8B030D-6E8A-4147-A177-3AD203B41FA5}">
+                      <a16:colId xmlns:a16="http://schemas.microsoft.com/office/drawing/2014/main" val="20002"/>
+                    </a:ext>
+                  </a:extLst>
+                </a:gridCol>
               </a:tblGrid>
               <a:tr h="502920">
                 <a:tc>
                   <a:txBody>
-                    <a:bodyPr wrap="square"/>
+                    <a:bodyPr/>
                     <a:lstStyle/>
                     <a:p>
                       <a:pPr algn="l"/>
@@ -16012,7 +16286,7 @@
                 </a:tc>
                 <a:tc>
                   <a:txBody>
-                    <a:bodyPr wrap="square"/>
+                    <a:bodyPr/>
                     <a:lstStyle/>
                     <a:p>
                       <a:pPr algn="l"/>
@@ -16037,7 +16311,7 @@
                 </a:tc>
                 <a:tc>
                   <a:txBody>
-                    <a:bodyPr wrap="square"/>
+                    <a:bodyPr/>
                     <a:lstStyle/>
                     <a:p>
                       <a:pPr algn="l"/>
@@ -16060,11 +16334,16 @@
                     </a:solidFill>
                   </a:tcPr>
                 </a:tc>
+                <a:extLst>
+                  <a:ext uri="{0D108BD9-81ED-4DB2-BD59-A6C34878D82A}">
+                    <a16:rowId xmlns:a16="http://schemas.microsoft.com/office/drawing/2014/main" val="10000"/>
+                  </a:ext>
+                </a:extLst>
               </a:tr>
               <a:tr h="502920">
                 <a:tc>
                   <a:txBody>
-                    <a:bodyPr wrap="square"/>
+                    <a:bodyPr/>
                     <a:lstStyle/>
                     <a:p>
                       <a:pPr algn="l"/>
@@ -16089,7 +16368,7 @@
                 </a:tc>
                 <a:tc>
                   <a:txBody>
-                    <a:bodyPr wrap="square"/>
+                    <a:bodyPr/>
                     <a:lstStyle/>
                     <a:p>
                       <a:pPr algn="l"/>
@@ -16114,7 +16393,7 @@
                 </a:tc>
                 <a:tc>
                   <a:txBody>
-                    <a:bodyPr wrap="square"/>
+                    <a:bodyPr/>
                     <a:lstStyle/>
                     <a:p>
                       <a:pPr algn="l"/>
@@ -16137,11 +16416,16 @@
                     </a:solidFill>
                   </a:tcPr>
                 </a:tc>
+                <a:extLst>
+                  <a:ext uri="{0D108BD9-81ED-4DB2-BD59-A6C34878D82A}">
+                    <a16:rowId xmlns:a16="http://schemas.microsoft.com/office/drawing/2014/main" val="10001"/>
+                  </a:ext>
+                </a:extLst>
               </a:tr>
               <a:tr h="502920">
                 <a:tc>
                   <a:txBody>
-                    <a:bodyPr wrap="square"/>
+                    <a:bodyPr/>
                     <a:lstStyle/>
                     <a:p>
                       <a:pPr algn="l"/>
@@ -16166,7 +16450,7 @@
                 </a:tc>
                 <a:tc>
                   <a:txBody>
-                    <a:bodyPr wrap="square"/>
+                    <a:bodyPr/>
                     <a:lstStyle/>
                     <a:p>
                       <a:pPr algn="l"/>
@@ -16191,7 +16475,7 @@
                 </a:tc>
                 <a:tc>
                   <a:txBody>
-                    <a:bodyPr wrap="square"/>
+                    <a:bodyPr/>
                     <a:lstStyle/>
                     <a:p>
                       <a:pPr algn="l"/>
@@ -16214,11 +16498,16 @@
                     </a:solidFill>
                   </a:tcPr>
                 </a:tc>
+                <a:extLst>
+                  <a:ext uri="{0D108BD9-81ED-4DB2-BD59-A6C34878D82A}">
+                    <a16:rowId xmlns:a16="http://schemas.microsoft.com/office/drawing/2014/main" val="10002"/>
+                  </a:ext>
+                </a:extLst>
               </a:tr>
               <a:tr h="502920">
                 <a:tc>
                   <a:txBody>
-                    <a:bodyPr wrap="square"/>
+                    <a:bodyPr/>
                     <a:lstStyle/>
                     <a:p>
                       <a:pPr algn="l"/>
@@ -16243,7 +16532,7 @@
                 </a:tc>
                 <a:tc>
                   <a:txBody>
-                    <a:bodyPr wrap="square"/>
+                    <a:bodyPr/>
                     <a:lstStyle/>
                     <a:p>
                       <a:pPr algn="l"/>
@@ -16268,7 +16557,7 @@
                 </a:tc>
                 <a:tc>
                   <a:txBody>
-                    <a:bodyPr wrap="square"/>
+                    <a:bodyPr/>
                     <a:lstStyle/>
                     <a:p>
                       <a:pPr algn="l"/>
@@ -16291,11 +16580,16 @@
                     </a:solidFill>
                   </a:tcPr>
                 </a:tc>
+                <a:extLst>
+                  <a:ext uri="{0D108BD9-81ED-4DB2-BD59-A6C34878D82A}">
+                    <a16:rowId xmlns:a16="http://schemas.microsoft.com/office/drawing/2014/main" val="10003"/>
+                  </a:ext>
+                </a:extLst>
               </a:tr>
               <a:tr h="502920">
                 <a:tc>
                   <a:txBody>
-                    <a:bodyPr wrap="square"/>
+                    <a:bodyPr/>
                     <a:lstStyle/>
                     <a:p>
                       <a:pPr algn="l"/>
@@ -16320,7 +16614,7 @@
                 </a:tc>
                 <a:tc>
                   <a:txBody>
-                    <a:bodyPr wrap="square"/>
+                    <a:bodyPr/>
                     <a:lstStyle/>
                     <a:p>
                       <a:pPr algn="l"/>
@@ -16345,7 +16639,7 @@
                 </a:tc>
                 <a:tc>
                   <a:txBody>
-                    <a:bodyPr wrap="square"/>
+                    <a:bodyPr/>
                     <a:lstStyle/>
                     <a:p>
                       <a:pPr algn="l"/>
@@ -16368,11 +16662,16 @@
                     </a:solidFill>
                   </a:tcPr>
                 </a:tc>
+                <a:extLst>
+                  <a:ext uri="{0D108BD9-81ED-4DB2-BD59-A6C34878D82A}">
+                    <a16:rowId xmlns:a16="http://schemas.microsoft.com/office/drawing/2014/main" val="10004"/>
+                  </a:ext>
+                </a:extLst>
               </a:tr>
               <a:tr h="502920">
                 <a:tc>
                   <a:txBody>
-                    <a:bodyPr wrap="square"/>
+                    <a:bodyPr/>
                     <a:lstStyle/>
                     <a:p>
                       <a:pPr algn="l"/>
@@ -16397,7 +16696,7 @@
                 </a:tc>
                 <a:tc>
                   <a:txBody>
-                    <a:bodyPr wrap="square"/>
+                    <a:bodyPr/>
                     <a:lstStyle/>
                     <a:p>
                       <a:pPr algn="l"/>
@@ -16422,7 +16721,7 @@
                 </a:tc>
                 <a:tc>
                   <a:txBody>
-                    <a:bodyPr wrap="square"/>
+                    <a:bodyPr/>
                     <a:lstStyle/>
                     <a:p>
                       <a:pPr algn="l"/>
@@ -16445,11 +16744,16 @@
                     </a:solidFill>
                   </a:tcPr>
                 </a:tc>
+                <a:extLst>
+                  <a:ext uri="{0D108BD9-81ED-4DB2-BD59-A6C34878D82A}">
+                    <a16:rowId xmlns:a16="http://schemas.microsoft.com/office/drawing/2014/main" val="10005"/>
+                  </a:ext>
+                </a:extLst>
               </a:tr>
               <a:tr h="502920">
                 <a:tc>
                   <a:txBody>
-                    <a:bodyPr wrap="square"/>
+                    <a:bodyPr/>
                     <a:lstStyle/>
                     <a:p>
                       <a:pPr algn="l"/>
@@ -16474,7 +16778,7 @@
                 </a:tc>
                 <a:tc>
                   <a:txBody>
-                    <a:bodyPr wrap="square"/>
+                    <a:bodyPr/>
                     <a:lstStyle/>
                     <a:p>
                       <a:pPr algn="l"/>
@@ -16499,7 +16803,7 @@
                 </a:tc>
                 <a:tc>
                   <a:txBody>
-                    <a:bodyPr wrap="square"/>
+                    <a:bodyPr/>
                     <a:lstStyle/>
                     <a:p>
                       <a:pPr algn="l"/>
@@ -16522,6 +16826,11 @@
                     </a:solidFill>
                   </a:tcPr>
                 </a:tc>
+                <a:extLst>
+                  <a:ext uri="{0D108BD9-81ED-4DB2-BD59-A6C34878D82A}">
+                    <a16:rowId xmlns:a16="http://schemas.microsoft.com/office/drawing/2014/main" val="10006"/>
+                  </a:ext>
+                </a:extLst>
               </a:tr>
             </a:tbl>
           </a:graphicData>
@@ -16567,6 +16876,7 @@
           <a:lstStyle/>
           <a:p>
             <a:pPr algn="ctr"/>
+            <a:endParaRPr/>
           </a:p>
         </p:txBody>
       </p:sp>
@@ -16587,7 +16897,7 @@
           <a:noFill/>
         </p:spPr>
         <p:txBody>
-          <a:bodyPr wrap="square" anchor="t" lIns="50800" rIns="50800" tIns="25400" bIns="25400">
+          <a:bodyPr wrap="square" lIns="50800" tIns="25400" rIns="50800" bIns="25400" anchor="t">
             <a:spAutoFit/>
           </a:bodyPr>
           <a:lstStyle/>
@@ -16958,7 +17268,7 @@
 </file>
 
 <file path=ppt/theme/theme2.xml><?xml version="1.0" encoding="utf-8"?>
-<a:theme xmlns:a="http://schemas.openxmlformats.org/drawingml/2006/main" name="Office Theme">
+<a:theme xmlns:a="http://schemas.openxmlformats.org/drawingml/2006/main" name="Office 主题​​">
   <a:themeElements>
     <a:clrScheme name="Office">
       <a:dk1>
@@ -16968,44 +17278,44 @@
         <a:sysClr val="window" lastClr="FFFFFF"/>
       </a:lt1>
       <a:dk2>
-        <a:srgbClr val="1F497D"/>
+        <a:srgbClr val="44546A"/>
       </a:dk2>
       <a:lt2>
-        <a:srgbClr val="EEECE1"/>
+        <a:srgbClr val="E7E6E6"/>
       </a:lt2>
       <a:accent1>
-        <a:srgbClr val="4F81BD"/>
+        <a:srgbClr val="4472C4"/>
       </a:accent1>
       <a:accent2>
-        <a:srgbClr val="C0504D"/>
+        <a:srgbClr val="ED7D31"/>
       </a:accent2>
       <a:accent3>
-        <a:srgbClr val="9BBB59"/>
+        <a:srgbClr val="A5A5A5"/>
       </a:accent3>
       <a:accent4>
-        <a:srgbClr val="8064A2"/>
+        <a:srgbClr val="FFC000"/>
       </a:accent4>
       <a:accent5>
-        <a:srgbClr val="4BACC6"/>
+        <a:srgbClr val="5B9BD5"/>
       </a:accent5>
       <a:accent6>
-        <a:srgbClr val="F79646"/>
+        <a:srgbClr val="70AD47"/>
       </a:accent6>
       <a:hlink>
-        <a:srgbClr val="0000FF"/>
+        <a:srgbClr val="0563C1"/>
       </a:hlink>
       <a:folHlink>
-        <a:srgbClr val="800080"/>
+        <a:srgbClr val="954F72"/>
       </a:folHlink>
     </a:clrScheme>
     <a:fontScheme name="Office">
       <a:majorFont>
-        <a:latin typeface="Calibri"/>
+        <a:latin typeface="等线 Light" panose="020F0302020204030204"/>
         <a:ea typeface=""/>
         <a:cs typeface=""/>
-        <a:font script="Jpan" typeface="ＭＳ Ｐゴシック"/>
+        <a:font script="Jpan" typeface="游ゴシック Light"/>
         <a:font script="Hang" typeface="맑은 고딕"/>
-        <a:font script="Hans" typeface="宋体"/>
+        <a:font script="Hans" typeface="等线 Light"/>
         <a:font script="Hant" typeface="新細明體"/>
         <a:font script="Arab" typeface="Times New Roman"/>
         <a:font script="Hebr" typeface="Times New Roman"/>
@@ -17033,14 +17343,31 @@
         <a:font script="Viet" typeface="Times New Roman"/>
         <a:font script="Uigh" typeface="Microsoft Uighur"/>
         <a:font script="Geor" typeface="Sylfaen"/>
+        <a:font script="Armn" typeface="Arial"/>
+        <a:font script="Bugi" typeface="Leelawadee UI"/>
+        <a:font script="Bopo" typeface="Microsoft JhengHei"/>
+        <a:font script="Java" typeface="Javanese Text"/>
+        <a:font script="Lisu" typeface="Segoe UI"/>
+        <a:font script="Mymr" typeface="Myanmar Text"/>
+        <a:font script="Nkoo" typeface="Ebrima"/>
+        <a:font script="Olck" typeface="Nirmala UI"/>
+        <a:font script="Osma" typeface="Ebrima"/>
+        <a:font script="Phag" typeface="Phagspa"/>
+        <a:font script="Syrn" typeface="Estrangelo Edessa"/>
+        <a:font script="Syrj" typeface="Estrangelo Edessa"/>
+        <a:font script="Syre" typeface="Estrangelo Edessa"/>
+        <a:font script="Sora" typeface="Nirmala UI"/>
+        <a:font script="Tale" typeface="Microsoft Tai Le"/>
+        <a:font script="Talu" typeface="Microsoft New Tai Lue"/>
+        <a:font script="Tfng" typeface="Ebrima"/>
       </a:majorFont>
       <a:minorFont>
-        <a:latin typeface="Calibri"/>
+        <a:latin typeface="等线" panose="020F0502020204030204"/>
         <a:ea typeface=""/>
         <a:cs typeface=""/>
-        <a:font script="Jpan" typeface="ＭＳ Ｐゴシック"/>
+        <a:font script="Jpan" typeface="游ゴシック"/>
         <a:font script="Hang" typeface="맑은 고딕"/>
-        <a:font script="Hans" typeface="宋体"/>
+        <a:font script="Hans" typeface="等线"/>
         <a:font script="Hant" typeface="新細明體"/>
         <a:font script="Arab" typeface="Arial"/>
         <a:font script="Hebr" typeface="Arial"/>
@@ -17068,6 +17395,23 @@
         <a:font script="Viet" typeface="Arial"/>
         <a:font script="Uigh" typeface="Microsoft Uighur"/>
         <a:font script="Geor" typeface="Sylfaen"/>
+        <a:font script="Armn" typeface="Arial"/>
+        <a:font script="Bugi" typeface="Leelawadee UI"/>
+        <a:font script="Bopo" typeface="Microsoft JhengHei"/>
+        <a:font script="Java" typeface="Javanese Text"/>
+        <a:font script="Lisu" typeface="Segoe UI"/>
+        <a:font script="Mymr" typeface="Myanmar Text"/>
+        <a:font script="Nkoo" typeface="Ebrima"/>
+        <a:font script="Olck" typeface="Nirmala UI"/>
+        <a:font script="Osma" typeface="Ebrima"/>
+        <a:font script="Phag" typeface="Phagspa"/>
+        <a:font script="Syrn" typeface="Estrangelo Edessa"/>
+        <a:font script="Syrj" typeface="Estrangelo Edessa"/>
+        <a:font script="Syre" typeface="Estrangelo Edessa"/>
+        <a:font script="Sora" typeface="Nirmala UI"/>
+        <a:font script="Tale" typeface="Microsoft Tai Le"/>
+        <a:font script="Talu" typeface="Microsoft New Tai Lue"/>
+        <a:font script="Tfng" typeface="Ebrima"/>
       </a:minorFont>
     </a:fontScheme>
     <a:fmtScheme name="Office">
@@ -17079,200 +17423,141 @@
           <a:gsLst>
             <a:gs pos="0">
               <a:schemeClr val="phClr">
-                <a:tint val="50000"/>
-                <a:satMod val="300000"/>
+                <a:lumMod val="110000"/>
+                <a:satMod val="105000"/>
+                <a:tint val="67000"/>
               </a:schemeClr>
             </a:gs>
-            <a:gs pos="35000">
+            <a:gs pos="50000">
               <a:schemeClr val="phClr">
-                <a:tint val="37000"/>
-                <a:satMod val="300000"/>
+                <a:lumMod val="105000"/>
+                <a:satMod val="103000"/>
+                <a:tint val="73000"/>
               </a:schemeClr>
             </a:gs>
             <a:gs pos="100000">
               <a:schemeClr val="phClr">
-                <a:tint val="15000"/>
-                <a:satMod val="350000"/>
+                <a:lumMod val="105000"/>
+                <a:satMod val="109000"/>
+                <a:tint val="81000"/>
               </a:schemeClr>
             </a:gs>
           </a:gsLst>
-          <a:lin ang="16200000" scaled="1"/>
+          <a:lin ang="5400000" scaled="0"/>
         </a:gradFill>
         <a:gradFill rotWithShape="1">
           <a:gsLst>
             <a:gs pos="0">
               <a:schemeClr val="phClr">
-                <a:tint val="100000"/>
+                <a:satMod val="103000"/>
+                <a:lumMod val="102000"/>
+                <a:tint val="94000"/>
+              </a:schemeClr>
+            </a:gs>
+            <a:gs pos="50000">
+              <a:schemeClr val="phClr">
+                <a:satMod val="110000"/>
+                <a:lumMod val="100000"/>
                 <a:shade val="100000"/>
-                <a:satMod val="130000"/>
               </a:schemeClr>
             </a:gs>
             <a:gs pos="100000">
               <a:schemeClr val="phClr">
-                <a:tint val="50000"/>
-                <a:shade val="100000"/>
-                <a:satMod val="350000"/>
+                <a:lumMod val="99000"/>
+                <a:satMod val="120000"/>
+                <a:shade val="78000"/>
               </a:schemeClr>
             </a:gs>
           </a:gsLst>
-          <a:lin ang="16200000" scaled="0"/>
+          <a:lin ang="5400000" scaled="0"/>
         </a:gradFill>
       </a:fillStyleLst>
       <a:lnStyleLst>
-        <a:ln w="9525" cap="flat" cmpd="sng" algn="ctr">
-          <a:solidFill>
-            <a:schemeClr val="phClr">
-              <a:shade val="95000"/>
-              <a:satMod val="105000"/>
-            </a:schemeClr>
-          </a:solidFill>
-          <a:prstDash val="solid"/>
-        </a:ln>
-        <a:ln w="25400" cap="flat" cmpd="sng" algn="ctr">
+        <a:ln w="6350" cap="flat" cmpd="sng" algn="ctr">
           <a:solidFill>
             <a:schemeClr val="phClr"/>
           </a:solidFill>
           <a:prstDash val="solid"/>
+          <a:miter lim="800000"/>
         </a:ln>
-        <a:ln w="38100" cap="flat" cmpd="sng" algn="ctr">
+        <a:ln w="12700" cap="flat" cmpd="sng" algn="ctr">
           <a:solidFill>
             <a:schemeClr val="phClr"/>
           </a:solidFill>
           <a:prstDash val="solid"/>
+          <a:miter lim="800000"/>
+        </a:ln>
+        <a:ln w="19050" cap="flat" cmpd="sng" algn="ctr">
+          <a:solidFill>
+            <a:schemeClr val="phClr"/>
+          </a:solidFill>
+          <a:prstDash val="solid"/>
+          <a:miter lim="800000"/>
         </a:ln>
       </a:lnStyleLst>
       <a:effectStyleLst>
         <a:effectStyle>
+          <a:effectLst/>
+        </a:effectStyle>
+        <a:effectStyle>
+          <a:effectLst/>
+        </a:effectStyle>
+        <a:effectStyle>
           <a:effectLst>
-            <a:outerShdw blurRad="40000" dist="20000" dir="5400000" rotWithShape="0">
+            <a:outerShdw blurRad="57150" dist="19050" dir="5400000" algn="ctr" rotWithShape="0">
               <a:srgbClr val="000000">
-                <a:alpha val="38000"/>
+                <a:alpha val="63000"/>
               </a:srgbClr>
             </a:outerShdw>
           </a:effectLst>
-        </a:effectStyle>
-        <a:effectStyle>
-          <a:effectLst>
-            <a:outerShdw blurRad="40000" dist="23000" dir="5400000" rotWithShape="0">
-              <a:srgbClr val="000000">
-                <a:alpha val="35000"/>
-              </a:srgbClr>
-            </a:outerShdw>
-          </a:effectLst>
-        </a:effectStyle>
-        <a:effectStyle>
-          <a:effectLst>
-            <a:outerShdw blurRad="40000" dist="23000" dir="5400000" rotWithShape="0">
-              <a:srgbClr val="000000">
-                <a:alpha val="35000"/>
-              </a:srgbClr>
-            </a:outerShdw>
-          </a:effectLst>
-          <a:scene3d>
-            <a:camera prst="orthographicFront">
-              <a:rot lat="0" lon="0" rev="0"/>
-            </a:camera>
-            <a:lightRig rig="threePt" dir="t">
-              <a:rot lat="0" lon="0" rev="1200000"/>
-            </a:lightRig>
-          </a:scene3d>
-          <a:sp3d>
-            <a:bevelT w="63500" h="25400"/>
-          </a:sp3d>
         </a:effectStyle>
       </a:effectStyleLst>
       <a:bgFillStyleLst>
         <a:solidFill>
           <a:schemeClr val="phClr"/>
         </a:solidFill>
+        <a:solidFill>
+          <a:schemeClr val="phClr">
+            <a:tint val="95000"/>
+            <a:satMod val="170000"/>
+          </a:schemeClr>
+        </a:solidFill>
         <a:gradFill rotWithShape="1">
           <a:gsLst>
             <a:gs pos="0">
               <a:schemeClr val="phClr">
-                <a:tint val="40000"/>
-                <a:satMod val="350000"/>
+                <a:tint val="93000"/>
+                <a:satMod val="150000"/>
+                <a:shade val="98000"/>
+                <a:lumMod val="102000"/>
               </a:schemeClr>
             </a:gs>
-            <a:gs pos="40000">
+            <a:gs pos="50000">
               <a:schemeClr val="phClr">
-                <a:tint val="45000"/>
-                <a:shade val="99000"/>
-                <a:satMod val="350000"/>
+                <a:tint val="98000"/>
+                <a:satMod val="130000"/>
+                <a:shade val="90000"/>
+                <a:lumMod val="103000"/>
               </a:schemeClr>
             </a:gs>
             <a:gs pos="100000">
               <a:schemeClr val="phClr">
-                <a:shade val="20000"/>
-                <a:satMod val="255000"/>
+                <a:shade val="63000"/>
+                <a:satMod val="120000"/>
               </a:schemeClr>
             </a:gs>
           </a:gsLst>
-          <a:path path="circle">
-            <a:fillToRect l="50000" t="-80000" r="50000" b="180000"/>
-          </a:path>
-        </a:gradFill>
-        <a:gradFill rotWithShape="1">
-          <a:gsLst>
-            <a:gs pos="0">
-              <a:schemeClr val="phClr">
-                <a:tint val="80000"/>
-                <a:satMod val="300000"/>
-              </a:schemeClr>
-            </a:gs>
-            <a:gs pos="100000">
-              <a:schemeClr val="phClr">
-                <a:shade val="30000"/>
-                <a:satMod val="200000"/>
-              </a:schemeClr>
-            </a:gs>
-          </a:gsLst>
-          <a:path path="circle">
-            <a:fillToRect l="50000" t="50000" r="50000" b="50000"/>
-          </a:path>
+          <a:lin ang="5400000" scaled="0"/>
         </a:gradFill>
       </a:bgFillStyleLst>
     </a:fmtScheme>
   </a:themeElements>
-  <a:objectDefaults>
-    <a:spDef>
-      <a:spPr/>
-      <a:bodyPr/>
-      <a:lstStyle/>
-      <a:style>
-        <a:lnRef idx="1">
-          <a:schemeClr val="accent1"/>
-        </a:lnRef>
-        <a:fillRef idx="3">
-          <a:schemeClr val="accent1"/>
-        </a:fillRef>
-        <a:effectRef idx="2">
-          <a:schemeClr val="accent1"/>
-        </a:effectRef>
-        <a:fontRef idx="minor">
-          <a:schemeClr val="lt1"/>
-        </a:fontRef>
-      </a:style>
-    </a:spDef>
-    <a:lnDef>
-      <a:spPr/>
-      <a:bodyPr/>
-      <a:lstStyle/>
-      <a:style>
-        <a:lnRef idx="2">
-          <a:schemeClr val="accent1"/>
-        </a:lnRef>
-        <a:fillRef idx="0">
-          <a:schemeClr val="accent1"/>
-        </a:fillRef>
-        <a:effectRef idx="1">
-          <a:schemeClr val="accent1"/>
-        </a:effectRef>
-        <a:fontRef idx="minor">
-          <a:schemeClr val="tx1"/>
-        </a:fontRef>
-      </a:style>
-    </a:lnDef>
-  </a:objectDefaults>
+  <a:objectDefaults/>
   <a:extraClrSchemeLst/>
+  <a:extLst>
+    <a:ext uri="{05A4C25C-085E-4340-85A3-A5531E510DB2}">
+      <thm15:themeFamily xmlns:thm15="http://schemas.microsoft.com/office/thememl/2012/main" name="Office Theme" id="{62F939B6-93AF-4DB8-9C6B-D6C7DFDC589F}" vid="{4A3C46E8-61CC-4603-A589-7422A47A8E4A}"/>
+    </a:ext>
+  </a:extLst>
 </a:theme>
 </file>